--- a/docs/工場ユニフォーム検討資料.pptx
+++ b/docs/工場ユニフォーム検討資料.pptx
@@ -17,9 +17,10 @@
     <p:sldId id="265" r:id="rId11"/>
     <p:sldId id="266" r:id="rId12"/>
     <p:sldId id="267" r:id="rId13"/>
+    <p:sldId id="268" r:id="rId14"/>
   </p:sldIdLst>
   <p:notesMasterIdLst>
-    <p:notesMasterId r:id="rId14"/>
+    <p:notesMasterId r:id="rId15"/>
   </p:notesMasterIdLst>
   <p:sldSz cx="12192000" cy="6858000"/>
   <p:notesSz cx="6858000" cy="12192000"/>
@@ -144,7 +145,7 @@
                 </a:solidFill>
                 <a:latin typeface="Meiryo"/>
               </a:rPr>
-              <a:t>パターン別の概算総額（万円）</a:t>
+              <a:t>パターン別の概算総額（万円・幅で表示）</a:t>
             </a:r>
           </a:p>
         </c:rich>
@@ -168,7 +169,7 @@
               <c:strCache>
                 <c:ptCount val="1"/>
                 <c:pt idx="0">
-                  <c:v>30名分の概算費用（万円）</c:v>
+                  <c:v>下限（万円）</c:v>
                 </c:pt>
               </c:strCache>
             </c:strRef>
@@ -181,13 +182,13 @@
           </c:spPr>
           <c:invertIfNegative val="0"/>
           <c:dLbls>
-            <c:numFmt formatCode="0.0&quot;万円&quot;" sourceLinked="0"/>
+            <c:numFmt formatCode="#,##0" sourceLinked="0"/>
             <c:txPr>
               <a:bodyPr/>
               <a:lstStyle/>
               <a:p>
                 <a:pPr>
-                  <a:defRPr b="0" i="0" strike="noStrike" sz="1200" u="none">
+                  <a:defRPr b="0" i="0" strike="noStrike" sz="1000" u="none">
                     <a:solidFill>
                       <a:srgbClr val="1B2233"/>
                     </a:solidFill>
@@ -230,26 +231,109 @@
                 <c:formatCode>General</c:formatCode>
                 <c:ptCount val="3"/>
                 <c:pt idx="0">
-                  <c:v>18.1</c:v>
+                  <c:v>11.9</c:v>
                 </c:pt>
                 <c:pt idx="1">
-                  <c:v>31.8</c:v>
+                  <c:v>31.2</c:v>
                 </c:pt>
                 <c:pt idx="2">
-                  <c:v>47.5</c:v>
+                  <c:v>46.2</c:v>
+                </c:pt>
+              </c:numCache>
+            </c:numRef>
+          </c:val>
+        </c:ser>
+        <c:ser>
+          <c:idx val="1"/>
+          <c:order val="1"/>
+          <c:tx>
+            <c:strRef>
+              <c:f>Sheet1!$C$1</c:f>
+              <c:strCache>
+                <c:ptCount val="1"/>
+                <c:pt idx="0">
+                  <c:v>上限（万円）</c:v>
+                </c:pt>
+              </c:strCache>
+            </c:strRef>
+          </c:tx>
+          <c:spPr>
+            <a:solidFill>
+              <a:srgbClr val="8E9CC4"/>
+            </a:solidFill>
+            <a:effectLst/>
+          </c:spPr>
+          <c:invertIfNegative val="0"/>
+          <c:dLbls>
+            <c:numFmt formatCode="#,##0" sourceLinked="0"/>
+            <c:txPr>
+              <a:bodyPr/>
+              <a:lstStyle/>
+              <a:p>
+                <a:pPr>
+                  <a:defRPr b="0" i="0" strike="noStrike" sz="1000" u="none">
+                    <a:solidFill>
+                      <a:srgbClr val="1B2233"/>
+                    </a:solidFill>
+                    <a:latin typeface="Meiryo"/>
+                  </a:defRPr>
+                </a:pPr>
+              </a:p>
+            </c:txPr>
+            <c:showLegendKey val="0"/>
+            <c:showVal val="1"/>
+            <c:showCatName val="0"/>
+            <c:showSerName val="0"/>
+            <c:showPercent val="0"/>
+            <c:showBubbleSize val="0"/>
+            <c:showLeaderLines val="0"/>
+          </c:dLbls>
+          <c:cat>
+            <c:multiLvlStrRef>
+              <c:f>Sheet1!$A$2:$A$4</c:f>
+              <c:multiLvlStrCache>
+                <c:ptCount val="3"/>
+                <c:lvl>
+                  <c:pt idx="0">
+                    <c:v>③ 既製品＋名入れ</c:v>
+                  </c:pt>
+                  <c:pt idx="1">
+                    <c:v>② 小ロットオーダー</c:v>
+                  </c:pt>
+                  <c:pt idx="2">
+                    <c:v>① フルオーダー</c:v>
+                  </c:pt>
+                </c:lvl>
+              </c:multiLvlStrCache>
+            </c:multiLvlStrRef>
+          </c:cat>
+          <c:val>
+            <c:numRef>
+              <c:f>Sheet1!$C$2:$C$4</c:f>
+              <c:numCache>
+                <c:formatCode>General</c:formatCode>
+                <c:ptCount val="3"/>
+                <c:pt idx="0">
+                  <c:v>26.9</c:v>
+                </c:pt>
+                <c:pt idx="1">
+                  <c:v>46.2</c:v>
+                </c:pt>
+                <c:pt idx="2">
+                  <c:v>55.2</c:v>
                 </c:pt>
               </c:numCache>
             </c:numRef>
           </c:val>
         </c:ser>
         <c:dLbls>
-          <c:numFmt formatCode="0.0&quot;万円&quot;" sourceLinked="0"/>
+          <c:numFmt formatCode="#,##0" sourceLinked="0"/>
           <c:txPr>
             <a:bodyPr/>
             <a:lstStyle/>
             <a:p>
               <a:pPr>
-                <a:defRPr b="0" i="0" strike="noStrike" sz="1200" u="none">
+                <a:defRPr b="0" i="0" strike="noStrike" sz="1000" u="none">
                   <a:solidFill>
                     <a:srgbClr val="1B2233"/>
                   </a:solidFill>
@@ -266,7 +350,7 @@
           <c:showBubbleSize val="0"/>
           <c:showLeaderLines val="0"/>
         </c:dLbls>
-        <c:gapWidth val="60"/>
+        <c:gapWidth val="40"/>
         <c:overlap val="0"/>
         <c:axId val="2094734554"/>
         <c:axId val="2094734552"/>
@@ -372,6 +456,26 @@
         <a:effectLst/>
       </c:spPr>
     </c:plotArea>
+    <c:legend>
+      <c:legendPos val="b"/>
+      <c:overlay val="0"/>
+      <c:txPr>
+        <a:bodyPr/>
+        <a:lstStyle/>
+        <a:p>
+          <a:pPr>
+            <a:defRPr sz="1000">
+              <a:solidFill>
+                <a:srgbClr val="5A6483"/>
+              </a:solidFill>
+              <a:latin typeface="Meiryo"/>
+              <a:cs typeface="Meiryo"/>
+            </a:defRPr>
+          </a:pPr>
+          <a:endParaRPr lang="en-US"/>
+        </a:p>
+      </c:txPr>
+    </c:legend>
     <c:plotVisOnly val="1"/>
     <c:dispBlanksAs val="span"/>
   </c:chart>
@@ -1089,6 +1193,94 @@
 </p:notes>
 </file>
 
+<file path=ppt/notesSlides/notesSlide13.xml><?xml version="1.0" encoding="utf-8"?>
+<p:notes xmlns:a="http://schemas.openxmlformats.org/drawingml/2006/main" xmlns:r="http://schemas.openxmlformats.org/officeDocument/2006/relationships" xmlns:p="http://schemas.openxmlformats.org/presentationml/2006/main">
+  <p:cSld>
+    <p:spTree>
+      <p:nvGrpSpPr>
+        <p:cNvPr id="1" name=""/>
+        <p:cNvGrpSpPr/>
+        <p:nvPr/>
+      </p:nvGrpSpPr>
+      <p:grpSpPr>
+        <a:xfrm>
+          <a:off x="0" y="0"/>
+          <a:ext cx="0" cy="0"/>
+          <a:chOff x="0" y="0"/>
+          <a:chExt cx="0" cy="0"/>
+        </a:xfrm>
+      </p:grpSpPr>
+      <p:sp>
+        <p:nvSpPr>
+          <p:cNvPr id="2" name="Slide Image Placeholder 1"/>
+          <p:cNvSpPr>
+            <a:spLocks noGrp="1" noRot="1" noChangeAspect="1"/>
+          </p:cNvSpPr>
+          <p:nvPr>
+            <p:ph type="sldImg"/>
+          </p:nvPr>
+        </p:nvSpPr>
+        <p:spPr/>
+      </p:sp>
+      <p:sp>
+        <p:nvSpPr>
+          <p:cNvPr id="3" name="Notes Placeholder 2"/>
+          <p:cNvSpPr>
+            <a:spLocks noGrp="1"/>
+          </p:cNvSpPr>
+          <p:nvPr>
+            <p:ph type="body" idx="1"/>
+          </p:nvPr>
+        </p:nvSpPr>
+        <p:spPr/>
+        <p:txBody>
+          <a:bodyPr/>
+          <a:lstStyle/>
+          <a:p>
+            <a:r>
+              <a:rPr lang="en-US" dirty="0"/>
+              <a:t/>
+            </a:r>
+            <a:endParaRPr lang="en-US" dirty="0"/>
+          </a:p>
+        </p:txBody>
+      </p:sp>
+      <p:sp>
+        <p:nvSpPr>
+          <p:cNvPr id="4" name="Slide Number Placeholder 3"/>
+          <p:cNvSpPr>
+            <a:spLocks noGrp="1"/>
+          </p:cNvSpPr>
+          <p:nvPr>
+            <p:ph type="sldNum" sz="quarter" idx="10"/>
+          </p:nvPr>
+        </p:nvSpPr>
+        <p:spPr/>
+        <p:txBody>
+          <a:bodyPr/>
+          <a:lstStyle/>
+          <a:p>
+            <a:fld id="{F7021451-1387-4CA6-816F-3879F97B5CBC}" type="slidenum">
+              <a:rPr lang="en-US"/>
+              <a:t>13</a:t>
+            </a:fld>
+            <a:endParaRPr lang="en-US"/>
+          </a:p>
+        </p:txBody>
+      </p:sp>
+    </p:spTree>
+    <p:extLst>
+      <p:ext uri="{BB962C8B-B14F-4D97-AF65-F5344CB8AC3E}">
+        <p14:creationId xmlns:p14="http://schemas.microsoft.com/office/powerpoint/2010/main" val="1024086991"/>
+      </p:ext>
+    </p:extLst>
+  </p:cSld>
+  <p:clrMapOvr>
+    <a:masterClrMapping/>
+  </p:clrMapOvr>
+</p:notes>
+</file>
+
 <file path=ppt/notesSlides/notesSlide2.xml><?xml version="1.0" encoding="utf-8"?>
 <p:notes xmlns:a="http://schemas.openxmlformats.org/drawingml/2006/main" xmlns:r="http://schemas.openxmlformats.org/officeDocument/2006/relationships" xmlns:p="http://schemas.openxmlformats.org/presentationml/2006/main">
   <p:cSld>
@@ -1135,7 +1327,7 @@
           <a:p>
             <a:r>
               <a:rPr lang="en-US" dirty="0"/>
-              <a:t>金額はいずれも各社公開情報および業界相場からの目安。正式には見積依頼が必要。</a:t>
+              <a:t>数値の出典と確度は「数値の出典と確度」ページを参照。公表されていない項目は要見積。</a:t>
             </a:r>
             <a:endParaRPr lang="en-US" dirty="0"/>
           </a:p>
@@ -1311,7 +1503,7 @@
           <a:p>
             <a:r>
               <a:rPr lang="en-US" dirty="0"/>
-              <a:t>候補①②は後輩の一次調査から。候補③は「一般サイトで発注した場合」の比較軸として追加。</a:t>
+              <a:t>①の50セット・2〜3ヶ月という数値は一次調査のメモにあったもので、公開サイト上では確認できていない。見積で確定させる。</a:t>
             </a:r>
             <a:endParaRPr lang="en-US" dirty="0"/>
           </a:p>
@@ -2542,7 +2734,7 @@
         <p:spPr>
           <a:xfrm>
             <a:off x="548640" y="2130552"/>
-            <a:ext cx="2194560" cy="548640"/>
+            <a:ext cx="2377440" cy="548640"/>
           </a:xfrm>
           <a:prstGeom prst="rect">
             <a:avLst/>
@@ -2558,7 +2750,7 @@
               <a:buNone/>
             </a:pPr>
             <a:r>
-              <a:rPr lang="en-US" sz="1300" b="1" dirty="0">
+              <a:rPr lang="en-US" sz="1250" b="1" dirty="0">
                 <a:solidFill>
                   <a:srgbClr val="E39B2E"/>
                 </a:solidFill>
@@ -2568,7 +2760,7 @@
               </a:rPr>
               <a:t>③ 既製品＋名入れ</a:t>
             </a:r>
-            <a:endParaRPr lang="en-US" sz="1300" dirty="0"/>
+            <a:endParaRPr lang="en-US" sz="1250" dirty="0"/>
           </a:p>
         </p:txBody>
       </p:sp>
@@ -2580,7 +2772,7 @@
         </p:nvSpPr>
         <p:spPr>
           <a:xfrm>
-            <a:off x="2834640" y="2148840"/>
+            <a:off x="3017520" y="2148840"/>
             <a:ext cx="1737360" cy="530352"/>
           </a:xfrm>
           <a:prstGeom prst="roundRect">
@@ -2607,7 +2799,7 @@
         </p:nvSpPr>
         <p:spPr>
           <a:xfrm>
-            <a:off x="2834640" y="2148840"/>
+            <a:off x="3017520" y="2148840"/>
             <a:ext cx="1737360" cy="530352"/>
           </a:xfrm>
           <a:prstGeom prst="rect">
@@ -2646,7 +2838,7 @@
         </p:nvSpPr>
         <p:spPr>
           <a:xfrm>
-            <a:off x="4663440" y="2148840"/>
+            <a:off x="4846320" y="2148840"/>
             <a:ext cx="1280160" cy="530352"/>
           </a:xfrm>
           <a:prstGeom prst="roundRect">
@@ -2675,7 +2867,7 @@
         </p:nvSpPr>
         <p:spPr>
           <a:xfrm>
-            <a:off x="4663440" y="2148840"/>
+            <a:off x="4846320" y="2148840"/>
             <a:ext cx="1280160" cy="530352"/>
           </a:xfrm>
           <a:prstGeom prst="rect">
@@ -2714,7 +2906,7 @@
         </p:nvSpPr>
         <p:spPr>
           <a:xfrm>
-            <a:off x="6035040" y="2148840"/>
+            <a:off x="6217920" y="2148840"/>
             <a:ext cx="1737360" cy="530352"/>
           </a:xfrm>
           <a:prstGeom prst="roundRect">
@@ -2743,7 +2935,7 @@
         </p:nvSpPr>
         <p:spPr>
           <a:xfrm>
-            <a:off x="6035040" y="2148840"/>
+            <a:off x="6217920" y="2148840"/>
             <a:ext cx="1737360" cy="530352"/>
           </a:xfrm>
           <a:prstGeom prst="rect">
@@ -2783,7 +2975,7 @@
         <p:spPr>
           <a:xfrm>
             <a:off x="548640" y="3364992"/>
-            <a:ext cx="2194560" cy="548640"/>
+            <a:ext cx="2377440" cy="548640"/>
           </a:xfrm>
           <a:prstGeom prst="rect">
             <a:avLst/>
@@ -2799,7 +2991,7 @@
               <a:buNone/>
             </a:pPr>
             <a:r>
-              <a:rPr lang="en-US" sz="1300" b="1" dirty="0">
+              <a:rPr lang="en-US" sz="1250" b="1" dirty="0">
                 <a:solidFill>
                   <a:srgbClr val="2E5A8C"/>
                 </a:solidFill>
@@ -2807,9 +2999,9 @@
                 <a:ea typeface="Meiryo" pitchFamily="34" charset="-122"/>
                 <a:cs typeface="Meiryo" pitchFamily="34" charset="-120"/>
               </a:rPr>
-              <a:t>② 小ロットオーダー</a:t>
-            </a:r>
-            <a:endParaRPr lang="en-US" sz="1300" dirty="0"/>
+              <a:t>② 小ロットオーダー（国内）</a:t>
+            </a:r>
+            <a:endParaRPr lang="en-US" sz="1250" dirty="0"/>
           </a:p>
         </p:txBody>
       </p:sp>
@@ -2821,7 +3013,7 @@
         </p:nvSpPr>
         <p:spPr>
           <a:xfrm>
-            <a:off x="2834640" y="3383280"/>
+            <a:off x="3017520" y="3383280"/>
             <a:ext cx="2377440" cy="530352"/>
           </a:xfrm>
           <a:prstGeom prst="roundRect">
@@ -2848,7 +3040,7 @@
         </p:nvSpPr>
         <p:spPr>
           <a:xfrm>
-            <a:off x="2834640" y="3383280"/>
+            <a:off x="3017520" y="3383280"/>
             <a:ext cx="2377440" cy="530352"/>
           </a:xfrm>
           <a:prstGeom prst="rect">
@@ -2887,7 +3079,7 @@
         </p:nvSpPr>
         <p:spPr>
           <a:xfrm>
-            <a:off x="5303520" y="3383280"/>
+            <a:off x="5486400" y="3383280"/>
             <a:ext cx="2743200" cy="530352"/>
           </a:xfrm>
           <a:prstGeom prst="roundRect">
@@ -2916,7 +3108,7 @@
         </p:nvSpPr>
         <p:spPr>
           <a:xfrm>
-            <a:off x="5303520" y="3383280"/>
+            <a:off x="5486400" y="3383280"/>
             <a:ext cx="2743200" cy="530352"/>
           </a:xfrm>
           <a:prstGeom prst="rect">
@@ -2955,7 +3147,7 @@
         </p:nvSpPr>
         <p:spPr>
           <a:xfrm>
-            <a:off x="8138160" y="3383280"/>
+            <a:off x="8321040" y="3383280"/>
             <a:ext cx="3108960" cy="530352"/>
           </a:xfrm>
           <a:prstGeom prst="roundRect">
@@ -2984,7 +3176,7 @@
         </p:nvSpPr>
         <p:spPr>
           <a:xfrm>
-            <a:off x="8138160" y="3383280"/>
+            <a:off x="8321040" y="3383280"/>
             <a:ext cx="3108960" cy="530352"/>
           </a:xfrm>
           <a:prstGeom prst="rect">
@@ -3024,7 +3216,7 @@
         <p:spPr>
           <a:xfrm>
             <a:off x="548640" y="4599432"/>
-            <a:ext cx="2194560" cy="548640"/>
+            <a:ext cx="2377440" cy="548640"/>
           </a:xfrm>
           <a:prstGeom prst="rect">
             <a:avLst/>
@@ -3040,7 +3232,7 @@
               <a:buNone/>
             </a:pPr>
             <a:r>
-              <a:rPr lang="en-US" sz="1300" b="1" dirty="0">
+              <a:rPr lang="en-US" sz="1250" b="1" dirty="0">
                 <a:solidFill>
                   <a:srgbClr val="1E2761"/>
                 </a:solidFill>
@@ -3050,7 +3242,7 @@
               </a:rPr>
               <a:t>① フルオーダー</a:t>
             </a:r>
-            <a:endParaRPr lang="en-US" sz="1300" dirty="0"/>
+            <a:endParaRPr lang="en-US" sz="1250" dirty="0"/>
           </a:p>
         </p:txBody>
       </p:sp>
@@ -3062,8 +3254,8 @@
         </p:nvSpPr>
         <p:spPr>
           <a:xfrm>
-            <a:off x="2834640" y="4617720"/>
-            <a:ext cx="2194560" cy="530352"/>
+            <a:off x="3017520" y="4617720"/>
+            <a:ext cx="2103120" cy="530352"/>
           </a:xfrm>
           <a:prstGeom prst="roundRect">
             <a:avLst>
@@ -3089,8 +3281,8 @@
         </p:nvSpPr>
         <p:spPr>
           <a:xfrm>
-            <a:off x="2834640" y="4617720"/>
-            <a:ext cx="2194560" cy="530352"/>
+            <a:off x="3017520" y="4617720"/>
+            <a:ext cx="2103120" cy="530352"/>
           </a:xfrm>
           <a:prstGeom prst="rect">
             <a:avLst/>
@@ -3128,8 +3320,8 @@
         </p:nvSpPr>
         <p:spPr>
           <a:xfrm>
-            <a:off x="5120640" y="4617720"/>
-            <a:ext cx="2926080" cy="530352"/>
+            <a:off x="5212080" y="4617720"/>
+            <a:ext cx="2834640" cy="530352"/>
           </a:xfrm>
           <a:prstGeom prst="roundRect">
             <a:avLst>
@@ -3157,8 +3349,8 @@
         </p:nvSpPr>
         <p:spPr>
           <a:xfrm>
-            <a:off x="5120640" y="4617720"/>
-            <a:ext cx="2926080" cy="530352"/>
+            <a:off x="5212080" y="4617720"/>
+            <a:ext cx="2834640" cy="530352"/>
           </a:xfrm>
           <a:prstGeom prst="rect">
             <a:avLst/>
@@ -3197,7 +3389,7 @@
         <p:spPr>
           <a:xfrm>
             <a:off x="8138160" y="4617720"/>
-            <a:ext cx="3657600" cy="530352"/>
+            <a:ext cx="3291840" cy="530352"/>
           </a:xfrm>
           <a:prstGeom prst="roundRect">
             <a:avLst>
@@ -3226,7 +3418,7 @@
         <p:spPr>
           <a:xfrm>
             <a:off x="8138160" y="4617720"/>
-            <a:ext cx="3657600" cy="530352"/>
+            <a:ext cx="3291840" cy="530352"/>
           </a:xfrm>
           <a:prstGeom prst="rect">
             <a:avLst/>
@@ -3264,7 +3456,7 @@
         </p:nvSpPr>
         <p:spPr>
           <a:xfrm>
-            <a:off x="2834640" y="1645920"/>
+            <a:off x="3017520" y="1645920"/>
             <a:ext cx="1463040" cy="274320"/>
           </a:xfrm>
           <a:prstGeom prst="rect">
@@ -3303,7 +3495,7 @@
         </p:nvSpPr>
         <p:spPr>
           <a:xfrm>
-            <a:off x="4297680" y="1645920"/>
+            <a:off x="4480560" y="1645920"/>
             <a:ext cx="1463040" cy="274320"/>
           </a:xfrm>
           <a:prstGeom prst="rect">
@@ -3342,7 +3534,7 @@
         </p:nvSpPr>
         <p:spPr>
           <a:xfrm>
-            <a:off x="5760720" y="1645920"/>
+            <a:off x="5943600" y="1645920"/>
             <a:ext cx="1463040" cy="274320"/>
           </a:xfrm>
           <a:prstGeom prst="rect">
@@ -3381,7 +3573,7 @@
         </p:nvSpPr>
         <p:spPr>
           <a:xfrm>
-            <a:off x="7223760" y="1645920"/>
+            <a:off x="7406640" y="1645920"/>
             <a:ext cx="1463040" cy="274320"/>
           </a:xfrm>
           <a:prstGeom prst="rect">
@@ -3420,7 +3612,7 @@
         </p:nvSpPr>
         <p:spPr>
           <a:xfrm>
-            <a:off x="8686800" y="1645920"/>
+            <a:off x="8869680" y="1645920"/>
             <a:ext cx="1463040" cy="274320"/>
           </a:xfrm>
           <a:prstGeom prst="rect">
@@ -3459,7 +3651,7 @@
         </p:nvSpPr>
         <p:spPr>
           <a:xfrm>
-            <a:off x="10149840" y="1645920"/>
+            <a:off x="10332720" y="1645920"/>
             <a:ext cx="1463040" cy="274320"/>
           </a:xfrm>
           <a:prstGeom prst="rect">
@@ -3498,12 +3690,12 @@
         </p:nvSpPr>
         <p:spPr>
           <a:xfrm>
-            <a:off x="548640" y="5623560"/>
-            <a:ext cx="11064240" cy="777240"/>
+            <a:off x="548640" y="5532120"/>
+            <a:ext cx="11064240" cy="914400"/>
           </a:xfrm>
           <a:prstGeom prst="roundRect">
             <a:avLst>
-              <a:gd name="adj" fmla="val 9412"/>
+              <a:gd name="adj" fmla="val 8000"/>
             </a:avLst>
           </a:prstGeom>
           <a:solidFill>
@@ -3525,8 +3717,8 @@
         </p:nvSpPr>
         <p:spPr>
           <a:xfrm>
-            <a:off x="868680" y="5623560"/>
-            <a:ext cx="10424160" cy="777240"/>
+            <a:off x="868680" y="5532120"/>
+            <a:ext cx="10424160" cy="914400"/>
           </a:xfrm>
           <a:prstGeom prst="rect">
             <a:avLst/>
@@ -3539,6 +3731,9 @@
           <a:lstStyle/>
           <a:p>
             <a:pPr indent="0" marL="0">
+              <a:lnSpc>
+                <a:spcPts val="1800"/>
+              </a:lnSpc>
               <a:buNone/>
             </a:pPr>
             <a:r>
@@ -3550,7 +3745,7 @@
                 <a:ea typeface="Meiryo" pitchFamily="34" charset="-122"/>
                 <a:cs typeface="Meiryo" pitchFamily="34" charset="-120"/>
               </a:rPr>
-              <a:t>納期は「発注確定後」の期間。実際にはこの前に社内での仕様決定・稟議期間が必要なため、着用希望日から逆算して1ヶ月程度の余裕を見込む。</a:t>
+              <a:t>納期は「発注確定後」の期間。海外縫製の場合は6〜8ヶ月、染色工程が入るとさらに+2ヶ月。社内での仕様決定・稟議期間も別途必要なため、着用希望日から1ヶ月以上の余裕を見込む。</a:t>
             </a:r>
             <a:endParaRPr lang="en-US" sz="1200" dirty="0"/>
           </a:p>
@@ -4909,7 +5104,7 @@
                 <a:ea typeface="Meiryo" pitchFamily="34" charset="-122"/>
                 <a:cs typeface="Meiryo" pitchFamily="34" charset="-120"/>
               </a:rPr>
-              <a:t>APPENDIX</a:t>
+              <a:t>EVIDENCE</a:t>
             </a:r>
             <a:endParaRPr lang="en-US" sz="1200" dirty="0"/>
           </a:p>
@@ -4948,7 +5143,7 @@
                 <a:ea typeface="Meiryo" pitchFamily="34" charset="-122"/>
                 <a:cs typeface="Meiryo" pitchFamily="34" charset="-120"/>
               </a:rPr>
-              <a:t>参照した情報源と留意事項</a:t>
+              <a:t>数値の出典と確度（ここが確定・ここは要見積）</a:t>
             </a:r>
             <a:endParaRPr lang="en-US" sz="3000" dirty="0"/>
           </a:p>
@@ -4957,6 +5152,3228 @@
       <p:graphicFrame>
         <p:nvGraphicFramePr>
           <p:cNvPr id="13" name="Table 0"/>
+          <p:cNvGraphicFramePr>
+            <a:graphicFrameLocks noGrp="1"/>
+          </p:cNvGraphicFramePr>
+          <p:nvPr>
+            <p:extLst>
+              <p:ext uri="{D42A27DB-BD31-4B8C-83A1-F6EECF244321}">
+                <p14:modId xmlns:p14="http://schemas.microsoft.com/office/powerpoint/2010/main" val="1579011935"/>
+              </p:ext>
+            </p:extLst>
+          </p:nvPr>
+        </p:nvGraphicFramePr>
+        <p:xfrm>
+          <a:off x="548640" y="1417320"/>
+          <a:ext cx="11064240" cy="914400"/>
+        </p:xfrm>
+        <a:graphic>
+          <a:graphicData uri="http://schemas.openxmlformats.org/drawingml/2006/table">
+            <a:tbl>
+              <a:tblPr/>
+              <a:tblGrid>
+                <a:gridCol w="2286000"/>
+                <a:gridCol w="3108960"/>
+                <a:gridCol w="4846320"/>
+                <a:gridCol w="822960"/>
+              </a:tblGrid>
+              <a:tr h="365760">
+                <a:tc>
+                  <a:txBody>
+                    <a:bodyPr/>
+                    <a:lstStyle/>
+                    <a:p>
+                      <a:pPr indent="0" marL="0">
+                        <a:buNone/>
+                      </a:pPr>
+                      <a:r>
+                        <a:rPr lang="en-US" sz="1150" b="1" dirty="0">
+                          <a:solidFill>
+                            <a:srgbClr val="FFFFFF"/>
+                          </a:solidFill>
+                          <a:latin typeface="Meiryo" pitchFamily="34" charset="0"/>
+                          <a:ea typeface="Meiryo" pitchFamily="34" charset="-122"/>
+                          <a:cs typeface="Meiryo" pitchFamily="34" charset="-120"/>
+                        </a:rPr>
+                        <a:t>項目</a:t>
+                      </a:r>
+                      <a:endParaRPr lang="en-US" sz="1150" dirty="0">
+                        <a:latin typeface="Meiryo" charset="0"/>
+                        <a:ea typeface="Meiryo" charset="0"/>
+                        <a:cs typeface="Meiryo" charset="0"/>
+                      </a:endParaRPr>
+                    </a:p>
+                  </a:txBody>
+                  <a:tcPr marL="63500" marR="63500" marT="63500" marB="63500" anchor="ctr">
+                    <a:lnL w="12700" cap="flat" cmpd="sng" algn="ctr">
+                      <a:solidFill>
+                        <a:srgbClr val="D6DDEE"/>
+                      </a:solidFill>
+                      <a:prstDash val="solid"/>
+                      <a:round/>
+                      <a:headEnd type="none" w="med" len="med"/>
+                      <a:tailEnd type="none" w="med" len="med"/>
+                    </a:lnL>
+                    <a:lnR w="12700" cap="flat" cmpd="sng" algn="ctr">
+                      <a:solidFill>
+                        <a:srgbClr val="D6DDEE"/>
+                      </a:solidFill>
+                      <a:prstDash val="solid"/>
+                      <a:round/>
+                      <a:headEnd type="none" w="med" len="med"/>
+                      <a:tailEnd type="none" w="med" len="med"/>
+                    </a:lnR>
+                    <a:lnT w="12700" cap="flat" cmpd="sng" algn="ctr">
+                      <a:solidFill>
+                        <a:srgbClr val="D6DDEE"/>
+                      </a:solidFill>
+                      <a:prstDash val="solid"/>
+                      <a:round/>
+                      <a:headEnd type="none" w="med" len="med"/>
+                      <a:tailEnd type="none" w="med" len="med"/>
+                    </a:lnT>
+                    <a:lnB w="12700" cap="flat" cmpd="sng" algn="ctr">
+                      <a:solidFill>
+                        <a:srgbClr val="D6DDEE"/>
+                      </a:solidFill>
+                      <a:prstDash val="solid"/>
+                      <a:round/>
+                      <a:headEnd type="none" w="med" len="med"/>
+                      <a:tailEnd type="none" w="med" len="med"/>
+                    </a:lnB>
+                    <a:solidFill>
+                      <a:srgbClr val="1E2761"/>
+                    </a:solidFill>
+                  </a:tcPr>
+                </a:tc>
+                <a:tc>
+                  <a:txBody>
+                    <a:bodyPr/>
+                    <a:lstStyle/>
+                    <a:p>
+                      <a:pPr indent="0" marL="0">
+                        <a:buNone/>
+                      </a:pPr>
+                      <a:r>
+                        <a:rPr lang="en-US" sz="1150" b="1" dirty="0">
+                          <a:solidFill>
+                            <a:srgbClr val="FFFFFF"/>
+                          </a:solidFill>
+                          <a:latin typeface="Meiryo" pitchFamily="34" charset="0"/>
+                          <a:ea typeface="Meiryo" pitchFamily="34" charset="-122"/>
+                          <a:cs typeface="Meiryo" pitchFamily="34" charset="-120"/>
+                        </a:rPr>
+                        <a:t>数値</a:t>
+                      </a:r>
+                      <a:endParaRPr lang="en-US" sz="1150" dirty="0">
+                        <a:latin typeface="Meiryo" charset="0"/>
+                        <a:ea typeface="Meiryo" charset="0"/>
+                        <a:cs typeface="Meiryo" charset="0"/>
+                      </a:endParaRPr>
+                    </a:p>
+                  </a:txBody>
+                  <a:tcPr marL="63500" marR="63500" marT="63500" marB="63500" anchor="ctr">
+                    <a:lnL w="12700" cap="flat" cmpd="sng" algn="ctr">
+                      <a:solidFill>
+                        <a:srgbClr val="D6DDEE"/>
+                      </a:solidFill>
+                      <a:prstDash val="solid"/>
+                      <a:round/>
+                      <a:headEnd type="none" w="med" len="med"/>
+                      <a:tailEnd type="none" w="med" len="med"/>
+                    </a:lnL>
+                    <a:lnR w="12700" cap="flat" cmpd="sng" algn="ctr">
+                      <a:solidFill>
+                        <a:srgbClr val="D6DDEE"/>
+                      </a:solidFill>
+                      <a:prstDash val="solid"/>
+                      <a:round/>
+                      <a:headEnd type="none" w="med" len="med"/>
+                      <a:tailEnd type="none" w="med" len="med"/>
+                    </a:lnR>
+                    <a:lnT w="12700" cap="flat" cmpd="sng" algn="ctr">
+                      <a:solidFill>
+                        <a:srgbClr val="D6DDEE"/>
+                      </a:solidFill>
+                      <a:prstDash val="solid"/>
+                      <a:round/>
+                      <a:headEnd type="none" w="med" len="med"/>
+                      <a:tailEnd type="none" w="med" len="med"/>
+                    </a:lnT>
+                    <a:lnB w="12700" cap="flat" cmpd="sng" algn="ctr">
+                      <a:solidFill>
+                        <a:srgbClr val="D6DDEE"/>
+                      </a:solidFill>
+                      <a:prstDash val="solid"/>
+                      <a:round/>
+                      <a:headEnd type="none" w="med" len="med"/>
+                      <a:tailEnd type="none" w="med" len="med"/>
+                    </a:lnB>
+                    <a:solidFill>
+                      <a:srgbClr val="1E2761"/>
+                    </a:solidFill>
+                  </a:tcPr>
+                </a:tc>
+                <a:tc>
+                  <a:txBody>
+                    <a:bodyPr/>
+                    <a:lstStyle/>
+                    <a:p>
+                      <a:pPr indent="0" marL="0">
+                        <a:buNone/>
+                      </a:pPr>
+                      <a:r>
+                        <a:rPr lang="en-US" sz="1150" b="1" dirty="0">
+                          <a:solidFill>
+                            <a:srgbClr val="FFFFFF"/>
+                          </a:solidFill>
+                          <a:latin typeface="Meiryo" pitchFamily="34" charset="0"/>
+                          <a:ea typeface="Meiryo" pitchFamily="34" charset="-122"/>
+                          <a:cs typeface="Meiryo" pitchFamily="34" charset="-120"/>
+                        </a:rPr>
+                        <a:t>掲載ページ（確認先）</a:t>
+                      </a:r>
+                      <a:endParaRPr lang="en-US" sz="1150" dirty="0">
+                        <a:latin typeface="Meiryo" charset="0"/>
+                        <a:ea typeface="Meiryo" charset="0"/>
+                        <a:cs typeface="Meiryo" charset="0"/>
+                      </a:endParaRPr>
+                    </a:p>
+                  </a:txBody>
+                  <a:tcPr marL="63500" marR="63500" marT="63500" marB="63500" anchor="ctr">
+                    <a:lnL w="12700" cap="flat" cmpd="sng" algn="ctr">
+                      <a:solidFill>
+                        <a:srgbClr val="D6DDEE"/>
+                      </a:solidFill>
+                      <a:prstDash val="solid"/>
+                      <a:round/>
+                      <a:headEnd type="none" w="med" len="med"/>
+                      <a:tailEnd type="none" w="med" len="med"/>
+                    </a:lnL>
+                    <a:lnR w="12700" cap="flat" cmpd="sng" algn="ctr">
+                      <a:solidFill>
+                        <a:srgbClr val="D6DDEE"/>
+                      </a:solidFill>
+                      <a:prstDash val="solid"/>
+                      <a:round/>
+                      <a:headEnd type="none" w="med" len="med"/>
+                      <a:tailEnd type="none" w="med" len="med"/>
+                    </a:lnR>
+                    <a:lnT w="12700" cap="flat" cmpd="sng" algn="ctr">
+                      <a:solidFill>
+                        <a:srgbClr val="D6DDEE"/>
+                      </a:solidFill>
+                      <a:prstDash val="solid"/>
+                      <a:round/>
+                      <a:headEnd type="none" w="med" len="med"/>
+                      <a:tailEnd type="none" w="med" len="med"/>
+                    </a:lnT>
+                    <a:lnB w="12700" cap="flat" cmpd="sng" algn="ctr">
+                      <a:solidFill>
+                        <a:srgbClr val="D6DDEE"/>
+                      </a:solidFill>
+                      <a:prstDash val="solid"/>
+                      <a:round/>
+                      <a:headEnd type="none" w="med" len="med"/>
+                      <a:tailEnd type="none" w="med" len="med"/>
+                    </a:lnB>
+                    <a:solidFill>
+                      <a:srgbClr val="1E2761"/>
+                    </a:solidFill>
+                  </a:tcPr>
+                </a:tc>
+                <a:tc>
+                  <a:txBody>
+                    <a:bodyPr/>
+                    <a:lstStyle/>
+                    <a:p>
+                      <a:pPr indent="0" marL="0">
+                        <a:buNone/>
+                      </a:pPr>
+                      <a:r>
+                        <a:rPr lang="en-US" sz="1150" b="1" dirty="0">
+                          <a:solidFill>
+                            <a:srgbClr val="FFFFFF"/>
+                          </a:solidFill>
+                          <a:latin typeface="Meiryo" pitchFamily="34" charset="0"/>
+                          <a:ea typeface="Meiryo" pitchFamily="34" charset="-122"/>
+                          <a:cs typeface="Meiryo" pitchFamily="34" charset="-120"/>
+                        </a:rPr>
+                        <a:t>確度</a:t>
+                      </a:r>
+                      <a:endParaRPr lang="en-US" sz="1150" dirty="0">
+                        <a:latin typeface="Meiryo" charset="0"/>
+                        <a:ea typeface="Meiryo" charset="0"/>
+                        <a:cs typeface="Meiryo" charset="0"/>
+                      </a:endParaRPr>
+                    </a:p>
+                  </a:txBody>
+                  <a:tcPr marL="63500" marR="63500" marT="63500" marB="63500" anchor="ctr">
+                    <a:lnL w="12700" cap="flat" cmpd="sng" algn="ctr">
+                      <a:solidFill>
+                        <a:srgbClr val="D6DDEE"/>
+                      </a:solidFill>
+                      <a:prstDash val="solid"/>
+                      <a:round/>
+                      <a:headEnd type="none" w="med" len="med"/>
+                      <a:tailEnd type="none" w="med" len="med"/>
+                    </a:lnL>
+                    <a:lnR w="12700" cap="flat" cmpd="sng" algn="ctr">
+                      <a:solidFill>
+                        <a:srgbClr val="D6DDEE"/>
+                      </a:solidFill>
+                      <a:prstDash val="solid"/>
+                      <a:round/>
+                      <a:headEnd type="none" w="med" len="med"/>
+                      <a:tailEnd type="none" w="med" len="med"/>
+                    </a:lnR>
+                    <a:lnT w="12700" cap="flat" cmpd="sng" algn="ctr">
+                      <a:solidFill>
+                        <a:srgbClr val="D6DDEE"/>
+                      </a:solidFill>
+                      <a:prstDash val="solid"/>
+                      <a:round/>
+                      <a:headEnd type="none" w="med" len="med"/>
+                      <a:tailEnd type="none" w="med" len="med"/>
+                    </a:lnT>
+                    <a:lnB w="12700" cap="flat" cmpd="sng" algn="ctr">
+                      <a:solidFill>
+                        <a:srgbClr val="D6DDEE"/>
+                      </a:solidFill>
+                      <a:prstDash val="solid"/>
+                      <a:round/>
+                      <a:headEnd type="none" w="med" len="med"/>
+                      <a:tailEnd type="none" w="med" len="med"/>
+                    </a:lnB>
+                    <a:solidFill>
+                      <a:srgbClr val="1E2761"/>
+                    </a:solidFill>
+                  </a:tcPr>
+                </a:tc>
+              </a:tr>
+              <a:tr h="365760">
+                <a:tc>
+                  <a:txBody>
+                    <a:bodyPr/>
+                    <a:lstStyle/>
+                    <a:p>
+                      <a:pPr indent="0" marL="0">
+                        <a:buNone/>
+                      </a:pPr>
+                      <a:r>
+                        <a:rPr lang="en-US" sz="950" b="1" dirty="0">
+                          <a:solidFill>
+                            <a:srgbClr val="1E2761"/>
+                          </a:solidFill>
+                          <a:latin typeface="Meiryo" pitchFamily="34" charset="0"/>
+                          <a:ea typeface="Meiryo" pitchFamily="34" charset="-122"/>
+                          <a:cs typeface="Meiryo" pitchFamily="34" charset="-120"/>
+                        </a:rPr>
+                        <a:t>JK：最小ロット</a:t>
+                      </a:r>
+                      <a:endParaRPr lang="en-US" sz="950" dirty="0">
+                        <a:latin typeface="Meiryo" charset="0"/>
+                        <a:ea typeface="Meiryo" charset="0"/>
+                        <a:cs typeface="Meiryo" charset="0"/>
+                      </a:endParaRPr>
+                    </a:p>
+                  </a:txBody>
+                  <a:tcPr marL="63500" marR="63500" marT="63500" marB="63500" anchor="ctr">
+                    <a:lnL w="12700" cap="flat" cmpd="sng" algn="ctr">
+                      <a:solidFill>
+                        <a:srgbClr val="D6DDEE"/>
+                      </a:solidFill>
+                      <a:prstDash val="solid"/>
+                      <a:round/>
+                      <a:headEnd type="none" w="med" len="med"/>
+                      <a:tailEnd type="none" w="med" len="med"/>
+                    </a:lnL>
+                    <a:lnR w="12700" cap="flat" cmpd="sng" algn="ctr">
+                      <a:solidFill>
+                        <a:srgbClr val="D6DDEE"/>
+                      </a:solidFill>
+                      <a:prstDash val="solid"/>
+                      <a:round/>
+                      <a:headEnd type="none" w="med" len="med"/>
+                      <a:tailEnd type="none" w="med" len="med"/>
+                    </a:lnR>
+                    <a:lnT w="12700" cap="flat" cmpd="sng" algn="ctr">
+                      <a:solidFill>
+                        <a:srgbClr val="D6DDEE"/>
+                      </a:solidFill>
+                      <a:prstDash val="solid"/>
+                      <a:round/>
+                      <a:headEnd type="none" w="med" len="med"/>
+                      <a:tailEnd type="none" w="med" len="med"/>
+                    </a:lnT>
+                    <a:lnB w="12700" cap="flat" cmpd="sng" algn="ctr">
+                      <a:solidFill>
+                        <a:srgbClr val="D6DDEE"/>
+                      </a:solidFill>
+                      <a:prstDash val="solid"/>
+                      <a:round/>
+                      <a:headEnd type="none" w="med" len="med"/>
+                      <a:tailEnd type="none" w="med" len="med"/>
+                    </a:lnB>
+                    <a:solidFill>
+                      <a:srgbClr val="FFFFFF"/>
+                    </a:solidFill>
+                  </a:tcPr>
+                </a:tc>
+                <a:tc>
+                  <a:txBody>
+                    <a:bodyPr/>
+                    <a:lstStyle/>
+                    <a:p>
+                      <a:pPr indent="0" marL="0">
+                        <a:buNone/>
+                      </a:pPr>
+                      <a:r>
+                        <a:rPr lang="en-US" sz="950" dirty="0">
+                          <a:solidFill>
+                            <a:srgbClr val="1B2233"/>
+                          </a:solidFill>
+                          <a:latin typeface="Meiryo" pitchFamily="34" charset="0"/>
+                          <a:ea typeface="Meiryo" pitchFamily="34" charset="-122"/>
+                          <a:cs typeface="Meiryo" pitchFamily="34" charset="-120"/>
+                        </a:rPr>
+                        <a:t>20着〜</a:t>
+                      </a:r>
+                      <a:endParaRPr lang="en-US" sz="950" dirty="0">
+                        <a:latin typeface="Meiryo" charset="0"/>
+                        <a:ea typeface="Meiryo" charset="0"/>
+                        <a:cs typeface="Meiryo" charset="0"/>
+                      </a:endParaRPr>
+                    </a:p>
+                  </a:txBody>
+                  <a:tcPr marL="63500" marR="63500" marT="63500" marB="63500" anchor="ctr">
+                    <a:lnL w="12700" cap="flat" cmpd="sng" algn="ctr">
+                      <a:solidFill>
+                        <a:srgbClr val="D6DDEE"/>
+                      </a:solidFill>
+                      <a:prstDash val="solid"/>
+                      <a:round/>
+                      <a:headEnd type="none" w="med" len="med"/>
+                      <a:tailEnd type="none" w="med" len="med"/>
+                    </a:lnL>
+                    <a:lnR w="12700" cap="flat" cmpd="sng" algn="ctr">
+                      <a:solidFill>
+                        <a:srgbClr val="D6DDEE"/>
+                      </a:solidFill>
+                      <a:prstDash val="solid"/>
+                      <a:round/>
+                      <a:headEnd type="none" w="med" len="med"/>
+                      <a:tailEnd type="none" w="med" len="med"/>
+                    </a:lnR>
+                    <a:lnT w="12700" cap="flat" cmpd="sng" algn="ctr">
+                      <a:solidFill>
+                        <a:srgbClr val="D6DDEE"/>
+                      </a:solidFill>
+                      <a:prstDash val="solid"/>
+                      <a:round/>
+                      <a:headEnd type="none" w="med" len="med"/>
+                      <a:tailEnd type="none" w="med" len="med"/>
+                    </a:lnT>
+                    <a:lnB w="12700" cap="flat" cmpd="sng" algn="ctr">
+                      <a:solidFill>
+                        <a:srgbClr val="D6DDEE"/>
+                      </a:solidFill>
+                      <a:prstDash val="solid"/>
+                      <a:round/>
+                      <a:headEnd type="none" w="med" len="med"/>
+                      <a:tailEnd type="none" w="med" len="med"/>
+                    </a:lnB>
+                    <a:solidFill>
+                      <a:srgbClr val="FFFFFF"/>
+                    </a:solidFill>
+                  </a:tcPr>
+                </a:tc>
+                <a:tc>
+                  <a:txBody>
+                    <a:bodyPr/>
+                    <a:lstStyle/>
+                    <a:p>
+                      <a:pPr indent="0" marL="0">
+                        <a:buNone/>
+                      </a:pPr>
+                      <a:r>
+                        <a:rPr lang="en-US" sz="900" dirty="0">
+                          <a:solidFill>
+                            <a:srgbClr val="5A6483"/>
+                          </a:solidFill>
+                          <a:latin typeface="Meiryo" pitchFamily="34" charset="0"/>
+                          <a:ea typeface="Meiryo" pitchFamily="34" charset="-122"/>
+                          <a:cs typeface="Meiryo" pitchFamily="34" charset="-120"/>
+                        </a:rPr>
+                        <a:t>uniform-net.jp/products/small-lot（小ロット専用パターンオーダー）</a:t>
+                      </a:r>
+                      <a:endParaRPr lang="en-US" sz="900" dirty="0">
+                        <a:latin typeface="Meiryo" charset="0"/>
+                        <a:ea typeface="Meiryo" charset="0"/>
+                        <a:cs typeface="Meiryo" charset="0"/>
+                      </a:endParaRPr>
+                    </a:p>
+                  </a:txBody>
+                  <a:tcPr marL="63500" marR="63500" marT="63500" marB="63500" anchor="ctr">
+                    <a:lnL w="12700" cap="flat" cmpd="sng" algn="ctr">
+                      <a:solidFill>
+                        <a:srgbClr val="D6DDEE"/>
+                      </a:solidFill>
+                      <a:prstDash val="solid"/>
+                      <a:round/>
+                      <a:headEnd type="none" w="med" len="med"/>
+                      <a:tailEnd type="none" w="med" len="med"/>
+                    </a:lnL>
+                    <a:lnR w="12700" cap="flat" cmpd="sng" algn="ctr">
+                      <a:solidFill>
+                        <a:srgbClr val="D6DDEE"/>
+                      </a:solidFill>
+                      <a:prstDash val="solid"/>
+                      <a:round/>
+                      <a:headEnd type="none" w="med" len="med"/>
+                      <a:tailEnd type="none" w="med" len="med"/>
+                    </a:lnR>
+                    <a:lnT w="12700" cap="flat" cmpd="sng" algn="ctr">
+                      <a:solidFill>
+                        <a:srgbClr val="D6DDEE"/>
+                      </a:solidFill>
+                      <a:prstDash val="solid"/>
+                      <a:round/>
+                      <a:headEnd type="none" w="med" len="med"/>
+                      <a:tailEnd type="none" w="med" len="med"/>
+                    </a:lnT>
+                    <a:lnB w="12700" cap="flat" cmpd="sng" algn="ctr">
+                      <a:solidFill>
+                        <a:srgbClr val="D6DDEE"/>
+                      </a:solidFill>
+                      <a:prstDash val="solid"/>
+                      <a:round/>
+                      <a:headEnd type="none" w="med" len="med"/>
+                      <a:tailEnd type="none" w="med" len="med"/>
+                    </a:lnB>
+                    <a:solidFill>
+                      <a:srgbClr val="FFFFFF"/>
+                    </a:solidFill>
+                  </a:tcPr>
+                </a:tc>
+                <a:tc>
+                  <a:txBody>
+                    <a:bodyPr/>
+                    <a:lstStyle/>
+                    <a:p>
+                      <a:pPr algn="ctr" indent="0" marL="0">
+                        <a:buNone/>
+                      </a:pPr>
+                      <a:r>
+                        <a:rPr lang="en-US" sz="1200" b="1" dirty="0">
+                          <a:solidFill>
+                            <a:srgbClr val="2E7D5B"/>
+                          </a:solidFill>
+                          <a:latin typeface="Meiryo" pitchFamily="34" charset="0"/>
+                          <a:ea typeface="Meiryo" pitchFamily="34" charset="-122"/>
+                          <a:cs typeface="Meiryo" pitchFamily="34" charset="-120"/>
+                        </a:rPr>
+                        <a:t>A</a:t>
+                      </a:r>
+                      <a:endParaRPr lang="en-US" sz="1200" dirty="0">
+                        <a:latin typeface="Meiryo" charset="0"/>
+                        <a:ea typeface="Meiryo" charset="0"/>
+                        <a:cs typeface="Meiryo" charset="0"/>
+                      </a:endParaRPr>
+                    </a:p>
+                  </a:txBody>
+                  <a:tcPr marL="63500" marR="63500" marT="63500" marB="63500" anchor="ctr">
+                    <a:lnL w="12700" cap="flat" cmpd="sng" algn="ctr">
+                      <a:solidFill>
+                        <a:srgbClr val="D6DDEE"/>
+                      </a:solidFill>
+                      <a:prstDash val="solid"/>
+                      <a:round/>
+                      <a:headEnd type="none" w="med" len="med"/>
+                      <a:tailEnd type="none" w="med" len="med"/>
+                    </a:lnL>
+                    <a:lnR w="12700" cap="flat" cmpd="sng" algn="ctr">
+                      <a:solidFill>
+                        <a:srgbClr val="D6DDEE"/>
+                      </a:solidFill>
+                      <a:prstDash val="solid"/>
+                      <a:round/>
+                      <a:headEnd type="none" w="med" len="med"/>
+                      <a:tailEnd type="none" w="med" len="med"/>
+                    </a:lnR>
+                    <a:lnT w="12700" cap="flat" cmpd="sng" algn="ctr">
+                      <a:solidFill>
+                        <a:srgbClr val="D6DDEE"/>
+                      </a:solidFill>
+                      <a:prstDash val="solid"/>
+                      <a:round/>
+                      <a:headEnd type="none" w="med" len="med"/>
+                      <a:tailEnd type="none" w="med" len="med"/>
+                    </a:lnT>
+                    <a:lnB w="12700" cap="flat" cmpd="sng" algn="ctr">
+                      <a:solidFill>
+                        <a:srgbClr val="D6DDEE"/>
+                      </a:solidFill>
+                      <a:prstDash val="solid"/>
+                      <a:round/>
+                      <a:headEnd type="none" w="med" len="med"/>
+                      <a:tailEnd type="none" w="med" len="med"/>
+                    </a:lnB>
+                    <a:solidFill>
+                      <a:srgbClr val="FFFFFF"/>
+                    </a:solidFill>
+                  </a:tcPr>
+                </a:tc>
+              </a:tr>
+              <a:tr h="365760">
+                <a:tc>
+                  <a:txBody>
+                    <a:bodyPr/>
+                    <a:lstStyle/>
+                    <a:p>
+                      <a:pPr indent="0" marL="0">
+                        <a:buNone/>
+                      </a:pPr>
+                      <a:r>
+                        <a:rPr lang="en-US" sz="950" b="1" dirty="0">
+                          <a:solidFill>
+                            <a:srgbClr val="1E2761"/>
+                          </a:solidFill>
+                          <a:latin typeface="Meiryo" pitchFamily="34" charset="0"/>
+                          <a:ea typeface="Meiryo" pitchFamily="34" charset="-122"/>
+                          <a:cs typeface="Meiryo" pitchFamily="34" charset="-120"/>
+                        </a:rPr>
+                        <a:t>JK：納期</a:t>
+                      </a:r>
+                      <a:endParaRPr lang="en-US" sz="950" dirty="0">
+                        <a:latin typeface="Meiryo" charset="0"/>
+                        <a:ea typeface="Meiryo" charset="0"/>
+                        <a:cs typeface="Meiryo" charset="0"/>
+                      </a:endParaRPr>
+                    </a:p>
+                  </a:txBody>
+                  <a:tcPr marL="63500" marR="63500" marT="63500" marB="63500" anchor="ctr">
+                    <a:lnL w="12700" cap="flat" cmpd="sng" algn="ctr">
+                      <a:solidFill>
+                        <a:srgbClr val="D6DDEE"/>
+                      </a:solidFill>
+                      <a:prstDash val="solid"/>
+                      <a:round/>
+                      <a:headEnd type="none" w="med" len="med"/>
+                      <a:tailEnd type="none" w="med" len="med"/>
+                    </a:lnL>
+                    <a:lnR w="12700" cap="flat" cmpd="sng" algn="ctr">
+                      <a:solidFill>
+                        <a:srgbClr val="D6DDEE"/>
+                      </a:solidFill>
+                      <a:prstDash val="solid"/>
+                      <a:round/>
+                      <a:headEnd type="none" w="med" len="med"/>
+                      <a:tailEnd type="none" w="med" len="med"/>
+                    </a:lnR>
+                    <a:lnT w="12700" cap="flat" cmpd="sng" algn="ctr">
+                      <a:solidFill>
+                        <a:srgbClr val="D6DDEE"/>
+                      </a:solidFill>
+                      <a:prstDash val="solid"/>
+                      <a:round/>
+                      <a:headEnd type="none" w="med" len="med"/>
+                      <a:tailEnd type="none" w="med" len="med"/>
+                    </a:lnT>
+                    <a:lnB w="12700" cap="flat" cmpd="sng" algn="ctr">
+                      <a:solidFill>
+                        <a:srgbClr val="D6DDEE"/>
+                      </a:solidFill>
+                      <a:prstDash val="solid"/>
+                      <a:round/>
+                      <a:headEnd type="none" w="med" len="med"/>
+                      <a:tailEnd type="none" w="med" len="med"/>
+                    </a:lnB>
+                    <a:solidFill>
+                      <a:srgbClr val="F8FAFE"/>
+                    </a:solidFill>
+                  </a:tcPr>
+                </a:tc>
+                <a:tc>
+                  <a:txBody>
+                    <a:bodyPr/>
+                    <a:lstStyle/>
+                    <a:p>
+                      <a:pPr indent="0" marL="0">
+                        <a:buNone/>
+                      </a:pPr>
+                      <a:r>
+                        <a:rPr lang="en-US" sz="950" dirty="0">
+                          <a:solidFill>
+                            <a:srgbClr val="1B2233"/>
+                          </a:solidFill>
+                          <a:latin typeface="Meiryo" pitchFamily="34" charset="0"/>
+                          <a:ea typeface="Meiryo" pitchFamily="34" charset="-122"/>
+                          <a:cs typeface="Meiryo" pitchFamily="34" charset="-120"/>
+                        </a:rPr>
+                        <a:t>国内3〜4ヶ月／海外6〜8ヶ月</a:t>
+                      </a:r>
+                      <a:endParaRPr lang="en-US" sz="950" dirty="0">
+                        <a:latin typeface="Meiryo" charset="0"/>
+                        <a:ea typeface="Meiryo" charset="0"/>
+                        <a:cs typeface="Meiryo" charset="0"/>
+                      </a:endParaRPr>
+                    </a:p>
+                  </a:txBody>
+                  <a:tcPr marL="63500" marR="63500" marT="63500" marB="63500" anchor="ctr">
+                    <a:lnL w="12700" cap="flat" cmpd="sng" algn="ctr">
+                      <a:solidFill>
+                        <a:srgbClr val="D6DDEE"/>
+                      </a:solidFill>
+                      <a:prstDash val="solid"/>
+                      <a:round/>
+                      <a:headEnd type="none" w="med" len="med"/>
+                      <a:tailEnd type="none" w="med" len="med"/>
+                    </a:lnL>
+                    <a:lnR w="12700" cap="flat" cmpd="sng" algn="ctr">
+                      <a:solidFill>
+                        <a:srgbClr val="D6DDEE"/>
+                      </a:solidFill>
+                      <a:prstDash val="solid"/>
+                      <a:round/>
+                      <a:headEnd type="none" w="med" len="med"/>
+                      <a:tailEnd type="none" w="med" len="med"/>
+                    </a:lnR>
+                    <a:lnT w="12700" cap="flat" cmpd="sng" algn="ctr">
+                      <a:solidFill>
+                        <a:srgbClr val="D6DDEE"/>
+                      </a:solidFill>
+                      <a:prstDash val="solid"/>
+                      <a:round/>
+                      <a:headEnd type="none" w="med" len="med"/>
+                      <a:tailEnd type="none" w="med" len="med"/>
+                    </a:lnT>
+                    <a:lnB w="12700" cap="flat" cmpd="sng" algn="ctr">
+                      <a:solidFill>
+                        <a:srgbClr val="D6DDEE"/>
+                      </a:solidFill>
+                      <a:prstDash val="solid"/>
+                      <a:round/>
+                      <a:headEnd type="none" w="med" len="med"/>
+                      <a:tailEnd type="none" w="med" len="med"/>
+                    </a:lnB>
+                    <a:solidFill>
+                      <a:srgbClr val="F8FAFE"/>
+                    </a:solidFill>
+                  </a:tcPr>
+                </a:tc>
+                <a:tc>
+                  <a:txBody>
+                    <a:bodyPr/>
+                    <a:lstStyle/>
+                    <a:p>
+                      <a:pPr indent="0" marL="0">
+                        <a:buNone/>
+                      </a:pPr>
+                      <a:r>
+                        <a:rPr lang="en-US" sz="900" dirty="0">
+                          <a:solidFill>
+                            <a:srgbClr val="5A6483"/>
+                          </a:solidFill>
+                          <a:latin typeface="Meiryo" pitchFamily="34" charset="0"/>
+                          <a:ea typeface="Meiryo" pitchFamily="34" charset="-122"/>
+                          <a:cs typeface="Meiryo" pitchFamily="34" charset="-120"/>
+                        </a:rPr>
+                        <a:t>uniform-net.jp/faq ＋ kirumirai.com/information/kikan.html</a:t>
+                      </a:r>
+                      <a:endParaRPr lang="en-US" sz="900" dirty="0">
+                        <a:latin typeface="Meiryo" charset="0"/>
+                        <a:ea typeface="Meiryo" charset="0"/>
+                        <a:cs typeface="Meiryo" charset="0"/>
+                      </a:endParaRPr>
+                    </a:p>
+                  </a:txBody>
+                  <a:tcPr marL="63500" marR="63500" marT="63500" marB="63500" anchor="ctr">
+                    <a:lnL w="12700" cap="flat" cmpd="sng" algn="ctr">
+                      <a:solidFill>
+                        <a:srgbClr val="D6DDEE"/>
+                      </a:solidFill>
+                      <a:prstDash val="solid"/>
+                      <a:round/>
+                      <a:headEnd type="none" w="med" len="med"/>
+                      <a:tailEnd type="none" w="med" len="med"/>
+                    </a:lnL>
+                    <a:lnR w="12700" cap="flat" cmpd="sng" algn="ctr">
+                      <a:solidFill>
+                        <a:srgbClr val="D6DDEE"/>
+                      </a:solidFill>
+                      <a:prstDash val="solid"/>
+                      <a:round/>
+                      <a:headEnd type="none" w="med" len="med"/>
+                      <a:tailEnd type="none" w="med" len="med"/>
+                    </a:lnR>
+                    <a:lnT w="12700" cap="flat" cmpd="sng" algn="ctr">
+                      <a:solidFill>
+                        <a:srgbClr val="D6DDEE"/>
+                      </a:solidFill>
+                      <a:prstDash val="solid"/>
+                      <a:round/>
+                      <a:headEnd type="none" w="med" len="med"/>
+                      <a:tailEnd type="none" w="med" len="med"/>
+                    </a:lnT>
+                    <a:lnB w="12700" cap="flat" cmpd="sng" algn="ctr">
+                      <a:solidFill>
+                        <a:srgbClr val="D6DDEE"/>
+                      </a:solidFill>
+                      <a:prstDash val="solid"/>
+                      <a:round/>
+                      <a:headEnd type="none" w="med" len="med"/>
+                      <a:tailEnd type="none" w="med" len="med"/>
+                    </a:lnB>
+                    <a:solidFill>
+                      <a:srgbClr val="F8FAFE"/>
+                    </a:solidFill>
+                  </a:tcPr>
+                </a:tc>
+                <a:tc>
+                  <a:txBody>
+                    <a:bodyPr/>
+                    <a:lstStyle/>
+                    <a:p>
+                      <a:pPr algn="ctr" indent="0" marL="0">
+                        <a:buNone/>
+                      </a:pPr>
+                      <a:r>
+                        <a:rPr lang="en-US" sz="1200" b="1" dirty="0">
+                          <a:solidFill>
+                            <a:srgbClr val="B0730F"/>
+                          </a:solidFill>
+                          <a:latin typeface="Meiryo" pitchFamily="34" charset="0"/>
+                          <a:ea typeface="Meiryo" pitchFamily="34" charset="-122"/>
+                          <a:cs typeface="Meiryo" pitchFamily="34" charset="-120"/>
+                        </a:rPr>
+                        <a:t>B</a:t>
+                      </a:r>
+                      <a:endParaRPr lang="en-US" sz="1200" dirty="0">
+                        <a:latin typeface="Meiryo" charset="0"/>
+                        <a:ea typeface="Meiryo" charset="0"/>
+                        <a:cs typeface="Meiryo" charset="0"/>
+                      </a:endParaRPr>
+                    </a:p>
+                  </a:txBody>
+                  <a:tcPr marL="63500" marR="63500" marT="63500" marB="63500" anchor="ctr">
+                    <a:lnL w="12700" cap="flat" cmpd="sng" algn="ctr">
+                      <a:solidFill>
+                        <a:srgbClr val="D6DDEE"/>
+                      </a:solidFill>
+                      <a:prstDash val="solid"/>
+                      <a:round/>
+                      <a:headEnd type="none" w="med" len="med"/>
+                      <a:tailEnd type="none" w="med" len="med"/>
+                    </a:lnL>
+                    <a:lnR w="12700" cap="flat" cmpd="sng" algn="ctr">
+                      <a:solidFill>
+                        <a:srgbClr val="D6DDEE"/>
+                      </a:solidFill>
+                      <a:prstDash val="solid"/>
+                      <a:round/>
+                      <a:headEnd type="none" w="med" len="med"/>
+                      <a:tailEnd type="none" w="med" len="med"/>
+                    </a:lnR>
+                    <a:lnT w="12700" cap="flat" cmpd="sng" algn="ctr">
+                      <a:solidFill>
+                        <a:srgbClr val="D6DDEE"/>
+                      </a:solidFill>
+                      <a:prstDash val="solid"/>
+                      <a:round/>
+                      <a:headEnd type="none" w="med" len="med"/>
+                      <a:tailEnd type="none" w="med" len="med"/>
+                    </a:lnT>
+                    <a:lnB w="12700" cap="flat" cmpd="sng" algn="ctr">
+                      <a:solidFill>
+                        <a:srgbClr val="D6DDEE"/>
+                      </a:solidFill>
+                      <a:prstDash val="solid"/>
+                      <a:round/>
+                      <a:headEnd type="none" w="med" len="med"/>
+                      <a:tailEnd type="none" w="med" len="med"/>
+                    </a:lnB>
+                    <a:solidFill>
+                      <a:srgbClr val="F8FAFE"/>
+                    </a:solidFill>
+                  </a:tcPr>
+                </a:tc>
+              </a:tr>
+              <a:tr h="365760">
+                <a:tc>
+                  <a:txBody>
+                    <a:bodyPr/>
+                    <a:lstStyle/>
+                    <a:p>
+                      <a:pPr indent="0" marL="0">
+                        <a:buNone/>
+                      </a:pPr>
+                      <a:r>
+                        <a:rPr lang="en-US" sz="950" b="1" dirty="0">
+                          <a:solidFill>
+                            <a:srgbClr val="1E2761"/>
+                          </a:solidFill>
+                          <a:latin typeface="Meiryo" pitchFamily="34" charset="0"/>
+                          <a:ea typeface="Meiryo" pitchFamily="34" charset="-122"/>
+                          <a:cs typeface="Meiryo" pitchFamily="34" charset="-120"/>
+                        </a:rPr>
+                        <a:t>JK：単価（フルオーダー）</a:t>
+                      </a:r>
+                      <a:endParaRPr lang="en-US" sz="950" dirty="0">
+                        <a:latin typeface="Meiryo" charset="0"/>
+                        <a:ea typeface="Meiryo" charset="0"/>
+                        <a:cs typeface="Meiryo" charset="0"/>
+                      </a:endParaRPr>
+                    </a:p>
+                  </a:txBody>
+                  <a:tcPr marL="63500" marR="63500" marT="63500" marB="63500" anchor="ctr">
+                    <a:lnL w="12700" cap="flat" cmpd="sng" algn="ctr">
+                      <a:solidFill>
+                        <a:srgbClr val="D6DDEE"/>
+                      </a:solidFill>
+                      <a:prstDash val="solid"/>
+                      <a:round/>
+                      <a:headEnd type="none" w="med" len="med"/>
+                      <a:tailEnd type="none" w="med" len="med"/>
+                    </a:lnL>
+                    <a:lnR w="12700" cap="flat" cmpd="sng" algn="ctr">
+                      <a:solidFill>
+                        <a:srgbClr val="D6DDEE"/>
+                      </a:solidFill>
+                      <a:prstDash val="solid"/>
+                      <a:round/>
+                      <a:headEnd type="none" w="med" len="med"/>
+                      <a:tailEnd type="none" w="med" len="med"/>
+                    </a:lnR>
+                    <a:lnT w="12700" cap="flat" cmpd="sng" algn="ctr">
+                      <a:solidFill>
+                        <a:srgbClr val="D6DDEE"/>
+                      </a:solidFill>
+                      <a:prstDash val="solid"/>
+                      <a:round/>
+                      <a:headEnd type="none" w="med" len="med"/>
+                      <a:tailEnd type="none" w="med" len="med"/>
+                    </a:lnT>
+                    <a:lnB w="12700" cap="flat" cmpd="sng" algn="ctr">
+                      <a:solidFill>
+                        <a:srgbClr val="D6DDEE"/>
+                      </a:solidFill>
+                      <a:prstDash val="solid"/>
+                      <a:round/>
+                      <a:headEnd type="none" w="med" len="med"/>
+                      <a:tailEnd type="none" w="med" len="med"/>
+                    </a:lnB>
+                    <a:solidFill>
+                      <a:srgbClr val="FFFFFF"/>
+                    </a:solidFill>
+                  </a:tcPr>
+                </a:tc>
+                <a:tc>
+                  <a:txBody>
+                    <a:bodyPr/>
+                    <a:lstStyle/>
+                    <a:p>
+                      <a:pPr indent="0" marL="0">
+                        <a:buNone/>
+                      </a:pPr>
+                      <a:r>
+                        <a:rPr lang="en-US" sz="950" dirty="0">
+                          <a:solidFill>
+                            <a:srgbClr val="1B2233"/>
+                          </a:solidFill>
+                          <a:latin typeface="Meiryo" pitchFamily="34" charset="0"/>
+                          <a:ea typeface="Meiryo" pitchFamily="34" charset="-122"/>
+                          <a:cs typeface="Meiryo" pitchFamily="34" charset="-120"/>
+                        </a:rPr>
+                        <a:t>15,000〜18,000円/着</a:t>
+                      </a:r>
+                      <a:endParaRPr lang="en-US" sz="950" dirty="0">
+                        <a:latin typeface="Meiryo" charset="0"/>
+                        <a:ea typeface="Meiryo" charset="0"/>
+                        <a:cs typeface="Meiryo" charset="0"/>
+                      </a:endParaRPr>
+                    </a:p>
+                  </a:txBody>
+                  <a:tcPr marL="63500" marR="63500" marT="63500" marB="63500" anchor="ctr">
+                    <a:lnL w="12700" cap="flat" cmpd="sng" algn="ctr">
+                      <a:solidFill>
+                        <a:srgbClr val="D6DDEE"/>
+                      </a:solidFill>
+                      <a:prstDash val="solid"/>
+                      <a:round/>
+                      <a:headEnd type="none" w="med" len="med"/>
+                      <a:tailEnd type="none" w="med" len="med"/>
+                    </a:lnL>
+                    <a:lnR w="12700" cap="flat" cmpd="sng" algn="ctr">
+                      <a:solidFill>
+                        <a:srgbClr val="D6DDEE"/>
+                      </a:solidFill>
+                      <a:prstDash val="solid"/>
+                      <a:round/>
+                      <a:headEnd type="none" w="med" len="med"/>
+                      <a:tailEnd type="none" w="med" len="med"/>
+                    </a:lnR>
+                    <a:lnT w="12700" cap="flat" cmpd="sng" algn="ctr">
+                      <a:solidFill>
+                        <a:srgbClr val="D6DDEE"/>
+                      </a:solidFill>
+                      <a:prstDash val="solid"/>
+                      <a:round/>
+                      <a:headEnd type="none" w="med" len="med"/>
+                      <a:tailEnd type="none" w="med" len="med"/>
+                    </a:lnT>
+                    <a:lnB w="12700" cap="flat" cmpd="sng" algn="ctr">
+                      <a:solidFill>
+                        <a:srgbClr val="D6DDEE"/>
+                      </a:solidFill>
+                      <a:prstDash val="solid"/>
+                      <a:round/>
+                      <a:headEnd type="none" w="med" len="med"/>
+                      <a:tailEnd type="none" w="med" len="med"/>
+                    </a:lnB>
+                    <a:solidFill>
+                      <a:srgbClr val="FFFFFF"/>
+                    </a:solidFill>
+                  </a:tcPr>
+                </a:tc>
+                <a:tc>
+                  <a:txBody>
+                    <a:bodyPr/>
+                    <a:lstStyle/>
+                    <a:p>
+                      <a:pPr indent="0" marL="0">
+                        <a:buNone/>
+                      </a:pPr>
+                      <a:r>
+                        <a:rPr lang="en-US" sz="900" dirty="0">
+                          <a:solidFill>
+                            <a:srgbClr val="5A6483"/>
+                          </a:solidFill>
+                          <a:latin typeface="Meiryo" pitchFamily="34" charset="0"/>
+                          <a:ea typeface="Meiryo" pitchFamily="34" charset="-122"/>
+                          <a:cs typeface="Meiryo" pitchFamily="34" charset="-120"/>
+                        </a:rPr>
+                        <a:t>kirumirai.com/information/price_full_order.html</a:t>
+                      </a:r>
+                      <a:endParaRPr lang="en-US" sz="900" dirty="0">
+                        <a:latin typeface="Meiryo" charset="0"/>
+                        <a:ea typeface="Meiryo" charset="0"/>
+                        <a:cs typeface="Meiryo" charset="0"/>
+                      </a:endParaRPr>
+                    </a:p>
+                  </a:txBody>
+                  <a:tcPr marL="63500" marR="63500" marT="63500" marB="63500" anchor="ctr">
+                    <a:lnL w="12700" cap="flat" cmpd="sng" algn="ctr">
+                      <a:solidFill>
+                        <a:srgbClr val="D6DDEE"/>
+                      </a:solidFill>
+                      <a:prstDash val="solid"/>
+                      <a:round/>
+                      <a:headEnd type="none" w="med" len="med"/>
+                      <a:tailEnd type="none" w="med" len="med"/>
+                    </a:lnL>
+                    <a:lnR w="12700" cap="flat" cmpd="sng" algn="ctr">
+                      <a:solidFill>
+                        <a:srgbClr val="D6DDEE"/>
+                      </a:solidFill>
+                      <a:prstDash val="solid"/>
+                      <a:round/>
+                      <a:headEnd type="none" w="med" len="med"/>
+                      <a:tailEnd type="none" w="med" len="med"/>
+                    </a:lnR>
+                    <a:lnT w="12700" cap="flat" cmpd="sng" algn="ctr">
+                      <a:solidFill>
+                        <a:srgbClr val="D6DDEE"/>
+                      </a:solidFill>
+                      <a:prstDash val="solid"/>
+                      <a:round/>
+                      <a:headEnd type="none" w="med" len="med"/>
+                      <a:tailEnd type="none" w="med" len="med"/>
+                    </a:lnT>
+                    <a:lnB w="12700" cap="flat" cmpd="sng" algn="ctr">
+                      <a:solidFill>
+                        <a:srgbClr val="D6DDEE"/>
+                      </a:solidFill>
+                      <a:prstDash val="solid"/>
+                      <a:round/>
+                      <a:headEnd type="none" w="med" len="med"/>
+                      <a:tailEnd type="none" w="med" len="med"/>
+                    </a:lnB>
+                    <a:solidFill>
+                      <a:srgbClr val="FFFFFF"/>
+                    </a:solidFill>
+                  </a:tcPr>
+                </a:tc>
+                <a:tc>
+                  <a:txBody>
+                    <a:bodyPr/>
+                    <a:lstStyle/>
+                    <a:p>
+                      <a:pPr algn="ctr" indent="0" marL="0">
+                        <a:buNone/>
+                      </a:pPr>
+                      <a:r>
+                        <a:rPr lang="en-US" sz="1200" b="1" dirty="0">
+                          <a:solidFill>
+                            <a:srgbClr val="B0730F"/>
+                          </a:solidFill>
+                          <a:latin typeface="Meiryo" pitchFamily="34" charset="0"/>
+                          <a:ea typeface="Meiryo" pitchFamily="34" charset="-122"/>
+                          <a:cs typeface="Meiryo" pitchFamily="34" charset="-120"/>
+                        </a:rPr>
+                        <a:t>B</a:t>
+                      </a:r>
+                      <a:endParaRPr lang="en-US" sz="1200" dirty="0">
+                        <a:latin typeface="Meiryo" charset="0"/>
+                        <a:ea typeface="Meiryo" charset="0"/>
+                        <a:cs typeface="Meiryo" charset="0"/>
+                      </a:endParaRPr>
+                    </a:p>
+                  </a:txBody>
+                  <a:tcPr marL="63500" marR="63500" marT="63500" marB="63500" anchor="ctr">
+                    <a:lnL w="12700" cap="flat" cmpd="sng" algn="ctr">
+                      <a:solidFill>
+                        <a:srgbClr val="D6DDEE"/>
+                      </a:solidFill>
+                      <a:prstDash val="solid"/>
+                      <a:round/>
+                      <a:headEnd type="none" w="med" len="med"/>
+                      <a:tailEnd type="none" w="med" len="med"/>
+                    </a:lnL>
+                    <a:lnR w="12700" cap="flat" cmpd="sng" algn="ctr">
+                      <a:solidFill>
+                        <a:srgbClr val="D6DDEE"/>
+                      </a:solidFill>
+                      <a:prstDash val="solid"/>
+                      <a:round/>
+                      <a:headEnd type="none" w="med" len="med"/>
+                      <a:tailEnd type="none" w="med" len="med"/>
+                    </a:lnR>
+                    <a:lnT w="12700" cap="flat" cmpd="sng" algn="ctr">
+                      <a:solidFill>
+                        <a:srgbClr val="D6DDEE"/>
+                      </a:solidFill>
+                      <a:prstDash val="solid"/>
+                      <a:round/>
+                      <a:headEnd type="none" w="med" len="med"/>
+                      <a:tailEnd type="none" w="med" len="med"/>
+                    </a:lnT>
+                    <a:lnB w="12700" cap="flat" cmpd="sng" algn="ctr">
+                      <a:solidFill>
+                        <a:srgbClr val="D6DDEE"/>
+                      </a:solidFill>
+                      <a:prstDash val="solid"/>
+                      <a:round/>
+                      <a:headEnd type="none" w="med" len="med"/>
+                      <a:tailEnd type="none" w="med" len="med"/>
+                    </a:lnB>
+                    <a:solidFill>
+                      <a:srgbClr val="FFFFFF"/>
+                    </a:solidFill>
+                  </a:tcPr>
+                </a:tc>
+              </a:tr>
+              <a:tr h="365760">
+                <a:tc>
+                  <a:txBody>
+                    <a:bodyPr/>
+                    <a:lstStyle/>
+                    <a:p>
+                      <a:pPr indent="0" marL="0">
+                        <a:buNone/>
+                      </a:pPr>
+                      <a:r>
+                        <a:rPr lang="en-US" sz="950" b="1" dirty="0">
+                          <a:solidFill>
+                            <a:srgbClr val="1E2761"/>
+                          </a:solidFill>
+                          <a:latin typeface="Meiryo" pitchFamily="34" charset="0"/>
+                          <a:ea typeface="Meiryo" pitchFamily="34" charset="-122"/>
+                          <a:cs typeface="Meiryo" pitchFamily="34" charset="-120"/>
+                        </a:rPr>
+                        <a:t>JK：ロット相場</a:t>
+                      </a:r>
+                      <a:endParaRPr lang="en-US" sz="950" dirty="0">
+                        <a:latin typeface="Meiryo" charset="0"/>
+                        <a:ea typeface="Meiryo" charset="0"/>
+                        <a:cs typeface="Meiryo" charset="0"/>
+                      </a:endParaRPr>
+                    </a:p>
+                  </a:txBody>
+                  <a:tcPr marL="63500" marR="63500" marT="63500" marB="63500" anchor="ctr">
+                    <a:lnL w="12700" cap="flat" cmpd="sng" algn="ctr">
+                      <a:solidFill>
+                        <a:srgbClr val="D6DDEE"/>
+                      </a:solidFill>
+                      <a:prstDash val="solid"/>
+                      <a:round/>
+                      <a:headEnd type="none" w="med" len="med"/>
+                      <a:tailEnd type="none" w="med" len="med"/>
+                    </a:lnL>
+                    <a:lnR w="12700" cap="flat" cmpd="sng" algn="ctr">
+                      <a:solidFill>
+                        <a:srgbClr val="D6DDEE"/>
+                      </a:solidFill>
+                      <a:prstDash val="solid"/>
+                      <a:round/>
+                      <a:headEnd type="none" w="med" len="med"/>
+                      <a:tailEnd type="none" w="med" len="med"/>
+                    </a:lnR>
+                    <a:lnT w="12700" cap="flat" cmpd="sng" algn="ctr">
+                      <a:solidFill>
+                        <a:srgbClr val="D6DDEE"/>
+                      </a:solidFill>
+                      <a:prstDash val="solid"/>
+                      <a:round/>
+                      <a:headEnd type="none" w="med" len="med"/>
+                      <a:tailEnd type="none" w="med" len="med"/>
+                    </a:lnT>
+                    <a:lnB w="12700" cap="flat" cmpd="sng" algn="ctr">
+                      <a:solidFill>
+                        <a:srgbClr val="D6DDEE"/>
+                      </a:solidFill>
+                      <a:prstDash val="solid"/>
+                      <a:round/>
+                      <a:headEnd type="none" w="med" len="med"/>
+                      <a:tailEnd type="none" w="med" len="med"/>
+                    </a:lnB>
+                    <a:solidFill>
+                      <a:srgbClr val="F8FAFE"/>
+                    </a:solidFill>
+                  </a:tcPr>
+                </a:tc>
+                <a:tc>
+                  <a:txBody>
+                    <a:bodyPr/>
+                    <a:lstStyle/>
+                    <a:p>
+                      <a:pPr indent="0" marL="0">
+                        <a:buNone/>
+                      </a:pPr>
+                      <a:r>
+                        <a:rPr lang="en-US" sz="950" dirty="0">
+                          <a:solidFill>
+                            <a:srgbClr val="1B2233"/>
+                          </a:solidFill>
+                          <a:latin typeface="Meiryo" pitchFamily="34" charset="0"/>
+                          <a:ea typeface="Meiryo" pitchFamily="34" charset="-122"/>
+                          <a:cs typeface="Meiryo" pitchFamily="34" charset="-120"/>
+                        </a:rPr>
+                        <a:t>国内100着〜／海外300着〜</a:t>
+                      </a:r>
+                      <a:endParaRPr lang="en-US" sz="950" dirty="0">
+                        <a:latin typeface="Meiryo" charset="0"/>
+                        <a:ea typeface="Meiryo" charset="0"/>
+                        <a:cs typeface="Meiryo" charset="0"/>
+                      </a:endParaRPr>
+                    </a:p>
+                  </a:txBody>
+                  <a:tcPr marL="63500" marR="63500" marT="63500" marB="63500" anchor="ctr">
+                    <a:lnL w="12700" cap="flat" cmpd="sng" algn="ctr">
+                      <a:solidFill>
+                        <a:srgbClr val="D6DDEE"/>
+                      </a:solidFill>
+                      <a:prstDash val="solid"/>
+                      <a:round/>
+                      <a:headEnd type="none" w="med" len="med"/>
+                      <a:tailEnd type="none" w="med" len="med"/>
+                    </a:lnL>
+                    <a:lnR w="12700" cap="flat" cmpd="sng" algn="ctr">
+                      <a:solidFill>
+                        <a:srgbClr val="D6DDEE"/>
+                      </a:solidFill>
+                      <a:prstDash val="solid"/>
+                      <a:round/>
+                      <a:headEnd type="none" w="med" len="med"/>
+                      <a:tailEnd type="none" w="med" len="med"/>
+                    </a:lnR>
+                    <a:lnT w="12700" cap="flat" cmpd="sng" algn="ctr">
+                      <a:solidFill>
+                        <a:srgbClr val="D6DDEE"/>
+                      </a:solidFill>
+                      <a:prstDash val="solid"/>
+                      <a:round/>
+                      <a:headEnd type="none" w="med" len="med"/>
+                      <a:tailEnd type="none" w="med" len="med"/>
+                    </a:lnT>
+                    <a:lnB w="12700" cap="flat" cmpd="sng" algn="ctr">
+                      <a:solidFill>
+                        <a:srgbClr val="D6DDEE"/>
+                      </a:solidFill>
+                      <a:prstDash val="solid"/>
+                      <a:round/>
+                      <a:headEnd type="none" w="med" len="med"/>
+                      <a:tailEnd type="none" w="med" len="med"/>
+                    </a:lnB>
+                    <a:solidFill>
+                      <a:srgbClr val="F8FAFE"/>
+                    </a:solidFill>
+                  </a:tcPr>
+                </a:tc>
+                <a:tc>
+                  <a:txBody>
+                    <a:bodyPr/>
+                    <a:lstStyle/>
+                    <a:p>
+                      <a:pPr indent="0" marL="0">
+                        <a:buNone/>
+                      </a:pPr>
+                      <a:r>
+                        <a:rPr lang="en-US" sz="900" dirty="0">
+                          <a:solidFill>
+                            <a:srgbClr val="5A6483"/>
+                          </a:solidFill>
+                          <a:latin typeface="Meiryo" pitchFamily="34" charset="0"/>
+                          <a:ea typeface="Meiryo" pitchFamily="34" charset="-122"/>
+                          <a:cs typeface="Meiryo" pitchFamily="34" charset="-120"/>
+                        </a:rPr>
+                        <a:t>nihonhifuku.jp/columns/work-clothes-order-lot-size ＋ kirumirai.com/information/lot.html</a:t>
+                      </a:r>
+                      <a:endParaRPr lang="en-US" sz="900" dirty="0">
+                        <a:latin typeface="Meiryo" charset="0"/>
+                        <a:ea typeface="Meiryo" charset="0"/>
+                        <a:cs typeface="Meiryo" charset="0"/>
+                      </a:endParaRPr>
+                    </a:p>
+                  </a:txBody>
+                  <a:tcPr marL="63500" marR="63500" marT="63500" marB="63500" anchor="ctr">
+                    <a:lnL w="12700" cap="flat" cmpd="sng" algn="ctr">
+                      <a:solidFill>
+                        <a:srgbClr val="D6DDEE"/>
+                      </a:solidFill>
+                      <a:prstDash val="solid"/>
+                      <a:round/>
+                      <a:headEnd type="none" w="med" len="med"/>
+                      <a:tailEnd type="none" w="med" len="med"/>
+                    </a:lnL>
+                    <a:lnR w="12700" cap="flat" cmpd="sng" algn="ctr">
+                      <a:solidFill>
+                        <a:srgbClr val="D6DDEE"/>
+                      </a:solidFill>
+                      <a:prstDash val="solid"/>
+                      <a:round/>
+                      <a:headEnd type="none" w="med" len="med"/>
+                      <a:tailEnd type="none" w="med" len="med"/>
+                    </a:lnR>
+                    <a:lnT w="12700" cap="flat" cmpd="sng" algn="ctr">
+                      <a:solidFill>
+                        <a:srgbClr val="D6DDEE"/>
+                      </a:solidFill>
+                      <a:prstDash val="solid"/>
+                      <a:round/>
+                      <a:headEnd type="none" w="med" len="med"/>
+                      <a:tailEnd type="none" w="med" len="med"/>
+                    </a:lnT>
+                    <a:lnB w="12700" cap="flat" cmpd="sng" algn="ctr">
+                      <a:solidFill>
+                        <a:srgbClr val="D6DDEE"/>
+                      </a:solidFill>
+                      <a:prstDash val="solid"/>
+                      <a:round/>
+                      <a:headEnd type="none" w="med" len="med"/>
+                      <a:tailEnd type="none" w="med" len="med"/>
+                    </a:lnB>
+                    <a:solidFill>
+                      <a:srgbClr val="F8FAFE"/>
+                    </a:solidFill>
+                  </a:tcPr>
+                </a:tc>
+                <a:tc>
+                  <a:txBody>
+                    <a:bodyPr/>
+                    <a:lstStyle/>
+                    <a:p>
+                      <a:pPr algn="ctr" indent="0" marL="0">
+                        <a:buNone/>
+                      </a:pPr>
+                      <a:r>
+                        <a:rPr lang="en-US" sz="1200" b="1" dirty="0">
+                          <a:solidFill>
+                            <a:srgbClr val="B0730F"/>
+                          </a:solidFill>
+                          <a:latin typeface="Meiryo" pitchFamily="34" charset="0"/>
+                          <a:ea typeface="Meiryo" pitchFamily="34" charset="-122"/>
+                          <a:cs typeface="Meiryo" pitchFamily="34" charset="-120"/>
+                        </a:rPr>
+                        <a:t>B</a:t>
+                      </a:r>
+                      <a:endParaRPr lang="en-US" sz="1200" dirty="0">
+                        <a:latin typeface="Meiryo" charset="0"/>
+                        <a:ea typeface="Meiryo" charset="0"/>
+                        <a:cs typeface="Meiryo" charset="0"/>
+                      </a:endParaRPr>
+                    </a:p>
+                  </a:txBody>
+                  <a:tcPr marL="63500" marR="63500" marT="63500" marB="63500" anchor="ctr">
+                    <a:lnL w="12700" cap="flat" cmpd="sng" algn="ctr">
+                      <a:solidFill>
+                        <a:srgbClr val="D6DDEE"/>
+                      </a:solidFill>
+                      <a:prstDash val="solid"/>
+                      <a:round/>
+                      <a:headEnd type="none" w="med" len="med"/>
+                      <a:tailEnd type="none" w="med" len="med"/>
+                    </a:lnL>
+                    <a:lnR w="12700" cap="flat" cmpd="sng" algn="ctr">
+                      <a:solidFill>
+                        <a:srgbClr val="D6DDEE"/>
+                      </a:solidFill>
+                      <a:prstDash val="solid"/>
+                      <a:round/>
+                      <a:headEnd type="none" w="med" len="med"/>
+                      <a:tailEnd type="none" w="med" len="med"/>
+                    </a:lnR>
+                    <a:lnT w="12700" cap="flat" cmpd="sng" algn="ctr">
+                      <a:solidFill>
+                        <a:srgbClr val="D6DDEE"/>
+                      </a:solidFill>
+                      <a:prstDash val="solid"/>
+                      <a:round/>
+                      <a:headEnd type="none" w="med" len="med"/>
+                      <a:tailEnd type="none" w="med" len="med"/>
+                    </a:lnT>
+                    <a:lnB w="12700" cap="flat" cmpd="sng" algn="ctr">
+                      <a:solidFill>
+                        <a:srgbClr val="D6DDEE"/>
+                      </a:solidFill>
+                      <a:prstDash val="solid"/>
+                      <a:round/>
+                      <a:headEnd type="none" w="med" len="med"/>
+                      <a:tailEnd type="none" w="med" len="med"/>
+                    </a:lnB>
+                    <a:solidFill>
+                      <a:srgbClr val="F8FAFE"/>
+                    </a:solidFill>
+                  </a:tcPr>
+                </a:tc>
+              </a:tr>
+              <a:tr h="365760">
+                <a:tc>
+                  <a:txBody>
+                    <a:bodyPr/>
+                    <a:lstStyle/>
+                    <a:p>
+                      <a:pPr indent="0" marL="0">
+                        <a:buNone/>
+                      </a:pPr>
+                      <a:r>
+                        <a:rPr lang="en-US" sz="950" b="1" dirty="0">
+                          <a:solidFill>
+                            <a:srgbClr val="1E2761"/>
+                          </a:solidFill>
+                          <a:latin typeface="Meiryo" pitchFamily="34" charset="0"/>
+                          <a:ea typeface="Meiryo" pitchFamily="34" charset="-122"/>
+                          <a:cs typeface="Meiryo" pitchFamily="34" charset="-120"/>
+                        </a:rPr>
+                        <a:t>JK：既製品＋刺繍</a:t>
+                      </a:r>
+                      <a:endParaRPr lang="en-US" sz="950" dirty="0">
+                        <a:latin typeface="Meiryo" charset="0"/>
+                        <a:ea typeface="Meiryo" charset="0"/>
+                        <a:cs typeface="Meiryo" charset="0"/>
+                      </a:endParaRPr>
+                    </a:p>
+                  </a:txBody>
+                  <a:tcPr marL="63500" marR="63500" marT="63500" marB="63500" anchor="ctr">
+                    <a:lnL w="12700" cap="flat" cmpd="sng" algn="ctr">
+                      <a:solidFill>
+                        <a:srgbClr val="D6DDEE"/>
+                      </a:solidFill>
+                      <a:prstDash val="solid"/>
+                      <a:round/>
+                      <a:headEnd type="none" w="med" len="med"/>
+                      <a:tailEnd type="none" w="med" len="med"/>
+                    </a:lnL>
+                    <a:lnR w="12700" cap="flat" cmpd="sng" algn="ctr">
+                      <a:solidFill>
+                        <a:srgbClr val="D6DDEE"/>
+                      </a:solidFill>
+                      <a:prstDash val="solid"/>
+                      <a:round/>
+                      <a:headEnd type="none" w="med" len="med"/>
+                      <a:tailEnd type="none" w="med" len="med"/>
+                    </a:lnR>
+                    <a:lnT w="12700" cap="flat" cmpd="sng" algn="ctr">
+                      <a:solidFill>
+                        <a:srgbClr val="D6DDEE"/>
+                      </a:solidFill>
+                      <a:prstDash val="solid"/>
+                      <a:round/>
+                      <a:headEnd type="none" w="med" len="med"/>
+                      <a:tailEnd type="none" w="med" len="med"/>
+                    </a:lnT>
+                    <a:lnB w="12700" cap="flat" cmpd="sng" algn="ctr">
+                      <a:solidFill>
+                        <a:srgbClr val="D6DDEE"/>
+                      </a:solidFill>
+                      <a:prstDash val="solid"/>
+                      <a:round/>
+                      <a:headEnd type="none" w="med" len="med"/>
+                      <a:tailEnd type="none" w="med" len="med"/>
+                    </a:lnB>
+                    <a:solidFill>
+                      <a:srgbClr val="FFFFFF"/>
+                    </a:solidFill>
+                  </a:tcPr>
+                </a:tc>
+                <a:tc>
+                  <a:txBody>
+                    <a:bodyPr/>
+                    <a:lstStyle/>
+                    <a:p>
+                      <a:pPr indent="0" marL="0">
+                        <a:buNone/>
+                      </a:pPr>
+                      <a:r>
+                        <a:rPr lang="en-US" sz="950" dirty="0">
+                          <a:solidFill>
+                            <a:srgbClr val="1B2233"/>
+                          </a:solidFill>
+                          <a:latin typeface="Meiryo" pitchFamily="34" charset="0"/>
+                          <a:ea typeface="Meiryo" pitchFamily="34" charset="-122"/>
+                          <a:cs typeface="Meiryo" pitchFamily="34" charset="-120"/>
+                        </a:rPr>
+                        <a:t>本体3,000〜8,000円／刺繍220〜660円</a:t>
+                      </a:r>
+                      <a:endParaRPr lang="en-US" sz="950" dirty="0">
+                        <a:latin typeface="Meiryo" charset="0"/>
+                        <a:ea typeface="Meiryo" charset="0"/>
+                        <a:cs typeface="Meiryo" charset="0"/>
+                      </a:endParaRPr>
+                    </a:p>
+                  </a:txBody>
+                  <a:tcPr marL="63500" marR="63500" marT="63500" marB="63500" anchor="ctr">
+                    <a:lnL w="12700" cap="flat" cmpd="sng" algn="ctr">
+                      <a:solidFill>
+                        <a:srgbClr val="D6DDEE"/>
+                      </a:solidFill>
+                      <a:prstDash val="solid"/>
+                      <a:round/>
+                      <a:headEnd type="none" w="med" len="med"/>
+                      <a:tailEnd type="none" w="med" len="med"/>
+                    </a:lnL>
+                    <a:lnR w="12700" cap="flat" cmpd="sng" algn="ctr">
+                      <a:solidFill>
+                        <a:srgbClr val="D6DDEE"/>
+                      </a:solidFill>
+                      <a:prstDash val="solid"/>
+                      <a:round/>
+                      <a:headEnd type="none" w="med" len="med"/>
+                      <a:tailEnd type="none" w="med" len="med"/>
+                    </a:lnR>
+                    <a:lnT w="12700" cap="flat" cmpd="sng" algn="ctr">
+                      <a:solidFill>
+                        <a:srgbClr val="D6DDEE"/>
+                      </a:solidFill>
+                      <a:prstDash val="solid"/>
+                      <a:round/>
+                      <a:headEnd type="none" w="med" len="med"/>
+                      <a:tailEnd type="none" w="med" len="med"/>
+                    </a:lnT>
+                    <a:lnB w="12700" cap="flat" cmpd="sng" algn="ctr">
+                      <a:solidFill>
+                        <a:srgbClr val="D6DDEE"/>
+                      </a:solidFill>
+                      <a:prstDash val="solid"/>
+                      <a:round/>
+                      <a:headEnd type="none" w="med" len="med"/>
+                      <a:tailEnd type="none" w="med" len="med"/>
+                    </a:lnB>
+                    <a:solidFill>
+                      <a:srgbClr val="FFFFFF"/>
+                    </a:solidFill>
+                  </a:tcPr>
+                </a:tc>
+                <a:tc>
+                  <a:txBody>
+                    <a:bodyPr/>
+                    <a:lstStyle/>
+                    <a:p>
+                      <a:pPr indent="0" marL="0">
+                        <a:buNone/>
+                      </a:pPr>
+                      <a:r>
+                        <a:rPr lang="en-US" sz="900" dirty="0">
+                          <a:solidFill>
+                            <a:srgbClr val="5A6483"/>
+                          </a:solidFill>
+                          <a:latin typeface="Meiryo" pitchFamily="34" charset="0"/>
+                          <a:ea typeface="Meiryo" pitchFamily="34" charset="-122"/>
+                          <a:cs typeface="Meiryo" pitchFamily="34" charset="-120"/>
+                        </a:rPr>
+                        <a:t>work-king.shop/blog/workwear_low_price ＋ 作業服各社の刺繍加工ページ</a:t>
+                      </a:r>
+                      <a:endParaRPr lang="en-US" sz="900" dirty="0">
+                        <a:latin typeface="Meiryo" charset="0"/>
+                        <a:ea typeface="Meiryo" charset="0"/>
+                        <a:cs typeface="Meiryo" charset="0"/>
+                      </a:endParaRPr>
+                    </a:p>
+                  </a:txBody>
+                  <a:tcPr marL="63500" marR="63500" marT="63500" marB="63500" anchor="ctr">
+                    <a:lnL w="12700" cap="flat" cmpd="sng" algn="ctr">
+                      <a:solidFill>
+                        <a:srgbClr val="D6DDEE"/>
+                      </a:solidFill>
+                      <a:prstDash val="solid"/>
+                      <a:round/>
+                      <a:headEnd type="none" w="med" len="med"/>
+                      <a:tailEnd type="none" w="med" len="med"/>
+                    </a:lnL>
+                    <a:lnR w="12700" cap="flat" cmpd="sng" algn="ctr">
+                      <a:solidFill>
+                        <a:srgbClr val="D6DDEE"/>
+                      </a:solidFill>
+                      <a:prstDash val="solid"/>
+                      <a:round/>
+                      <a:headEnd type="none" w="med" len="med"/>
+                      <a:tailEnd type="none" w="med" len="med"/>
+                    </a:lnR>
+                    <a:lnT w="12700" cap="flat" cmpd="sng" algn="ctr">
+                      <a:solidFill>
+                        <a:srgbClr val="D6DDEE"/>
+                      </a:solidFill>
+                      <a:prstDash val="solid"/>
+                      <a:round/>
+                      <a:headEnd type="none" w="med" len="med"/>
+                      <a:tailEnd type="none" w="med" len="med"/>
+                    </a:lnT>
+                    <a:lnB w="12700" cap="flat" cmpd="sng" algn="ctr">
+                      <a:solidFill>
+                        <a:srgbClr val="D6DDEE"/>
+                      </a:solidFill>
+                      <a:prstDash val="solid"/>
+                      <a:round/>
+                      <a:headEnd type="none" w="med" len="med"/>
+                      <a:tailEnd type="none" w="med" len="med"/>
+                    </a:lnB>
+                    <a:solidFill>
+                      <a:srgbClr val="FFFFFF"/>
+                    </a:solidFill>
+                  </a:tcPr>
+                </a:tc>
+                <a:tc>
+                  <a:txBody>
+                    <a:bodyPr/>
+                    <a:lstStyle/>
+                    <a:p>
+                      <a:pPr algn="ctr" indent="0" marL="0">
+                        <a:buNone/>
+                      </a:pPr>
+                      <a:r>
+                        <a:rPr lang="en-US" sz="1200" b="1" dirty="0">
+                          <a:solidFill>
+                            <a:srgbClr val="2E7D5B"/>
+                          </a:solidFill>
+                          <a:latin typeface="Meiryo" pitchFamily="34" charset="0"/>
+                          <a:ea typeface="Meiryo" pitchFamily="34" charset="-122"/>
+                          <a:cs typeface="Meiryo" pitchFamily="34" charset="-120"/>
+                        </a:rPr>
+                        <a:t>A</a:t>
+                      </a:r>
+                      <a:endParaRPr lang="en-US" sz="1200" dirty="0">
+                        <a:latin typeface="Meiryo" charset="0"/>
+                        <a:ea typeface="Meiryo" charset="0"/>
+                        <a:cs typeface="Meiryo" charset="0"/>
+                      </a:endParaRPr>
+                    </a:p>
+                  </a:txBody>
+                  <a:tcPr marL="63500" marR="63500" marT="63500" marB="63500" anchor="ctr">
+                    <a:lnL w="12700" cap="flat" cmpd="sng" algn="ctr">
+                      <a:solidFill>
+                        <a:srgbClr val="D6DDEE"/>
+                      </a:solidFill>
+                      <a:prstDash val="solid"/>
+                      <a:round/>
+                      <a:headEnd type="none" w="med" len="med"/>
+                      <a:tailEnd type="none" w="med" len="med"/>
+                    </a:lnL>
+                    <a:lnR w="12700" cap="flat" cmpd="sng" algn="ctr">
+                      <a:solidFill>
+                        <a:srgbClr val="D6DDEE"/>
+                      </a:solidFill>
+                      <a:prstDash val="solid"/>
+                      <a:round/>
+                      <a:headEnd type="none" w="med" len="med"/>
+                      <a:tailEnd type="none" w="med" len="med"/>
+                    </a:lnR>
+                    <a:lnT w="12700" cap="flat" cmpd="sng" algn="ctr">
+                      <a:solidFill>
+                        <a:srgbClr val="D6DDEE"/>
+                      </a:solidFill>
+                      <a:prstDash val="solid"/>
+                      <a:round/>
+                      <a:headEnd type="none" w="med" len="med"/>
+                      <a:tailEnd type="none" w="med" len="med"/>
+                    </a:lnT>
+                    <a:lnB w="12700" cap="flat" cmpd="sng" algn="ctr">
+                      <a:solidFill>
+                        <a:srgbClr val="D6DDEE"/>
+                      </a:solidFill>
+                      <a:prstDash val="solid"/>
+                      <a:round/>
+                      <a:headEnd type="none" w="med" len="med"/>
+                      <a:tailEnd type="none" w="med" len="med"/>
+                    </a:lnB>
+                    <a:solidFill>
+                      <a:srgbClr val="FFFFFF"/>
+                    </a:solidFill>
+                  </a:tcPr>
+                </a:tc>
+              </a:tr>
+              <a:tr h="365760">
+                <a:tc>
+                  <a:txBody>
+                    <a:bodyPr/>
+                    <a:lstStyle/>
+                    <a:p>
+                      <a:pPr indent="0" marL="0">
+                        <a:buNone/>
+                      </a:pPr>
+                      <a:r>
+                        <a:rPr lang="en-US" sz="950" b="1" dirty="0">
+                          <a:solidFill>
+                            <a:srgbClr val="1E2761"/>
+                          </a:solidFill>
+                          <a:latin typeface="Meiryo" pitchFamily="34" charset="0"/>
+                          <a:ea typeface="Meiryo" pitchFamily="34" charset="-122"/>
+                          <a:cs typeface="Meiryo" pitchFamily="34" charset="-120"/>
+                        </a:rPr>
+                        <a:t>JK：日本被服工業の条件</a:t>
+                      </a:r>
+                      <a:endParaRPr lang="en-US" sz="950" dirty="0">
+                        <a:latin typeface="Meiryo" charset="0"/>
+                        <a:ea typeface="Meiryo" charset="0"/>
+                        <a:cs typeface="Meiryo" charset="0"/>
+                      </a:endParaRPr>
+                    </a:p>
+                  </a:txBody>
+                  <a:tcPr marL="63500" marR="63500" marT="63500" marB="63500" anchor="ctr">
+                    <a:lnL w="12700" cap="flat" cmpd="sng" algn="ctr">
+                      <a:solidFill>
+                        <a:srgbClr val="D6DDEE"/>
+                      </a:solidFill>
+                      <a:prstDash val="solid"/>
+                      <a:round/>
+                      <a:headEnd type="none" w="med" len="med"/>
+                      <a:tailEnd type="none" w="med" len="med"/>
+                    </a:lnL>
+                    <a:lnR w="12700" cap="flat" cmpd="sng" algn="ctr">
+                      <a:solidFill>
+                        <a:srgbClr val="D6DDEE"/>
+                      </a:solidFill>
+                      <a:prstDash val="solid"/>
+                      <a:round/>
+                      <a:headEnd type="none" w="med" len="med"/>
+                      <a:tailEnd type="none" w="med" len="med"/>
+                    </a:lnR>
+                    <a:lnT w="12700" cap="flat" cmpd="sng" algn="ctr">
+                      <a:solidFill>
+                        <a:srgbClr val="D6DDEE"/>
+                      </a:solidFill>
+                      <a:prstDash val="solid"/>
+                      <a:round/>
+                      <a:headEnd type="none" w="med" len="med"/>
+                      <a:tailEnd type="none" w="med" len="med"/>
+                    </a:lnT>
+                    <a:lnB w="12700" cap="flat" cmpd="sng" algn="ctr">
+                      <a:solidFill>
+                        <a:srgbClr val="D6DDEE"/>
+                      </a:solidFill>
+                      <a:prstDash val="solid"/>
+                      <a:round/>
+                      <a:headEnd type="none" w="med" len="med"/>
+                      <a:tailEnd type="none" w="med" len="med"/>
+                    </a:lnB>
+                    <a:solidFill>
+                      <a:srgbClr val="F8FAFE"/>
+                    </a:solidFill>
+                  </a:tcPr>
+                </a:tc>
+                <a:tc>
+                  <a:txBody>
+                    <a:bodyPr/>
+                    <a:lstStyle/>
+                    <a:p>
+                      <a:pPr indent="0" marL="0">
+                        <a:buNone/>
+                      </a:pPr>
+                      <a:r>
+                        <a:rPr lang="en-US" sz="950" dirty="0">
+                          <a:solidFill>
+                            <a:srgbClr val="1B2233"/>
+                          </a:solidFill>
+                          <a:latin typeface="Meiryo" pitchFamily="34" charset="0"/>
+                          <a:ea typeface="Meiryo" pitchFamily="34" charset="-122"/>
+                          <a:cs typeface="Meiryo" pitchFamily="34" charset="-120"/>
+                        </a:rPr>
+                        <a:t>50セット〜・2〜3ヶ月</a:t>
+                      </a:r>
+                      <a:endParaRPr lang="en-US" sz="950" dirty="0">
+                        <a:latin typeface="Meiryo" charset="0"/>
+                        <a:ea typeface="Meiryo" charset="0"/>
+                        <a:cs typeface="Meiryo" charset="0"/>
+                      </a:endParaRPr>
+                    </a:p>
+                  </a:txBody>
+                  <a:tcPr marL="63500" marR="63500" marT="63500" marB="63500" anchor="ctr">
+                    <a:lnL w="12700" cap="flat" cmpd="sng" algn="ctr">
+                      <a:solidFill>
+                        <a:srgbClr val="D6DDEE"/>
+                      </a:solidFill>
+                      <a:prstDash val="solid"/>
+                      <a:round/>
+                      <a:headEnd type="none" w="med" len="med"/>
+                      <a:tailEnd type="none" w="med" len="med"/>
+                    </a:lnL>
+                    <a:lnR w="12700" cap="flat" cmpd="sng" algn="ctr">
+                      <a:solidFill>
+                        <a:srgbClr val="D6DDEE"/>
+                      </a:solidFill>
+                      <a:prstDash val="solid"/>
+                      <a:round/>
+                      <a:headEnd type="none" w="med" len="med"/>
+                      <a:tailEnd type="none" w="med" len="med"/>
+                    </a:lnR>
+                    <a:lnT w="12700" cap="flat" cmpd="sng" algn="ctr">
+                      <a:solidFill>
+                        <a:srgbClr val="D6DDEE"/>
+                      </a:solidFill>
+                      <a:prstDash val="solid"/>
+                      <a:round/>
+                      <a:headEnd type="none" w="med" len="med"/>
+                      <a:tailEnd type="none" w="med" len="med"/>
+                    </a:lnT>
+                    <a:lnB w="12700" cap="flat" cmpd="sng" algn="ctr">
+                      <a:solidFill>
+                        <a:srgbClr val="D6DDEE"/>
+                      </a:solidFill>
+                      <a:prstDash val="solid"/>
+                      <a:round/>
+                      <a:headEnd type="none" w="med" len="med"/>
+                      <a:tailEnd type="none" w="med" len="med"/>
+                    </a:lnB>
+                    <a:solidFill>
+                      <a:srgbClr val="F8FAFE"/>
+                    </a:solidFill>
+                  </a:tcPr>
+                </a:tc>
+                <a:tc>
+                  <a:txBody>
+                    <a:bodyPr/>
+                    <a:lstStyle/>
+                    <a:p>
+                      <a:pPr indent="0" marL="0">
+                        <a:buNone/>
+                      </a:pPr>
+                      <a:r>
+                        <a:rPr lang="en-US" sz="900" dirty="0">
+                          <a:solidFill>
+                            <a:srgbClr val="5A6483"/>
+                          </a:solidFill>
+                          <a:latin typeface="Meiryo" pitchFamily="34" charset="0"/>
+                          <a:ea typeface="Meiryo" pitchFamily="34" charset="-122"/>
+                          <a:cs typeface="Meiryo" pitchFamily="34" charset="-120"/>
+                        </a:rPr>
+                        <a:t>掲載ページを特定できず（一次調査メモの数値）→ 要見積</a:t>
+                      </a:r>
+                      <a:endParaRPr lang="en-US" sz="900" dirty="0">
+                        <a:latin typeface="Meiryo" charset="0"/>
+                        <a:ea typeface="Meiryo" charset="0"/>
+                        <a:cs typeface="Meiryo" charset="0"/>
+                      </a:endParaRPr>
+                    </a:p>
+                  </a:txBody>
+                  <a:tcPr marL="63500" marR="63500" marT="63500" marB="63500" anchor="ctr">
+                    <a:lnL w="12700" cap="flat" cmpd="sng" algn="ctr">
+                      <a:solidFill>
+                        <a:srgbClr val="D6DDEE"/>
+                      </a:solidFill>
+                      <a:prstDash val="solid"/>
+                      <a:round/>
+                      <a:headEnd type="none" w="med" len="med"/>
+                      <a:tailEnd type="none" w="med" len="med"/>
+                    </a:lnL>
+                    <a:lnR w="12700" cap="flat" cmpd="sng" algn="ctr">
+                      <a:solidFill>
+                        <a:srgbClr val="D6DDEE"/>
+                      </a:solidFill>
+                      <a:prstDash val="solid"/>
+                      <a:round/>
+                      <a:headEnd type="none" w="med" len="med"/>
+                      <a:tailEnd type="none" w="med" len="med"/>
+                    </a:lnR>
+                    <a:lnT w="12700" cap="flat" cmpd="sng" algn="ctr">
+                      <a:solidFill>
+                        <a:srgbClr val="D6DDEE"/>
+                      </a:solidFill>
+                      <a:prstDash val="solid"/>
+                      <a:round/>
+                      <a:headEnd type="none" w="med" len="med"/>
+                      <a:tailEnd type="none" w="med" len="med"/>
+                    </a:lnT>
+                    <a:lnB w="12700" cap="flat" cmpd="sng" algn="ctr">
+                      <a:solidFill>
+                        <a:srgbClr val="D6DDEE"/>
+                      </a:solidFill>
+                      <a:prstDash val="solid"/>
+                      <a:round/>
+                      <a:headEnd type="none" w="med" len="med"/>
+                      <a:tailEnd type="none" w="med" len="med"/>
+                    </a:lnB>
+                    <a:solidFill>
+                      <a:srgbClr val="F8FAFE"/>
+                    </a:solidFill>
+                  </a:tcPr>
+                </a:tc>
+                <a:tc>
+                  <a:txBody>
+                    <a:bodyPr/>
+                    <a:lstStyle/>
+                    <a:p>
+                      <a:pPr algn="ctr" indent="0" marL="0">
+                        <a:buNone/>
+                      </a:pPr>
+                      <a:r>
+                        <a:rPr lang="en-US" sz="1200" b="1" dirty="0">
+                          <a:solidFill>
+                            <a:srgbClr val="B3453A"/>
+                          </a:solidFill>
+                          <a:latin typeface="Meiryo" pitchFamily="34" charset="0"/>
+                          <a:ea typeface="Meiryo" pitchFamily="34" charset="-122"/>
+                          <a:cs typeface="Meiryo" pitchFamily="34" charset="-120"/>
+                        </a:rPr>
+                        <a:t>C</a:t>
+                      </a:r>
+                      <a:endParaRPr lang="en-US" sz="1200" dirty="0">
+                        <a:latin typeface="Meiryo" charset="0"/>
+                        <a:ea typeface="Meiryo" charset="0"/>
+                        <a:cs typeface="Meiryo" charset="0"/>
+                      </a:endParaRPr>
+                    </a:p>
+                  </a:txBody>
+                  <a:tcPr marL="63500" marR="63500" marT="63500" marB="63500" anchor="ctr">
+                    <a:lnL w="12700" cap="flat" cmpd="sng" algn="ctr">
+                      <a:solidFill>
+                        <a:srgbClr val="D6DDEE"/>
+                      </a:solidFill>
+                      <a:prstDash val="solid"/>
+                      <a:round/>
+                      <a:headEnd type="none" w="med" len="med"/>
+                      <a:tailEnd type="none" w="med" len="med"/>
+                    </a:lnL>
+                    <a:lnR w="12700" cap="flat" cmpd="sng" algn="ctr">
+                      <a:solidFill>
+                        <a:srgbClr val="D6DDEE"/>
+                      </a:solidFill>
+                      <a:prstDash val="solid"/>
+                      <a:round/>
+                      <a:headEnd type="none" w="med" len="med"/>
+                      <a:tailEnd type="none" w="med" len="med"/>
+                    </a:lnR>
+                    <a:lnT w="12700" cap="flat" cmpd="sng" algn="ctr">
+                      <a:solidFill>
+                        <a:srgbClr val="D6DDEE"/>
+                      </a:solidFill>
+                      <a:prstDash val="solid"/>
+                      <a:round/>
+                      <a:headEnd type="none" w="med" len="med"/>
+                      <a:tailEnd type="none" w="med" len="med"/>
+                    </a:lnT>
+                    <a:lnB w="12700" cap="flat" cmpd="sng" algn="ctr">
+                      <a:solidFill>
+                        <a:srgbClr val="D6DDEE"/>
+                      </a:solidFill>
+                      <a:prstDash val="solid"/>
+                      <a:round/>
+                      <a:headEnd type="none" w="med" len="med"/>
+                      <a:tailEnd type="none" w="med" len="med"/>
+                    </a:lnB>
+                    <a:solidFill>
+                      <a:srgbClr val="F8FAFE"/>
+                    </a:solidFill>
+                  </a:tcPr>
+                </a:tc>
+              </a:tr>
+              <a:tr h="365760">
+                <a:tc>
+                  <a:txBody>
+                    <a:bodyPr/>
+                    <a:lstStyle/>
+                    <a:p>
+                      <a:pPr indent="0" marL="0">
+                        <a:buNone/>
+                      </a:pPr>
+                      <a:r>
+                        <a:rPr lang="en-US" sz="950" b="1" dirty="0">
+                          <a:solidFill>
+                            <a:srgbClr val="1E2761"/>
+                          </a:solidFill>
+                          <a:latin typeface="Meiryo" pitchFamily="34" charset="0"/>
+                          <a:ea typeface="Meiryo" pitchFamily="34" charset="-122"/>
+                          <a:cs typeface="Meiryo" pitchFamily="34" charset="-120"/>
+                        </a:rPr>
+                        <a:t>ST：ロット・単価</a:t>
+                      </a:r>
+                      <a:endParaRPr lang="en-US" sz="950" dirty="0">
+                        <a:latin typeface="Meiryo" charset="0"/>
+                        <a:ea typeface="Meiryo" charset="0"/>
+                        <a:cs typeface="Meiryo" charset="0"/>
+                      </a:endParaRPr>
+                    </a:p>
+                  </a:txBody>
+                  <a:tcPr marL="63500" marR="63500" marT="63500" marB="63500" anchor="ctr">
+                    <a:lnL w="12700" cap="flat" cmpd="sng" algn="ctr">
+                      <a:solidFill>
+                        <a:srgbClr val="D6DDEE"/>
+                      </a:solidFill>
+                      <a:prstDash val="solid"/>
+                      <a:round/>
+                      <a:headEnd type="none" w="med" len="med"/>
+                      <a:tailEnd type="none" w="med" len="med"/>
+                    </a:lnL>
+                    <a:lnR w="12700" cap="flat" cmpd="sng" algn="ctr">
+                      <a:solidFill>
+                        <a:srgbClr val="D6DDEE"/>
+                      </a:solidFill>
+                      <a:prstDash val="solid"/>
+                      <a:round/>
+                      <a:headEnd type="none" w="med" len="med"/>
+                      <a:tailEnd type="none" w="med" len="med"/>
+                    </a:lnR>
+                    <a:lnT w="12700" cap="flat" cmpd="sng" algn="ctr">
+                      <a:solidFill>
+                        <a:srgbClr val="D6DDEE"/>
+                      </a:solidFill>
+                      <a:prstDash val="solid"/>
+                      <a:round/>
+                      <a:headEnd type="none" w="med" len="med"/>
+                      <a:tailEnd type="none" w="med" len="med"/>
+                    </a:lnT>
+                    <a:lnB w="12700" cap="flat" cmpd="sng" algn="ctr">
+                      <a:solidFill>
+                        <a:srgbClr val="D6DDEE"/>
+                      </a:solidFill>
+                      <a:prstDash val="solid"/>
+                      <a:round/>
+                      <a:headEnd type="none" w="med" len="med"/>
+                      <a:tailEnd type="none" w="med" len="med"/>
+                    </a:lnB>
+                    <a:solidFill>
+                      <a:srgbClr val="FFFFFF"/>
+                    </a:solidFill>
+                  </a:tcPr>
+                </a:tc>
+                <a:tc>
+                  <a:txBody>
+                    <a:bodyPr/>
+                    <a:lstStyle/>
+                    <a:p>
+                      <a:pPr indent="0" marL="0">
+                        <a:buNone/>
+                      </a:pPr>
+                      <a:r>
+                        <a:rPr lang="en-US" sz="950" dirty="0">
+                          <a:solidFill>
+                            <a:srgbClr val="1B2233"/>
+                          </a:solidFill>
+                          <a:latin typeface="Meiryo" pitchFamily="34" charset="0"/>
+                          <a:ea typeface="Meiryo" pitchFamily="34" charset="-122"/>
+                          <a:cs typeface="Meiryo" pitchFamily="34" charset="-120"/>
+                        </a:rPr>
+                        <a:t>1本〜／昇華232円〜・シルク137円〜／10mm100本＝244円</a:t>
+                      </a:r>
+                      <a:endParaRPr lang="en-US" sz="950" dirty="0">
+                        <a:latin typeface="Meiryo" charset="0"/>
+                        <a:ea typeface="Meiryo" charset="0"/>
+                        <a:cs typeface="Meiryo" charset="0"/>
+                      </a:endParaRPr>
+                    </a:p>
+                  </a:txBody>
+                  <a:tcPr marL="63500" marR="63500" marT="63500" marB="63500" anchor="ctr">
+                    <a:lnL w="12700" cap="flat" cmpd="sng" algn="ctr">
+                      <a:solidFill>
+                        <a:srgbClr val="D6DDEE"/>
+                      </a:solidFill>
+                      <a:prstDash val="solid"/>
+                      <a:round/>
+                      <a:headEnd type="none" w="med" len="med"/>
+                      <a:tailEnd type="none" w="med" len="med"/>
+                    </a:lnL>
+                    <a:lnR w="12700" cap="flat" cmpd="sng" algn="ctr">
+                      <a:solidFill>
+                        <a:srgbClr val="D6DDEE"/>
+                      </a:solidFill>
+                      <a:prstDash val="solid"/>
+                      <a:round/>
+                      <a:headEnd type="none" w="med" len="med"/>
+                      <a:tailEnd type="none" w="med" len="med"/>
+                    </a:lnR>
+                    <a:lnT w="12700" cap="flat" cmpd="sng" algn="ctr">
+                      <a:solidFill>
+                        <a:srgbClr val="D6DDEE"/>
+                      </a:solidFill>
+                      <a:prstDash val="solid"/>
+                      <a:round/>
+                      <a:headEnd type="none" w="med" len="med"/>
+                      <a:tailEnd type="none" w="med" len="med"/>
+                    </a:lnT>
+                    <a:lnB w="12700" cap="flat" cmpd="sng" algn="ctr">
+                      <a:solidFill>
+                        <a:srgbClr val="D6DDEE"/>
+                      </a:solidFill>
+                      <a:prstDash val="solid"/>
+                      <a:round/>
+                      <a:headEnd type="none" w="med" len="med"/>
+                      <a:tailEnd type="none" w="med" len="med"/>
+                    </a:lnB>
+                    <a:solidFill>
+                      <a:srgbClr val="FFFFFF"/>
+                    </a:solidFill>
+                  </a:tcPr>
+                </a:tc>
+                <a:tc>
+                  <a:txBody>
+                    <a:bodyPr/>
+                    <a:lstStyle/>
+                    <a:p>
+                      <a:pPr indent="0" marL="0">
+                        <a:buNone/>
+                      </a:pPr>
+                      <a:r>
+                        <a:rPr lang="en-US" sz="900" dirty="0">
+                          <a:solidFill>
+                            <a:srgbClr val="5A6483"/>
+                          </a:solidFill>
+                          <a:latin typeface="Meiryo" pitchFamily="34" charset="0"/>
+                          <a:ea typeface="Meiryo" pitchFamily="34" charset="-122"/>
+                          <a:cs typeface="Meiryo" pitchFamily="34" charset="-120"/>
+                        </a:rPr>
+                        <a:t>hotstrap.jp/fullcolor.php ＋ hotstrap.jp/nylon ＋ /order/fullcolor</a:t>
+                      </a:r>
+                      <a:endParaRPr lang="en-US" sz="900" dirty="0">
+                        <a:latin typeface="Meiryo" charset="0"/>
+                        <a:ea typeface="Meiryo" charset="0"/>
+                        <a:cs typeface="Meiryo" charset="0"/>
+                      </a:endParaRPr>
+                    </a:p>
+                  </a:txBody>
+                  <a:tcPr marL="63500" marR="63500" marT="63500" marB="63500" anchor="ctr">
+                    <a:lnL w="12700" cap="flat" cmpd="sng" algn="ctr">
+                      <a:solidFill>
+                        <a:srgbClr val="D6DDEE"/>
+                      </a:solidFill>
+                      <a:prstDash val="solid"/>
+                      <a:round/>
+                      <a:headEnd type="none" w="med" len="med"/>
+                      <a:tailEnd type="none" w="med" len="med"/>
+                    </a:lnL>
+                    <a:lnR w="12700" cap="flat" cmpd="sng" algn="ctr">
+                      <a:solidFill>
+                        <a:srgbClr val="D6DDEE"/>
+                      </a:solidFill>
+                      <a:prstDash val="solid"/>
+                      <a:round/>
+                      <a:headEnd type="none" w="med" len="med"/>
+                      <a:tailEnd type="none" w="med" len="med"/>
+                    </a:lnR>
+                    <a:lnT w="12700" cap="flat" cmpd="sng" algn="ctr">
+                      <a:solidFill>
+                        <a:srgbClr val="D6DDEE"/>
+                      </a:solidFill>
+                      <a:prstDash val="solid"/>
+                      <a:round/>
+                      <a:headEnd type="none" w="med" len="med"/>
+                      <a:tailEnd type="none" w="med" len="med"/>
+                    </a:lnT>
+                    <a:lnB w="12700" cap="flat" cmpd="sng" algn="ctr">
+                      <a:solidFill>
+                        <a:srgbClr val="D6DDEE"/>
+                      </a:solidFill>
+                      <a:prstDash val="solid"/>
+                      <a:round/>
+                      <a:headEnd type="none" w="med" len="med"/>
+                      <a:tailEnd type="none" w="med" len="med"/>
+                    </a:lnB>
+                    <a:solidFill>
+                      <a:srgbClr val="FFFFFF"/>
+                    </a:solidFill>
+                  </a:tcPr>
+                </a:tc>
+                <a:tc>
+                  <a:txBody>
+                    <a:bodyPr/>
+                    <a:lstStyle/>
+                    <a:p>
+                      <a:pPr algn="ctr" indent="0" marL="0">
+                        <a:buNone/>
+                      </a:pPr>
+                      <a:r>
+                        <a:rPr lang="en-US" sz="1200" b="1" dirty="0">
+                          <a:solidFill>
+                            <a:srgbClr val="2E7D5B"/>
+                          </a:solidFill>
+                          <a:latin typeface="Meiryo" pitchFamily="34" charset="0"/>
+                          <a:ea typeface="Meiryo" pitchFamily="34" charset="-122"/>
+                          <a:cs typeface="Meiryo" pitchFamily="34" charset="-120"/>
+                        </a:rPr>
+                        <a:t>A</a:t>
+                      </a:r>
+                      <a:endParaRPr lang="en-US" sz="1200" dirty="0">
+                        <a:latin typeface="Meiryo" charset="0"/>
+                        <a:ea typeface="Meiryo" charset="0"/>
+                        <a:cs typeface="Meiryo" charset="0"/>
+                      </a:endParaRPr>
+                    </a:p>
+                  </a:txBody>
+                  <a:tcPr marL="63500" marR="63500" marT="63500" marB="63500" anchor="ctr">
+                    <a:lnL w="12700" cap="flat" cmpd="sng" algn="ctr">
+                      <a:solidFill>
+                        <a:srgbClr val="D6DDEE"/>
+                      </a:solidFill>
+                      <a:prstDash val="solid"/>
+                      <a:round/>
+                      <a:headEnd type="none" w="med" len="med"/>
+                      <a:tailEnd type="none" w="med" len="med"/>
+                    </a:lnL>
+                    <a:lnR w="12700" cap="flat" cmpd="sng" algn="ctr">
+                      <a:solidFill>
+                        <a:srgbClr val="D6DDEE"/>
+                      </a:solidFill>
+                      <a:prstDash val="solid"/>
+                      <a:round/>
+                      <a:headEnd type="none" w="med" len="med"/>
+                      <a:tailEnd type="none" w="med" len="med"/>
+                    </a:lnR>
+                    <a:lnT w="12700" cap="flat" cmpd="sng" algn="ctr">
+                      <a:solidFill>
+                        <a:srgbClr val="D6DDEE"/>
+                      </a:solidFill>
+                      <a:prstDash val="solid"/>
+                      <a:round/>
+                      <a:headEnd type="none" w="med" len="med"/>
+                      <a:tailEnd type="none" w="med" len="med"/>
+                    </a:lnT>
+                    <a:lnB w="12700" cap="flat" cmpd="sng" algn="ctr">
+                      <a:solidFill>
+                        <a:srgbClr val="D6DDEE"/>
+                      </a:solidFill>
+                      <a:prstDash val="solid"/>
+                      <a:round/>
+                      <a:headEnd type="none" w="med" len="med"/>
+                      <a:tailEnd type="none" w="med" len="med"/>
+                    </a:lnB>
+                    <a:solidFill>
+                      <a:srgbClr val="FFFFFF"/>
+                    </a:solidFill>
+                  </a:tcPr>
+                </a:tc>
+              </a:tr>
+              <a:tr h="365760">
+                <a:tc>
+                  <a:txBody>
+                    <a:bodyPr/>
+                    <a:lstStyle/>
+                    <a:p>
+                      <a:pPr indent="0" marL="0">
+                        <a:buNone/>
+                      </a:pPr>
+                      <a:r>
+                        <a:rPr lang="en-US" sz="950" b="1" dirty="0">
+                          <a:solidFill>
+                            <a:srgbClr val="1E2761"/>
+                          </a:solidFill>
+                          <a:latin typeface="Meiryo" pitchFamily="34" charset="0"/>
+                          <a:ea typeface="Meiryo" pitchFamily="34" charset="-122"/>
+                          <a:cs typeface="Meiryo" pitchFamily="34" charset="-120"/>
+                        </a:rPr>
+                        <a:t>ST：納期</a:t>
+                      </a:r>
+                      <a:endParaRPr lang="en-US" sz="950" dirty="0">
+                        <a:latin typeface="Meiryo" charset="0"/>
+                        <a:ea typeface="Meiryo" charset="0"/>
+                        <a:cs typeface="Meiryo" charset="0"/>
+                      </a:endParaRPr>
+                    </a:p>
+                  </a:txBody>
+                  <a:tcPr marL="63500" marR="63500" marT="63500" marB="63500" anchor="ctr">
+                    <a:lnL w="12700" cap="flat" cmpd="sng" algn="ctr">
+                      <a:solidFill>
+                        <a:srgbClr val="D6DDEE"/>
+                      </a:solidFill>
+                      <a:prstDash val="solid"/>
+                      <a:round/>
+                      <a:headEnd type="none" w="med" len="med"/>
+                      <a:tailEnd type="none" w="med" len="med"/>
+                    </a:lnL>
+                    <a:lnR w="12700" cap="flat" cmpd="sng" algn="ctr">
+                      <a:solidFill>
+                        <a:srgbClr val="D6DDEE"/>
+                      </a:solidFill>
+                      <a:prstDash val="solid"/>
+                      <a:round/>
+                      <a:headEnd type="none" w="med" len="med"/>
+                      <a:tailEnd type="none" w="med" len="med"/>
+                    </a:lnR>
+                    <a:lnT w="12700" cap="flat" cmpd="sng" algn="ctr">
+                      <a:solidFill>
+                        <a:srgbClr val="D6DDEE"/>
+                      </a:solidFill>
+                      <a:prstDash val="solid"/>
+                      <a:round/>
+                      <a:headEnd type="none" w="med" len="med"/>
+                      <a:tailEnd type="none" w="med" len="med"/>
+                    </a:lnT>
+                    <a:lnB w="12700" cap="flat" cmpd="sng" algn="ctr">
+                      <a:solidFill>
+                        <a:srgbClr val="D6DDEE"/>
+                      </a:solidFill>
+                      <a:prstDash val="solid"/>
+                      <a:round/>
+                      <a:headEnd type="none" w="med" len="med"/>
+                      <a:tailEnd type="none" w="med" len="med"/>
+                    </a:lnB>
+                    <a:solidFill>
+                      <a:srgbClr val="F8FAFE"/>
+                    </a:solidFill>
+                  </a:tcPr>
+                </a:tc>
+                <a:tc>
+                  <a:txBody>
+                    <a:bodyPr/>
+                    <a:lstStyle/>
+                    <a:p>
+                      <a:pPr indent="0" marL="0">
+                        <a:buNone/>
+                      </a:pPr>
+                      <a:r>
+                        <a:rPr lang="en-US" sz="950" dirty="0">
+                          <a:solidFill>
+                            <a:srgbClr val="1B2233"/>
+                          </a:solidFill>
+                          <a:latin typeface="Meiryo" pitchFamily="34" charset="0"/>
+                          <a:ea typeface="Meiryo" pitchFamily="34" charset="-122"/>
+                          <a:cs typeface="Meiryo" pitchFamily="34" charset="-120"/>
+                        </a:rPr>
+                        <a:t>通常6〜9営業日／特急4〜5営業日</a:t>
+                      </a:r>
+                      <a:endParaRPr lang="en-US" sz="950" dirty="0">
+                        <a:latin typeface="Meiryo" charset="0"/>
+                        <a:ea typeface="Meiryo" charset="0"/>
+                        <a:cs typeface="Meiryo" charset="0"/>
+                      </a:endParaRPr>
+                    </a:p>
+                  </a:txBody>
+                  <a:tcPr marL="63500" marR="63500" marT="63500" marB="63500" anchor="ctr">
+                    <a:lnL w="12700" cap="flat" cmpd="sng" algn="ctr">
+                      <a:solidFill>
+                        <a:srgbClr val="D6DDEE"/>
+                      </a:solidFill>
+                      <a:prstDash val="solid"/>
+                      <a:round/>
+                      <a:headEnd type="none" w="med" len="med"/>
+                      <a:tailEnd type="none" w="med" len="med"/>
+                    </a:lnL>
+                    <a:lnR w="12700" cap="flat" cmpd="sng" algn="ctr">
+                      <a:solidFill>
+                        <a:srgbClr val="D6DDEE"/>
+                      </a:solidFill>
+                      <a:prstDash val="solid"/>
+                      <a:round/>
+                      <a:headEnd type="none" w="med" len="med"/>
+                      <a:tailEnd type="none" w="med" len="med"/>
+                    </a:lnR>
+                    <a:lnT w="12700" cap="flat" cmpd="sng" algn="ctr">
+                      <a:solidFill>
+                        <a:srgbClr val="D6DDEE"/>
+                      </a:solidFill>
+                      <a:prstDash val="solid"/>
+                      <a:round/>
+                      <a:headEnd type="none" w="med" len="med"/>
+                      <a:tailEnd type="none" w="med" len="med"/>
+                    </a:lnT>
+                    <a:lnB w="12700" cap="flat" cmpd="sng" algn="ctr">
+                      <a:solidFill>
+                        <a:srgbClr val="D6DDEE"/>
+                      </a:solidFill>
+                      <a:prstDash val="solid"/>
+                      <a:round/>
+                      <a:headEnd type="none" w="med" len="med"/>
+                      <a:tailEnd type="none" w="med" len="med"/>
+                    </a:lnB>
+                    <a:solidFill>
+                      <a:srgbClr val="F8FAFE"/>
+                    </a:solidFill>
+                  </a:tcPr>
+                </a:tc>
+                <a:tc>
+                  <a:txBody>
+                    <a:bodyPr/>
+                    <a:lstStyle/>
+                    <a:p>
+                      <a:pPr indent="0" marL="0">
+                        <a:buNone/>
+                      </a:pPr>
+                      <a:r>
+                        <a:rPr lang="en-US" sz="900" dirty="0">
+                          <a:solidFill>
+                            <a:srgbClr val="5A6483"/>
+                          </a:solidFill>
+                          <a:latin typeface="Meiryo" pitchFamily="34" charset="0"/>
+                          <a:ea typeface="Meiryo" pitchFamily="34" charset="-122"/>
+                          <a:cs typeface="Meiryo" pitchFamily="34" charset="-120"/>
+                        </a:rPr>
+                        <a:t>hotstrap.jp/nylon（納期案内）</a:t>
+                      </a:r>
+                      <a:endParaRPr lang="en-US" sz="900" dirty="0">
+                        <a:latin typeface="Meiryo" charset="0"/>
+                        <a:ea typeface="Meiryo" charset="0"/>
+                        <a:cs typeface="Meiryo" charset="0"/>
+                      </a:endParaRPr>
+                    </a:p>
+                  </a:txBody>
+                  <a:tcPr marL="63500" marR="63500" marT="63500" marB="63500" anchor="ctr">
+                    <a:lnL w="12700" cap="flat" cmpd="sng" algn="ctr">
+                      <a:solidFill>
+                        <a:srgbClr val="D6DDEE"/>
+                      </a:solidFill>
+                      <a:prstDash val="solid"/>
+                      <a:round/>
+                      <a:headEnd type="none" w="med" len="med"/>
+                      <a:tailEnd type="none" w="med" len="med"/>
+                    </a:lnL>
+                    <a:lnR w="12700" cap="flat" cmpd="sng" algn="ctr">
+                      <a:solidFill>
+                        <a:srgbClr val="D6DDEE"/>
+                      </a:solidFill>
+                      <a:prstDash val="solid"/>
+                      <a:round/>
+                      <a:headEnd type="none" w="med" len="med"/>
+                      <a:tailEnd type="none" w="med" len="med"/>
+                    </a:lnR>
+                    <a:lnT w="12700" cap="flat" cmpd="sng" algn="ctr">
+                      <a:solidFill>
+                        <a:srgbClr val="D6DDEE"/>
+                      </a:solidFill>
+                      <a:prstDash val="solid"/>
+                      <a:round/>
+                      <a:headEnd type="none" w="med" len="med"/>
+                      <a:tailEnd type="none" w="med" len="med"/>
+                    </a:lnT>
+                    <a:lnB w="12700" cap="flat" cmpd="sng" algn="ctr">
+                      <a:solidFill>
+                        <a:srgbClr val="D6DDEE"/>
+                      </a:solidFill>
+                      <a:prstDash val="solid"/>
+                      <a:round/>
+                      <a:headEnd type="none" w="med" len="med"/>
+                      <a:tailEnd type="none" w="med" len="med"/>
+                    </a:lnB>
+                    <a:solidFill>
+                      <a:srgbClr val="F8FAFE"/>
+                    </a:solidFill>
+                  </a:tcPr>
+                </a:tc>
+                <a:tc>
+                  <a:txBody>
+                    <a:bodyPr/>
+                    <a:lstStyle/>
+                    <a:p>
+                      <a:pPr algn="ctr" indent="0" marL="0">
+                        <a:buNone/>
+                      </a:pPr>
+                      <a:r>
+                        <a:rPr lang="en-US" sz="1200" b="1" dirty="0">
+                          <a:solidFill>
+                            <a:srgbClr val="2E7D5B"/>
+                          </a:solidFill>
+                          <a:latin typeface="Meiryo" pitchFamily="34" charset="0"/>
+                          <a:ea typeface="Meiryo" pitchFamily="34" charset="-122"/>
+                          <a:cs typeface="Meiryo" pitchFamily="34" charset="-120"/>
+                        </a:rPr>
+                        <a:t>A</a:t>
+                      </a:r>
+                      <a:endParaRPr lang="en-US" sz="1200" dirty="0">
+                        <a:latin typeface="Meiryo" charset="0"/>
+                        <a:ea typeface="Meiryo" charset="0"/>
+                        <a:cs typeface="Meiryo" charset="0"/>
+                      </a:endParaRPr>
+                    </a:p>
+                  </a:txBody>
+                  <a:tcPr marL="63500" marR="63500" marT="63500" marB="63500" anchor="ctr">
+                    <a:lnL w="12700" cap="flat" cmpd="sng" algn="ctr">
+                      <a:solidFill>
+                        <a:srgbClr val="D6DDEE"/>
+                      </a:solidFill>
+                      <a:prstDash val="solid"/>
+                      <a:round/>
+                      <a:headEnd type="none" w="med" len="med"/>
+                      <a:tailEnd type="none" w="med" len="med"/>
+                    </a:lnL>
+                    <a:lnR w="12700" cap="flat" cmpd="sng" algn="ctr">
+                      <a:solidFill>
+                        <a:srgbClr val="D6DDEE"/>
+                      </a:solidFill>
+                      <a:prstDash val="solid"/>
+                      <a:round/>
+                      <a:headEnd type="none" w="med" len="med"/>
+                      <a:tailEnd type="none" w="med" len="med"/>
+                    </a:lnR>
+                    <a:lnT w="12700" cap="flat" cmpd="sng" algn="ctr">
+                      <a:solidFill>
+                        <a:srgbClr val="D6DDEE"/>
+                      </a:solidFill>
+                      <a:prstDash val="solid"/>
+                      <a:round/>
+                      <a:headEnd type="none" w="med" len="med"/>
+                      <a:tailEnd type="none" w="med" len="med"/>
+                    </a:lnT>
+                    <a:lnB w="12700" cap="flat" cmpd="sng" algn="ctr">
+                      <a:solidFill>
+                        <a:srgbClr val="D6DDEE"/>
+                      </a:solidFill>
+                      <a:prstDash val="solid"/>
+                      <a:round/>
+                      <a:headEnd type="none" w="med" len="med"/>
+                      <a:tailEnd type="none" w="med" len="med"/>
+                    </a:lnB>
+                    <a:solidFill>
+                      <a:srgbClr val="F8FAFE"/>
+                    </a:solidFill>
+                  </a:tcPr>
+                </a:tc>
+              </a:tr>
+              <a:tr h="365760">
+                <a:tc>
+                  <a:txBody>
+                    <a:bodyPr/>
+                    <a:lstStyle/>
+                    <a:p>
+                      <a:pPr indent="0" marL="0">
+                        <a:buNone/>
+                      </a:pPr>
+                      <a:r>
+                        <a:rPr lang="en-US" sz="950" b="1" dirty="0">
+                          <a:solidFill>
+                            <a:srgbClr val="1E2761"/>
+                          </a:solidFill>
+                          <a:latin typeface="Meiryo" pitchFamily="34" charset="0"/>
+                          <a:ea typeface="Meiryo" pitchFamily="34" charset="-122"/>
+                          <a:cs typeface="Meiryo" pitchFamily="34" charset="-120"/>
+                        </a:rPr>
+                        <a:t>ST：昇華専門店</a:t>
+                      </a:r>
+                      <a:endParaRPr lang="en-US" sz="950" dirty="0">
+                        <a:latin typeface="Meiryo" charset="0"/>
+                        <a:ea typeface="Meiryo" charset="0"/>
+                        <a:cs typeface="Meiryo" charset="0"/>
+                      </a:endParaRPr>
+                    </a:p>
+                  </a:txBody>
+                  <a:tcPr marL="63500" marR="63500" marT="63500" marB="63500" anchor="ctr">
+                    <a:lnL w="12700" cap="flat" cmpd="sng" algn="ctr">
+                      <a:solidFill>
+                        <a:srgbClr val="D6DDEE"/>
+                      </a:solidFill>
+                      <a:prstDash val="solid"/>
+                      <a:round/>
+                      <a:headEnd type="none" w="med" len="med"/>
+                      <a:tailEnd type="none" w="med" len="med"/>
+                    </a:lnL>
+                    <a:lnR w="12700" cap="flat" cmpd="sng" algn="ctr">
+                      <a:solidFill>
+                        <a:srgbClr val="D6DDEE"/>
+                      </a:solidFill>
+                      <a:prstDash val="solid"/>
+                      <a:round/>
+                      <a:headEnd type="none" w="med" len="med"/>
+                      <a:tailEnd type="none" w="med" len="med"/>
+                    </a:lnR>
+                    <a:lnT w="12700" cap="flat" cmpd="sng" algn="ctr">
+                      <a:solidFill>
+                        <a:srgbClr val="D6DDEE"/>
+                      </a:solidFill>
+                      <a:prstDash val="solid"/>
+                      <a:round/>
+                      <a:headEnd type="none" w="med" len="med"/>
+                      <a:tailEnd type="none" w="med" len="med"/>
+                    </a:lnT>
+                    <a:lnB w="12700" cap="flat" cmpd="sng" algn="ctr">
+                      <a:solidFill>
+                        <a:srgbClr val="D6DDEE"/>
+                      </a:solidFill>
+                      <a:prstDash val="solid"/>
+                      <a:round/>
+                      <a:headEnd type="none" w="med" len="med"/>
+                      <a:tailEnd type="none" w="med" len="med"/>
+                    </a:lnB>
+                    <a:solidFill>
+                      <a:srgbClr val="FFFFFF"/>
+                    </a:solidFill>
+                  </a:tcPr>
+                </a:tc>
+                <a:tc>
+                  <a:txBody>
+                    <a:bodyPr/>
+                    <a:lstStyle/>
+                    <a:p>
+                      <a:pPr indent="0" marL="0">
+                        <a:buNone/>
+                      </a:pPr>
+                      <a:r>
+                        <a:rPr lang="en-US" sz="950" dirty="0">
+                          <a:solidFill>
+                            <a:srgbClr val="1B2233"/>
+                          </a:solidFill>
+                          <a:latin typeface="Meiryo" pitchFamily="34" charset="0"/>
+                          <a:ea typeface="Meiryo" pitchFamily="34" charset="-122"/>
+                          <a:cs typeface="Meiryo" pitchFamily="34" charset="-120"/>
+                        </a:rPr>
+                        <a:t>KANARY 30本〜／青山 30〜5,000本・14日目出荷・100円〜</a:t>
+                      </a:r>
+                      <a:endParaRPr lang="en-US" sz="950" dirty="0">
+                        <a:latin typeface="Meiryo" charset="0"/>
+                        <a:ea typeface="Meiryo" charset="0"/>
+                        <a:cs typeface="Meiryo" charset="0"/>
+                      </a:endParaRPr>
+                    </a:p>
+                  </a:txBody>
+                  <a:tcPr marL="63500" marR="63500" marT="63500" marB="63500" anchor="ctr">
+                    <a:lnL w="12700" cap="flat" cmpd="sng" algn="ctr">
+                      <a:solidFill>
+                        <a:srgbClr val="D6DDEE"/>
+                      </a:solidFill>
+                      <a:prstDash val="solid"/>
+                      <a:round/>
+                      <a:headEnd type="none" w="med" len="med"/>
+                      <a:tailEnd type="none" w="med" len="med"/>
+                    </a:lnL>
+                    <a:lnR w="12700" cap="flat" cmpd="sng" algn="ctr">
+                      <a:solidFill>
+                        <a:srgbClr val="D6DDEE"/>
+                      </a:solidFill>
+                      <a:prstDash val="solid"/>
+                      <a:round/>
+                      <a:headEnd type="none" w="med" len="med"/>
+                      <a:tailEnd type="none" w="med" len="med"/>
+                    </a:lnR>
+                    <a:lnT w="12700" cap="flat" cmpd="sng" algn="ctr">
+                      <a:solidFill>
+                        <a:srgbClr val="D6DDEE"/>
+                      </a:solidFill>
+                      <a:prstDash val="solid"/>
+                      <a:round/>
+                      <a:headEnd type="none" w="med" len="med"/>
+                      <a:tailEnd type="none" w="med" len="med"/>
+                    </a:lnT>
+                    <a:lnB w="12700" cap="flat" cmpd="sng" algn="ctr">
+                      <a:solidFill>
+                        <a:srgbClr val="D6DDEE"/>
+                      </a:solidFill>
+                      <a:prstDash val="solid"/>
+                      <a:round/>
+                      <a:headEnd type="none" w="med" len="med"/>
+                      <a:tailEnd type="none" w="med" len="med"/>
+                    </a:lnB>
+                    <a:solidFill>
+                      <a:srgbClr val="FFFFFF"/>
+                    </a:solidFill>
+                  </a:tcPr>
+                </a:tc>
+                <a:tc>
+                  <a:txBody>
+                    <a:bodyPr/>
+                    <a:lstStyle/>
+                    <a:p>
+                      <a:pPr indent="0" marL="0">
+                        <a:buNone/>
+                      </a:pPr>
+                      <a:r>
+                        <a:rPr lang="en-US" sz="900" dirty="0">
+                          <a:solidFill>
+                            <a:srgbClr val="5A6483"/>
+                          </a:solidFill>
+                          <a:latin typeface="Meiryo" pitchFamily="34" charset="0"/>
+                          <a:ea typeface="Meiryo" pitchFamily="34" charset="-122"/>
+                          <a:cs typeface="Meiryo" pitchFamily="34" charset="-120"/>
+                        </a:rPr>
+                        <a:t>kanary.jp/.../shoka_neck_price.html ＋ ao-strap.com/largeorder.html</a:t>
+                      </a:r>
+                      <a:endParaRPr lang="en-US" sz="900" dirty="0">
+                        <a:latin typeface="Meiryo" charset="0"/>
+                        <a:ea typeface="Meiryo" charset="0"/>
+                        <a:cs typeface="Meiryo" charset="0"/>
+                      </a:endParaRPr>
+                    </a:p>
+                  </a:txBody>
+                  <a:tcPr marL="63500" marR="63500" marT="63500" marB="63500" anchor="ctr">
+                    <a:lnL w="12700" cap="flat" cmpd="sng" algn="ctr">
+                      <a:solidFill>
+                        <a:srgbClr val="D6DDEE"/>
+                      </a:solidFill>
+                      <a:prstDash val="solid"/>
+                      <a:round/>
+                      <a:headEnd type="none" w="med" len="med"/>
+                      <a:tailEnd type="none" w="med" len="med"/>
+                    </a:lnL>
+                    <a:lnR w="12700" cap="flat" cmpd="sng" algn="ctr">
+                      <a:solidFill>
+                        <a:srgbClr val="D6DDEE"/>
+                      </a:solidFill>
+                      <a:prstDash val="solid"/>
+                      <a:round/>
+                      <a:headEnd type="none" w="med" len="med"/>
+                      <a:tailEnd type="none" w="med" len="med"/>
+                    </a:lnR>
+                    <a:lnT w="12700" cap="flat" cmpd="sng" algn="ctr">
+                      <a:solidFill>
+                        <a:srgbClr val="D6DDEE"/>
+                      </a:solidFill>
+                      <a:prstDash val="solid"/>
+                      <a:round/>
+                      <a:headEnd type="none" w="med" len="med"/>
+                      <a:tailEnd type="none" w="med" len="med"/>
+                    </a:lnT>
+                    <a:lnB w="12700" cap="flat" cmpd="sng" algn="ctr">
+                      <a:solidFill>
+                        <a:srgbClr val="D6DDEE"/>
+                      </a:solidFill>
+                      <a:prstDash val="solid"/>
+                      <a:round/>
+                      <a:headEnd type="none" w="med" len="med"/>
+                      <a:tailEnd type="none" w="med" len="med"/>
+                    </a:lnB>
+                    <a:solidFill>
+                      <a:srgbClr val="FFFFFF"/>
+                    </a:solidFill>
+                  </a:tcPr>
+                </a:tc>
+                <a:tc>
+                  <a:txBody>
+                    <a:bodyPr/>
+                    <a:lstStyle/>
+                    <a:p>
+                      <a:pPr algn="ctr" indent="0" marL="0">
+                        <a:buNone/>
+                      </a:pPr>
+                      <a:r>
+                        <a:rPr lang="en-US" sz="1200" b="1" dirty="0">
+                          <a:solidFill>
+                            <a:srgbClr val="B0730F"/>
+                          </a:solidFill>
+                          <a:latin typeface="Meiryo" pitchFamily="34" charset="0"/>
+                          <a:ea typeface="Meiryo" pitchFamily="34" charset="-122"/>
+                          <a:cs typeface="Meiryo" pitchFamily="34" charset="-120"/>
+                        </a:rPr>
+                        <a:t>B</a:t>
+                      </a:r>
+                      <a:endParaRPr lang="en-US" sz="1200" dirty="0">
+                        <a:latin typeface="Meiryo" charset="0"/>
+                        <a:ea typeface="Meiryo" charset="0"/>
+                        <a:cs typeface="Meiryo" charset="0"/>
+                      </a:endParaRPr>
+                    </a:p>
+                  </a:txBody>
+                  <a:tcPr marL="63500" marR="63500" marT="63500" marB="63500" anchor="ctr">
+                    <a:lnL w="12700" cap="flat" cmpd="sng" algn="ctr">
+                      <a:solidFill>
+                        <a:srgbClr val="D6DDEE"/>
+                      </a:solidFill>
+                      <a:prstDash val="solid"/>
+                      <a:round/>
+                      <a:headEnd type="none" w="med" len="med"/>
+                      <a:tailEnd type="none" w="med" len="med"/>
+                    </a:lnL>
+                    <a:lnR w="12700" cap="flat" cmpd="sng" algn="ctr">
+                      <a:solidFill>
+                        <a:srgbClr val="D6DDEE"/>
+                      </a:solidFill>
+                      <a:prstDash val="solid"/>
+                      <a:round/>
+                      <a:headEnd type="none" w="med" len="med"/>
+                      <a:tailEnd type="none" w="med" len="med"/>
+                    </a:lnR>
+                    <a:lnT w="12700" cap="flat" cmpd="sng" algn="ctr">
+                      <a:solidFill>
+                        <a:srgbClr val="D6DDEE"/>
+                      </a:solidFill>
+                      <a:prstDash val="solid"/>
+                      <a:round/>
+                      <a:headEnd type="none" w="med" len="med"/>
+                      <a:tailEnd type="none" w="med" len="med"/>
+                    </a:lnT>
+                    <a:lnB w="12700" cap="flat" cmpd="sng" algn="ctr">
+                      <a:solidFill>
+                        <a:srgbClr val="D6DDEE"/>
+                      </a:solidFill>
+                      <a:prstDash val="solid"/>
+                      <a:round/>
+                      <a:headEnd type="none" w="med" len="med"/>
+                      <a:tailEnd type="none" w="med" len="med"/>
+                    </a:lnB>
+                    <a:solidFill>
+                      <a:srgbClr val="FFFFFF"/>
+                    </a:solidFill>
+                  </a:tcPr>
+                </a:tc>
+              </a:tr>
+              <a:tr h="365760">
+                <a:tc>
+                  <a:txBody>
+                    <a:bodyPr/>
+                    <a:lstStyle/>
+                    <a:p>
+                      <a:pPr indent="0" marL="0">
+                        <a:buNone/>
+                      </a:pPr>
+                      <a:r>
+                        <a:rPr lang="en-US" sz="950" b="1" dirty="0">
+                          <a:solidFill>
+                            <a:srgbClr val="1E2761"/>
+                          </a:solidFill>
+                          <a:latin typeface="Meiryo" pitchFamily="34" charset="0"/>
+                          <a:ea typeface="Meiryo" pitchFamily="34" charset="-122"/>
+                          <a:cs typeface="Meiryo" pitchFamily="34" charset="-120"/>
+                        </a:rPr>
+                        <a:t>ST：キラメックの条件</a:t>
+                      </a:r>
+                      <a:endParaRPr lang="en-US" sz="950" dirty="0">
+                        <a:latin typeface="Meiryo" charset="0"/>
+                        <a:ea typeface="Meiryo" charset="0"/>
+                        <a:cs typeface="Meiryo" charset="0"/>
+                      </a:endParaRPr>
+                    </a:p>
+                  </a:txBody>
+                  <a:tcPr marL="63500" marR="63500" marT="63500" marB="63500" anchor="ctr">
+                    <a:lnL w="12700" cap="flat" cmpd="sng" algn="ctr">
+                      <a:solidFill>
+                        <a:srgbClr val="D6DDEE"/>
+                      </a:solidFill>
+                      <a:prstDash val="solid"/>
+                      <a:round/>
+                      <a:headEnd type="none" w="med" len="med"/>
+                      <a:tailEnd type="none" w="med" len="med"/>
+                    </a:lnL>
+                    <a:lnR w="12700" cap="flat" cmpd="sng" algn="ctr">
+                      <a:solidFill>
+                        <a:srgbClr val="D6DDEE"/>
+                      </a:solidFill>
+                      <a:prstDash val="solid"/>
+                      <a:round/>
+                      <a:headEnd type="none" w="med" len="med"/>
+                      <a:tailEnd type="none" w="med" len="med"/>
+                    </a:lnR>
+                    <a:lnT w="12700" cap="flat" cmpd="sng" algn="ctr">
+                      <a:solidFill>
+                        <a:srgbClr val="D6DDEE"/>
+                      </a:solidFill>
+                      <a:prstDash val="solid"/>
+                      <a:round/>
+                      <a:headEnd type="none" w="med" len="med"/>
+                      <a:tailEnd type="none" w="med" len="med"/>
+                    </a:lnT>
+                    <a:lnB w="12700" cap="flat" cmpd="sng" algn="ctr">
+                      <a:solidFill>
+                        <a:srgbClr val="D6DDEE"/>
+                      </a:solidFill>
+                      <a:prstDash val="solid"/>
+                      <a:round/>
+                      <a:headEnd type="none" w="med" len="med"/>
+                      <a:tailEnd type="none" w="med" len="med"/>
+                    </a:lnB>
+                    <a:solidFill>
+                      <a:srgbClr val="F8FAFE"/>
+                    </a:solidFill>
+                  </a:tcPr>
+                </a:tc>
+                <a:tc>
+                  <a:txBody>
+                    <a:bodyPr/>
+                    <a:lstStyle/>
+                    <a:p>
+                      <a:pPr indent="0" marL="0">
+                        <a:buNone/>
+                      </a:pPr>
+                      <a:r>
+                        <a:rPr lang="en-US" sz="950" dirty="0">
+                          <a:solidFill>
+                            <a:srgbClr val="1B2233"/>
+                          </a:solidFill>
+                          <a:latin typeface="Meiryo" pitchFamily="34" charset="0"/>
+                          <a:ea typeface="Meiryo" pitchFamily="34" charset="-122"/>
+                          <a:cs typeface="Meiryo" pitchFamily="34" charset="-120"/>
+                        </a:rPr>
+                        <a:t>サイト全体で5個〜のみ</a:t>
+                      </a:r>
+                      <a:endParaRPr lang="en-US" sz="950" dirty="0">
+                        <a:latin typeface="Meiryo" charset="0"/>
+                        <a:ea typeface="Meiryo" charset="0"/>
+                        <a:cs typeface="Meiryo" charset="0"/>
+                      </a:endParaRPr>
+                    </a:p>
+                  </a:txBody>
+                  <a:tcPr marL="63500" marR="63500" marT="63500" marB="63500" anchor="ctr">
+                    <a:lnL w="12700" cap="flat" cmpd="sng" algn="ctr">
+                      <a:solidFill>
+                        <a:srgbClr val="D6DDEE"/>
+                      </a:solidFill>
+                      <a:prstDash val="solid"/>
+                      <a:round/>
+                      <a:headEnd type="none" w="med" len="med"/>
+                      <a:tailEnd type="none" w="med" len="med"/>
+                    </a:lnL>
+                    <a:lnR w="12700" cap="flat" cmpd="sng" algn="ctr">
+                      <a:solidFill>
+                        <a:srgbClr val="D6DDEE"/>
+                      </a:solidFill>
+                      <a:prstDash val="solid"/>
+                      <a:round/>
+                      <a:headEnd type="none" w="med" len="med"/>
+                      <a:tailEnd type="none" w="med" len="med"/>
+                    </a:lnR>
+                    <a:lnT w="12700" cap="flat" cmpd="sng" algn="ctr">
+                      <a:solidFill>
+                        <a:srgbClr val="D6DDEE"/>
+                      </a:solidFill>
+                      <a:prstDash val="solid"/>
+                      <a:round/>
+                      <a:headEnd type="none" w="med" len="med"/>
+                      <a:tailEnd type="none" w="med" len="med"/>
+                    </a:lnT>
+                    <a:lnB w="12700" cap="flat" cmpd="sng" algn="ctr">
+                      <a:solidFill>
+                        <a:srgbClr val="D6DDEE"/>
+                      </a:solidFill>
+                      <a:prstDash val="solid"/>
+                      <a:round/>
+                      <a:headEnd type="none" w="med" len="med"/>
+                      <a:tailEnd type="none" w="med" len="med"/>
+                    </a:lnB>
+                    <a:solidFill>
+                      <a:srgbClr val="F8FAFE"/>
+                    </a:solidFill>
+                  </a:tcPr>
+                </a:tc>
+                <a:tc>
+                  <a:txBody>
+                    <a:bodyPr/>
+                    <a:lstStyle/>
+                    <a:p>
+                      <a:pPr indent="0" marL="0">
+                        <a:buNone/>
+                      </a:pPr>
+                      <a:r>
+                        <a:rPr lang="en-US" sz="900" dirty="0">
+                          <a:solidFill>
+                            <a:srgbClr val="5A6483"/>
+                          </a:solidFill>
+                          <a:latin typeface="Meiryo" pitchFamily="34" charset="0"/>
+                          <a:ea typeface="Meiryo" pitchFamily="34" charset="-122"/>
+                          <a:cs typeface="Meiryo" pitchFamily="34" charset="-120"/>
+                        </a:rPr>
+                        <a:t>kilamek-novelty.com（ロット・単価・納期の明示なし）→ 要見積</a:t>
+                      </a:r>
+                      <a:endParaRPr lang="en-US" sz="900" dirty="0">
+                        <a:latin typeface="Meiryo" charset="0"/>
+                        <a:ea typeface="Meiryo" charset="0"/>
+                        <a:cs typeface="Meiryo" charset="0"/>
+                      </a:endParaRPr>
+                    </a:p>
+                  </a:txBody>
+                  <a:tcPr marL="63500" marR="63500" marT="63500" marB="63500" anchor="ctr">
+                    <a:lnL w="12700" cap="flat" cmpd="sng" algn="ctr">
+                      <a:solidFill>
+                        <a:srgbClr val="D6DDEE"/>
+                      </a:solidFill>
+                      <a:prstDash val="solid"/>
+                      <a:round/>
+                      <a:headEnd type="none" w="med" len="med"/>
+                      <a:tailEnd type="none" w="med" len="med"/>
+                    </a:lnL>
+                    <a:lnR w="12700" cap="flat" cmpd="sng" algn="ctr">
+                      <a:solidFill>
+                        <a:srgbClr val="D6DDEE"/>
+                      </a:solidFill>
+                      <a:prstDash val="solid"/>
+                      <a:round/>
+                      <a:headEnd type="none" w="med" len="med"/>
+                      <a:tailEnd type="none" w="med" len="med"/>
+                    </a:lnR>
+                    <a:lnT w="12700" cap="flat" cmpd="sng" algn="ctr">
+                      <a:solidFill>
+                        <a:srgbClr val="D6DDEE"/>
+                      </a:solidFill>
+                      <a:prstDash val="solid"/>
+                      <a:round/>
+                      <a:headEnd type="none" w="med" len="med"/>
+                      <a:tailEnd type="none" w="med" len="med"/>
+                    </a:lnT>
+                    <a:lnB w="12700" cap="flat" cmpd="sng" algn="ctr">
+                      <a:solidFill>
+                        <a:srgbClr val="D6DDEE"/>
+                      </a:solidFill>
+                      <a:prstDash val="solid"/>
+                      <a:round/>
+                      <a:headEnd type="none" w="med" len="med"/>
+                      <a:tailEnd type="none" w="med" len="med"/>
+                    </a:lnB>
+                    <a:solidFill>
+                      <a:srgbClr val="F8FAFE"/>
+                    </a:solidFill>
+                  </a:tcPr>
+                </a:tc>
+                <a:tc>
+                  <a:txBody>
+                    <a:bodyPr/>
+                    <a:lstStyle/>
+                    <a:p>
+                      <a:pPr algn="ctr" indent="0" marL="0">
+                        <a:buNone/>
+                      </a:pPr>
+                      <a:r>
+                        <a:rPr lang="en-US" sz="1200" b="1" dirty="0">
+                          <a:solidFill>
+                            <a:srgbClr val="B3453A"/>
+                          </a:solidFill>
+                          <a:latin typeface="Meiryo" pitchFamily="34" charset="0"/>
+                          <a:ea typeface="Meiryo" pitchFamily="34" charset="-122"/>
+                          <a:cs typeface="Meiryo" pitchFamily="34" charset="-120"/>
+                        </a:rPr>
+                        <a:t>C</a:t>
+                      </a:r>
+                      <a:endParaRPr lang="en-US" sz="1200" dirty="0">
+                        <a:latin typeface="Meiryo" charset="0"/>
+                        <a:ea typeface="Meiryo" charset="0"/>
+                        <a:cs typeface="Meiryo" charset="0"/>
+                      </a:endParaRPr>
+                    </a:p>
+                  </a:txBody>
+                  <a:tcPr marL="63500" marR="63500" marT="63500" marB="63500" anchor="ctr">
+                    <a:lnL w="12700" cap="flat" cmpd="sng" algn="ctr">
+                      <a:solidFill>
+                        <a:srgbClr val="D6DDEE"/>
+                      </a:solidFill>
+                      <a:prstDash val="solid"/>
+                      <a:round/>
+                      <a:headEnd type="none" w="med" len="med"/>
+                      <a:tailEnd type="none" w="med" len="med"/>
+                    </a:lnL>
+                    <a:lnR w="12700" cap="flat" cmpd="sng" algn="ctr">
+                      <a:solidFill>
+                        <a:srgbClr val="D6DDEE"/>
+                      </a:solidFill>
+                      <a:prstDash val="solid"/>
+                      <a:round/>
+                      <a:headEnd type="none" w="med" len="med"/>
+                      <a:tailEnd type="none" w="med" len="med"/>
+                    </a:lnR>
+                    <a:lnT w="12700" cap="flat" cmpd="sng" algn="ctr">
+                      <a:solidFill>
+                        <a:srgbClr val="D6DDEE"/>
+                      </a:solidFill>
+                      <a:prstDash val="solid"/>
+                      <a:round/>
+                      <a:headEnd type="none" w="med" len="med"/>
+                      <a:tailEnd type="none" w="med" len="med"/>
+                    </a:lnT>
+                    <a:lnB w="12700" cap="flat" cmpd="sng" algn="ctr">
+                      <a:solidFill>
+                        <a:srgbClr val="D6DDEE"/>
+                      </a:solidFill>
+                      <a:prstDash val="solid"/>
+                      <a:round/>
+                      <a:headEnd type="none" w="med" len="med"/>
+                      <a:tailEnd type="none" w="med" len="med"/>
+                    </a:lnB>
+                    <a:solidFill>
+                      <a:srgbClr val="F8FAFE"/>
+                    </a:solidFill>
+                  </a:tcPr>
+                </a:tc>
+              </a:tr>
+            </a:tbl>
+          </a:graphicData>
+        </a:graphic>
+      </p:graphicFrame>
+      <p:sp>
+        <p:nvSpPr>
+          <p:cNvPr id="5" name="Shape 2"/>
+          <p:cNvSpPr/>
+          <p:nvPr/>
+        </p:nvSpPr>
+        <p:spPr>
+          <a:xfrm>
+            <a:off x="548640" y="5989320"/>
+            <a:ext cx="11064240" cy="502920"/>
+          </a:xfrm>
+          <a:prstGeom prst="roundRect">
+            <a:avLst>
+              <a:gd name="adj" fmla="val 14545"/>
+            </a:avLst>
+          </a:prstGeom>
+          <a:solidFill>
+            <a:srgbClr val="FDF4E4"/>
+          </a:solidFill>
+          <a:ln w="12700">
+            <a:solidFill>
+              <a:srgbClr val="F0DCB8"/>
+            </a:solidFill>
+            <a:prstDash val="solid"/>
+          </a:ln>
+        </p:spPr>
+      </p:sp>
+      <p:sp>
+        <p:nvSpPr>
+          <p:cNvPr id="6" name="Text 3"/>
+          <p:cNvSpPr txBox="1"/>
+          <p:nvPr/>
+        </p:nvSpPr>
+        <p:spPr>
+          <a:xfrm>
+            <a:off x="868680" y="5989320"/>
+            <a:ext cx="10424160" cy="502920"/>
+          </a:xfrm>
+          <a:prstGeom prst="rect">
+            <a:avLst/>
+          </a:prstGeom>
+          <a:noFill/>
+          <a:ln/>
+        </p:spPr>
+        <p:txBody>
+          <a:bodyPr wrap="square" lIns="0" tIns="0" rIns="0" bIns="0" rtlCol="0" anchor="ctr"/>
+          <a:lstStyle/>
+          <a:p>
+            <a:pPr indent="0" marL="0">
+              <a:buNone/>
+            </a:pPr>
+            <a:r>
+              <a:rPr lang="en-US" sz="1050" dirty="0">
+                <a:solidFill>
+                  <a:srgbClr val="8A5A12"/>
+                </a:solidFill>
+                <a:latin typeface="Meiryo" pitchFamily="34" charset="0"/>
+                <a:ea typeface="Meiryo" pitchFamily="34" charset="-122"/>
+                <a:cs typeface="Meiryo" pitchFamily="34" charset="-120"/>
+              </a:rPr>
+              <a:t>A＝発注先サイトの該当ページに数値の記載あり／B＝業界メディア・各社コラムに記載の相場値／C＝掲載ページを特定できず＝見積で確定させる項目</a:t>
+            </a:r>
+            <a:endParaRPr lang="en-US" sz="1050" dirty="0"/>
+          </a:p>
+        </p:txBody>
+      </p:sp>
+    </p:spTree>
+  </p:cSld>
+  <p:clrMapOvr>
+    <a:masterClrMapping/>
+  </p:clrMapOvr>
+</p:sld>
+</file>
+
+<file path=ppt/slides/slide13.xml><?xml version="1.0" encoding="utf-8"?>
+<p:sld xmlns:a="http://schemas.openxmlformats.org/drawingml/2006/main" xmlns:r="http://schemas.openxmlformats.org/officeDocument/2006/relationships" xmlns:p="http://schemas.openxmlformats.org/presentationml/2006/main">
+  <p:cSld name="Slide 13">
+    <p:bg>
+      <p:bgPr>
+        <a:solidFill>
+          <a:srgbClr val="F4F6FB"/>
+        </a:solidFill>
+      </p:bgPr>
+    </p:bg>
+    <p:spTree>
+      <p:nvGrpSpPr>
+        <p:cNvPr id="1" name=""/>
+        <p:cNvGrpSpPr/>
+        <p:nvPr/>
+      </p:nvGrpSpPr>
+      <p:grpSpPr>
+        <a:xfrm>
+          <a:off x="0" y="0"/>
+          <a:ext cx="0" cy="0"/>
+          <a:chOff x="0" y="0"/>
+          <a:chExt cx="0" cy="0"/>
+        </a:xfrm>
+      </p:grpSpPr>
+      <p:sp>
+        <p:nvSpPr>
+          <p:cNvPr id="2" name="Text 0"/>
+          <p:cNvSpPr txBox="1"/>
+          <p:nvPr/>
+        </p:nvSpPr>
+        <p:spPr>
+          <a:xfrm>
+            <a:off x="548640" y="347472"/>
+            <a:ext cx="7315200" cy="274320"/>
+          </a:xfrm>
+          <a:prstGeom prst="rect">
+            <a:avLst/>
+          </a:prstGeom>
+          <a:noFill/>
+          <a:ln/>
+        </p:spPr>
+        <p:txBody>
+          <a:bodyPr wrap="square" lIns="0" tIns="0" rIns="0" bIns="0" rtlCol="0" anchor="ctr"/>
+          <a:lstStyle/>
+          <a:p>
+            <a:pPr indent="0" marL="0">
+              <a:buNone/>
+            </a:pPr>
+            <a:r>
+              <a:rPr lang="en-US" sz="1200" b="1" spc="100" kern="0" dirty="0">
+                <a:solidFill>
+                  <a:srgbClr val="E39B2E"/>
+                </a:solidFill>
+                <a:latin typeface="Meiryo" pitchFamily="34" charset="0"/>
+                <a:ea typeface="Meiryo" pitchFamily="34" charset="-122"/>
+                <a:cs typeface="Meiryo" pitchFamily="34" charset="-120"/>
+              </a:rPr>
+              <a:t>APPENDIX</a:t>
+            </a:r>
+            <a:endParaRPr lang="en-US" sz="1200" dirty="0"/>
+          </a:p>
+        </p:txBody>
+      </p:sp>
+      <p:sp>
+        <p:nvSpPr>
+          <p:cNvPr id="3" name="Text 1"/>
+          <p:cNvSpPr txBox="1"/>
+          <p:nvPr/>
+        </p:nvSpPr>
+        <p:spPr>
+          <a:xfrm>
+            <a:off x="548640" y="621792"/>
+            <a:ext cx="11064240" cy="640080"/>
+          </a:xfrm>
+          <a:prstGeom prst="rect">
+            <a:avLst/>
+          </a:prstGeom>
+          <a:noFill/>
+          <a:ln/>
+        </p:spPr>
+        <p:txBody>
+          <a:bodyPr wrap="square" lIns="0" tIns="0" rIns="0" bIns="0" rtlCol="0" anchor="ctr"/>
+          <a:lstStyle/>
+          <a:p>
+            <a:pPr indent="0" marL="0">
+              <a:buNone/>
+            </a:pPr>
+            <a:r>
+              <a:rPr lang="en-US" sz="3000" b="1" dirty="0">
+                <a:solidFill>
+                  <a:srgbClr val="1E2761"/>
+                </a:solidFill>
+                <a:latin typeface="Meiryo" pitchFamily="34" charset="0"/>
+                <a:ea typeface="Meiryo" pitchFamily="34" charset="-122"/>
+                <a:cs typeface="Meiryo" pitchFamily="34" charset="-120"/>
+              </a:rPr>
+              <a:t>参照した情報源と留意事項</a:t>
+            </a:r>
+            <a:endParaRPr lang="en-US" sz="3000" dirty="0"/>
+          </a:p>
+        </p:txBody>
+      </p:sp>
+      <p:graphicFrame>
+        <p:nvGraphicFramePr>
+          <p:cNvPr id="14" name="Table 0"/>
           <p:cNvGraphicFramePr>
             <a:graphicFrameLocks noGrp="1"/>
           </p:cNvGraphicFramePr>
@@ -5410,7 +8827,7 @@
                           <a:ea typeface="Meiryo" pitchFamily="34" charset="-122"/>
                           <a:cs typeface="Meiryo" pitchFamily="34" charset="-120"/>
                         </a:rPr>
-                        <a:t>オリジナル作業着オーダー制作／セミオーダー</a:t>
+                        <a:t>オリジナル作業着オーダー制作／発注ロット・価格相場コラム</a:t>
                       </a:r>
                       <a:endParaRPr lang="en-US" sz="1050" dirty="0">
                         <a:latin typeface="Meiryo" charset="0"/>
@@ -5684,7 +9101,7 @@
                           <a:ea typeface="Meiryo" pitchFamily="34" charset="-122"/>
                           <a:cs typeface="Meiryo" pitchFamily="34" charset="-120"/>
                         </a:rPr>
-                        <a:t>小ロット専用パターンオーダー Bechule／20人からの小ロット特集</a:t>
+                        <a:t>小ロット専用パターンオーダー（20着〜）／納期に関するFAQ</a:t>
                       </a:r>
                       <a:endParaRPr lang="en-US" sz="1050" dirty="0">
                         <a:latin typeface="Meiryo" charset="0"/>
@@ -6164,7 +9581,7 @@
                           <a:ea typeface="Meiryo" pitchFamily="34" charset="-122"/>
                           <a:cs typeface="Meiryo" pitchFamily="34" charset="-120"/>
                         </a:rPr>
-                        <a:t>ユニフォームネクスト 他</a:t>
+                        <a:t>ワークキング／作業服各社</a:t>
                       </a:r>
                       <a:endParaRPr lang="en-US" sz="1050" dirty="0">
                         <a:latin typeface="Meiryo" charset="0"/>
@@ -6232,7 +9649,7 @@
                           <a:ea typeface="Meiryo" pitchFamily="34" charset="-122"/>
                           <a:cs typeface="Meiryo" pitchFamily="34" charset="-120"/>
                         </a:rPr>
-                        <a:t>既製品への名入れ刺繍・プリント加工、価格相場</a:t>
+                        <a:t>既製ブルゾンの価格帯、社名刺繍の加工料金</a:t>
                       </a:r>
                       <a:endParaRPr lang="en-US" sz="1050" dirty="0">
                         <a:latin typeface="Meiryo" charset="0"/>
@@ -6300,7 +9717,7 @@
                           <a:ea typeface="Arial" pitchFamily="34" charset="-122"/>
                           <a:cs typeface="Arial" pitchFamily="34" charset="-120"/>
                         </a:rPr>
-                        <a:t>uniformnext.com ほか</a:t>
+                        <a:t>work-king.shop ほか</a:t>
                       </a:r>
                       <a:endParaRPr lang="en-US" sz="1050" dirty="0">
                         <a:latin typeface="Arial" charset="0"/>
@@ -6506,7 +9923,7 @@
                           <a:ea typeface="Meiryo" pitchFamily="34" charset="-122"/>
                           <a:cs typeface="Meiryo" pitchFamily="34" charset="-120"/>
                         </a:rPr>
-                        <a:t>法人向けオリジナルネックストラップ、小ロット対応</a:t>
+                        <a:t>法人向けオリジナルグッズ、小ロット5個〜の案内</a:t>
                       </a:r>
                       <a:endParaRPr lang="en-US" sz="1050" dirty="0">
                         <a:latin typeface="Meiryo" charset="0"/>
@@ -6780,7 +10197,7 @@
                           <a:ea typeface="Meiryo" pitchFamily="34" charset="-122"/>
                           <a:cs typeface="Meiryo" pitchFamily="34" charset="-120"/>
                         </a:rPr>
-                        <a:t>ナイロン／フルカラー昇華の価格・納期、自動見積</a:t>
+                        <a:t>ナイロン／フルカラー昇華の単価・納期、自動見積</a:t>
                       </a:r>
                       <a:endParaRPr lang="en-US" sz="1050" dirty="0">
                         <a:latin typeface="Meiryo" charset="0"/>
@@ -7054,7 +10471,7 @@
                           <a:ea typeface="Meiryo" pitchFamily="34" charset="-122"/>
                           <a:cs typeface="Meiryo" pitchFamily="34" charset="-120"/>
                         </a:rPr>
-                        <a:t>昇華転写ネックストラップの価格表・仕様</a:t>
+                        <a:t>昇華転写ネックストラップの価格ページ、量産日数</a:t>
                       </a:r>
                       <a:endParaRPr lang="en-US" sz="1050" dirty="0">
                         <a:latin typeface="Meiryo" charset="0"/>
@@ -7228,12 +10645,12 @@
           <a:p>
             <a:pPr indent="0" marL="0">
               <a:lnSpc>
-                <a:spcPts val="1900"/>
+                <a:spcPts val="1800"/>
               </a:lnSpc>
               <a:buNone/>
             </a:pPr>
             <a:r>
-              <a:rPr lang="en-US" sz="1200" dirty="0">
+              <a:rPr lang="en-US" sz="1150" dirty="0">
                 <a:solidFill>
                   <a:srgbClr val="8A5A12"/>
                 </a:solidFill>
@@ -7241,9 +10658,9 @@
                 <a:ea typeface="Meiryo" pitchFamily="34" charset="-122"/>
                 <a:cs typeface="Meiryo" pitchFamily="34" charset="-120"/>
               </a:rPr>
-              <a:t>留意事項：本資料の価格・納期・ロットはいずれも2026年9月時点の各社公開情報および業界相場から整理した「目安」です。仕様や数量、時期によって変動するため、発注判断の前に各社へ同一条件での正式見積を依頼してください。</a:t>
-            </a:r>
-            <a:endParaRPr lang="en-US" sz="1200" dirty="0"/>
+              <a:t>留意事項：本資料の数値は2026年9月時点で各社サイト・業界メディアに公開されている情報を整理したものです。ページの記載は改定されることがあり、また非公開の項目（①の価格・ロット・納期、②の単価、キラメックの条件）は見積でのみ確定します。発注判断の前に、各社へ同一条件での正式見積を依頼してください。</a:t>
+            </a:r>
+            <a:endParaRPr lang="en-US" sz="1150" dirty="0"/>
           </a:p>
         </p:txBody>
       </p:sp>
@@ -7424,7 +10841,7 @@
                 <a:ea typeface="Meiryo" pitchFamily="34" charset="-122"/>
                 <a:cs typeface="Meiryo" pitchFamily="34" charset="-120"/>
               </a:rPr>
-              <a:t>¥4,000〜18,000</a:t>
+              <a:t>¥3,600〜18,000</a:t>
             </a:r>
             <a:endParaRPr lang="en-US" sz="2600" dirty="0"/>
           </a:p>
@@ -7486,7 +10903,7 @@
                 <a:ea typeface="Meiryo" pitchFamily="34" charset="-122"/>
                 <a:cs typeface="Meiryo" pitchFamily="34" charset="-120"/>
               </a:rPr>
-              <a:t>（既製品＋名入れ〜フルオーダー）</a:t>
+              <a:t>（既製品＋刺繍〜フルオーダー）</a:t>
             </a:r>
             <a:endParaRPr lang="en-US" sz="1150" dirty="0"/>
           </a:p>
@@ -7559,7 +10976,7 @@
                 <a:ea typeface="Meiryo" pitchFamily="34" charset="-122"/>
                 <a:cs typeface="Meiryo" pitchFamily="34" charset="-120"/>
               </a:rPr>
-              <a:t>¥150〜650</a:t>
+              <a:t>¥137〜244</a:t>
             </a:r>
             <a:endParaRPr lang="en-US" sz="2600" dirty="0"/>
           </a:p>
@@ -7621,7 +11038,7 @@
                 <a:ea typeface="Meiryo" pitchFamily="34" charset="-122"/>
                 <a:cs typeface="Meiryo" pitchFamily="34" charset="-120"/>
               </a:rPr>
-              <a:t>（本数・印刷方式で変動）</a:t>
+              <a:t>（HOTSTRAP公表単価・税込）</a:t>
             </a:r>
             <a:endParaRPr lang="en-US" sz="1150" dirty="0"/>
           </a:p>
@@ -7694,7 +11111,7 @@
                 <a:ea typeface="Meiryo" pitchFamily="34" charset="-122"/>
                 <a:cs typeface="Meiryo" pitchFamily="34" charset="-120"/>
               </a:rPr>
-              <a:t>2週間〜5ヶ月</a:t>
+              <a:t>2週間〜8ヶ月</a:t>
             </a:r>
             <a:endParaRPr lang="en-US" sz="2600" dirty="0"/>
           </a:p>
@@ -7901,7 +11318,7 @@
                 <a:ea typeface="Meiryo" pitchFamily="34" charset="-122"/>
                 <a:cs typeface="Meiryo" pitchFamily="34" charset="-120"/>
               </a:rPr>
-              <a:t>フルオーダー（型から起こす）は1着15,000〜18,000円、既製品への社名刺繍なら1着4,000〜6,000円台。</a:t>
+              <a:t>フルオーダーは1着15,000〜18,000円（KIRUMIRAI調査）。既製ブルゾン3,000〜4,000円台＋社名刺繍220〜660円なら1着4,000円前後から。</a:t>
             </a:r>
             <a:endParaRPr lang="en-US" sz="1200" dirty="0"/>
           </a:p>
@@ -8004,7 +11421,7 @@
                 <a:ea typeface="Meiryo" pitchFamily="34" charset="-122"/>
                 <a:cs typeface="Meiryo" pitchFamily="34" charset="-120"/>
               </a:rPr>
-              <a:t>ネックストラップは現行品と同じフルカラー昇華転写が現実的</a:t>
+              <a:t>ネックストラップはフルカラー昇華が1本から発注できる</a:t>
             </a:r>
             <a:endParaRPr lang="en-US" sz="1500" dirty="0"/>
           </a:p>
@@ -8046,7 +11463,7 @@
                 <a:ea typeface="Meiryo" pitchFamily="34" charset="-122"/>
                 <a:cs typeface="Meiryo" pitchFamily="34" charset="-120"/>
               </a:rPr>
-              <a:t>現行ストラップはフルカラー昇華。同等品は50〜100本で1本250〜650円程度、版代不要の業者が多い。</a:t>
+              <a:t>HOTSTRAPはフルカラー昇華232円〜／シルク137円〜（税込）、1本から。KANARY・青山ストラップは30本〜。</a:t>
             </a:r>
             <a:endParaRPr lang="en-US" sz="1200" dirty="0"/>
           </a:p>
@@ -8149,7 +11566,7 @@
                 <a:ea typeface="Meiryo" pitchFamily="34" charset="-122"/>
                 <a:cs typeface="Meiryo" pitchFamily="34" charset="-120"/>
               </a:rPr>
-              <a:t>最大のリスクは納期。フルオーダーは着用希望日から逆算が必須</a:t>
+              <a:t>納期はフルオーダーが最大の制約。平均4〜5ヶ月、海外縫製なら6〜8ヶ月</a:t>
             </a:r>
             <a:endParaRPr lang="en-US" sz="1500" dirty="0"/>
           </a:p>
@@ -8191,7 +11608,7 @@
                 <a:ea typeface="Meiryo" pitchFamily="34" charset="-122"/>
                 <a:cs typeface="Meiryo" pitchFamily="34" charset="-120"/>
               </a:rPr>
-              <a:t>フルオーダーは2〜5ヶ月。今冬から着用するならフルオーダーは実質間に合わない可能性が高い。</a:t>
+              <a:t>国内生産で3〜4ヶ月、色にこだわり染色工程が入るとさらに+2ヶ月。既製品＋刺繍なら約2週間。</a:t>
             </a:r>
             <a:endParaRPr lang="en-US" sz="1200" dirty="0"/>
           </a:p>
@@ -9732,7 +13149,7 @@
         <p:spPr>
           <a:xfrm>
             <a:off x="777240" y="3017520"/>
-            <a:ext cx="1051560" cy="320040"/>
+            <a:ext cx="1051560" cy="411480"/>
           </a:xfrm>
           <a:prstGeom prst="rect">
             <a:avLst/>
@@ -9771,7 +13188,7 @@
         <p:spPr>
           <a:xfrm>
             <a:off x="1828800" y="3017520"/>
-            <a:ext cx="2011680" cy="320040"/>
+            <a:ext cx="2011680" cy="411480"/>
           </a:xfrm>
           <a:prstGeom prst="rect">
             <a:avLst/>
@@ -9784,10 +13201,13 @@
           <a:lstStyle/>
           <a:p>
             <a:pPr indent="0" marL="0">
+              <a:lnSpc>
+                <a:spcPts val="1400"/>
+              </a:lnSpc>
               <a:buNone/>
             </a:pPr>
             <a:r>
-              <a:rPr lang="en-US" sz="1200" b="1" dirty="0">
+              <a:rPr lang="en-US" sz="1050" b="1" dirty="0">
                 <a:solidFill>
                   <a:srgbClr val="1E2761"/>
                 </a:solidFill>
@@ -9795,9 +13215,9 @@
                 <a:ea typeface="Meiryo" pitchFamily="34" charset="-122"/>
                 <a:cs typeface="Meiryo" pitchFamily="34" charset="-120"/>
               </a:rPr>
-              <a:t>50セット〜</a:t>
-            </a:r>
-            <a:endParaRPr lang="en-US" sz="1200" dirty="0"/>
+              <a:t>要問合せ（相場は国内100着〜）</a:t>
+            </a:r>
+            <a:endParaRPr lang="en-US" sz="1050" dirty="0"/>
           </a:p>
         </p:txBody>
       </p:sp>
@@ -9809,8 +13229,8 @@
         </p:nvSpPr>
         <p:spPr>
           <a:xfrm>
-            <a:off x="777240" y="3474720"/>
-            <a:ext cx="1051560" cy="320040"/>
+            <a:off x="777240" y="3529584"/>
+            <a:ext cx="1051560" cy="411480"/>
           </a:xfrm>
           <a:prstGeom prst="rect">
             <a:avLst/>
@@ -9848,8 +13268,8 @@
         </p:nvSpPr>
         <p:spPr>
           <a:xfrm>
-            <a:off x="1828800" y="3474720"/>
-            <a:ext cx="2011680" cy="320040"/>
+            <a:off x="1828800" y="3529584"/>
+            <a:ext cx="2011680" cy="411480"/>
           </a:xfrm>
           <a:prstGeom prst="rect">
             <a:avLst/>
@@ -9862,10 +13282,13 @@
           <a:lstStyle/>
           <a:p>
             <a:pPr indent="0" marL="0">
+              <a:lnSpc>
+                <a:spcPts val="1400"/>
+              </a:lnSpc>
               <a:buNone/>
             </a:pPr>
             <a:r>
-              <a:rPr lang="en-US" sz="1200" b="1" dirty="0">
+              <a:rPr lang="en-US" sz="1050" b="1" dirty="0">
                 <a:solidFill>
                   <a:srgbClr val="1E2761"/>
                 </a:solidFill>
@@ -9873,9 +13296,9 @@
                 <a:ea typeface="Meiryo" pitchFamily="34" charset="-122"/>
                 <a:cs typeface="Meiryo" pitchFamily="34" charset="-120"/>
               </a:rPr>
-              <a:t>15,000〜18,000円/着</a:t>
-            </a:r>
-            <a:endParaRPr lang="en-US" sz="1200" dirty="0"/>
+              <a:t>15,000〜18,000円/着（相場）</a:t>
+            </a:r>
+            <a:endParaRPr lang="en-US" sz="1050" dirty="0"/>
           </a:p>
         </p:txBody>
       </p:sp>
@@ -9887,8 +13310,8 @@
         </p:nvSpPr>
         <p:spPr>
           <a:xfrm>
-            <a:off x="777240" y="3931920"/>
-            <a:ext cx="1051560" cy="320040"/>
+            <a:off x="777240" y="4041648"/>
+            <a:ext cx="1051560" cy="411480"/>
           </a:xfrm>
           <a:prstGeom prst="rect">
             <a:avLst/>
@@ -9926,8 +13349,8 @@
         </p:nvSpPr>
         <p:spPr>
           <a:xfrm>
-            <a:off x="1828800" y="3931920"/>
-            <a:ext cx="2011680" cy="320040"/>
+            <a:off x="1828800" y="4041648"/>
+            <a:ext cx="2011680" cy="411480"/>
           </a:xfrm>
           <a:prstGeom prst="rect">
             <a:avLst/>
@@ -9940,10 +13363,13 @@
           <a:lstStyle/>
           <a:p>
             <a:pPr indent="0" marL="0">
+              <a:lnSpc>
+                <a:spcPts val="1400"/>
+              </a:lnSpc>
               <a:buNone/>
             </a:pPr>
             <a:r>
-              <a:rPr lang="en-US" sz="1200" b="1" dirty="0">
+              <a:rPr lang="en-US" sz="1050" b="1" dirty="0">
                 <a:solidFill>
                   <a:srgbClr val="1E2761"/>
                 </a:solidFill>
@@ -9951,9 +13377,9 @@
                 <a:ea typeface="Meiryo" pitchFamily="34" charset="-122"/>
                 <a:cs typeface="Meiryo" pitchFamily="34" charset="-120"/>
               </a:rPr>
-              <a:t>約2〜3ヶ月</a:t>
-            </a:r>
-            <a:endParaRPr lang="en-US" sz="1200" dirty="0"/>
+              <a:t>要問合せ（相場4〜5ヶ月）</a:t>
+            </a:r>
+            <a:endParaRPr lang="en-US" sz="1050" dirty="0"/>
           </a:p>
         </p:txBody>
       </p:sp>
@@ -9965,8 +13391,8 @@
         </p:nvSpPr>
         <p:spPr>
           <a:xfrm>
-            <a:off x="777240" y="4526280"/>
-            <a:ext cx="3063240" cy="1371600"/>
+            <a:off x="777240" y="4617720"/>
+            <a:ext cx="3063240" cy="1280160"/>
           </a:xfrm>
           <a:prstGeom prst="rect">
             <a:avLst/>
@@ -10045,7 +13471,7 @@
                 <a:ea typeface="Meiryo" pitchFamily="34" charset="-122"/>
                 <a:cs typeface="Meiryo" pitchFamily="34" charset="-120"/>
               </a:rPr>
-              <a:t>完全オリジナルで他社と被らない／ブランディング効果が最も高い</a:t>
+              <a:t>ロット・納期・価格は自社サイトに明示がなく、見積で確定させる必要あり</a:t>
             </a:r>
             <a:endParaRPr lang="en-US" sz="1050" dirty="0"/>
           </a:p>
@@ -10241,7 +13667,7 @@
         <p:spPr>
           <a:xfrm>
             <a:off x="4544568" y="3017520"/>
-            <a:ext cx="1051560" cy="320040"/>
+            <a:ext cx="1051560" cy="411480"/>
           </a:xfrm>
           <a:prstGeom prst="rect">
             <a:avLst/>
@@ -10280,7 +13706,7 @@
         <p:spPr>
           <a:xfrm>
             <a:off x="5596128" y="3017520"/>
-            <a:ext cx="2011680" cy="320040"/>
+            <a:ext cx="2011680" cy="411480"/>
           </a:xfrm>
           <a:prstGeom prst="rect">
             <a:avLst/>
@@ -10293,10 +13719,13 @@
           <a:lstStyle/>
           <a:p>
             <a:pPr indent="0" marL="0">
+              <a:lnSpc>
+                <a:spcPts val="1400"/>
+              </a:lnSpc>
               <a:buNone/>
             </a:pPr>
             <a:r>
-              <a:rPr lang="en-US" sz="1200" b="1" dirty="0">
+              <a:rPr lang="en-US" sz="1050" b="1" dirty="0">
                 <a:solidFill>
                   <a:srgbClr val="2E5A8C"/>
                 </a:solidFill>
@@ -10304,9 +13733,9 @@
                 <a:ea typeface="Meiryo" pitchFamily="34" charset="-122"/>
                 <a:cs typeface="Meiryo" pitchFamily="34" charset="-120"/>
               </a:rPr>
-              <a:t>20人分〜</a:t>
-            </a:r>
-            <a:endParaRPr lang="en-US" sz="1200" dirty="0"/>
+              <a:t>20着〜（サイトに明記）</a:t>
+            </a:r>
+            <a:endParaRPr lang="en-US" sz="1050" dirty="0"/>
           </a:p>
         </p:txBody>
       </p:sp>
@@ -10318,8 +13747,8 @@
         </p:nvSpPr>
         <p:spPr>
           <a:xfrm>
-            <a:off x="4544568" y="3474720"/>
-            <a:ext cx="1051560" cy="320040"/>
+            <a:off x="4544568" y="3529584"/>
+            <a:ext cx="1051560" cy="411480"/>
           </a:xfrm>
           <a:prstGeom prst="rect">
             <a:avLst/>
@@ -10357,8 +13786,8 @@
         </p:nvSpPr>
         <p:spPr>
           <a:xfrm>
-            <a:off x="5596128" y="3474720"/>
-            <a:ext cx="2011680" cy="320040"/>
+            <a:off x="5596128" y="3529584"/>
+            <a:ext cx="2011680" cy="411480"/>
           </a:xfrm>
           <a:prstGeom prst="rect">
             <a:avLst/>
@@ -10371,10 +13800,13 @@
           <a:lstStyle/>
           <a:p>
             <a:pPr indent="0" marL="0">
+              <a:lnSpc>
+                <a:spcPts val="1400"/>
+              </a:lnSpc>
               <a:buNone/>
             </a:pPr>
             <a:r>
-              <a:rPr lang="en-US" sz="1200" b="1" dirty="0">
+              <a:rPr lang="en-US" sz="1050" b="1" dirty="0">
                 <a:solidFill>
                   <a:srgbClr val="2E5A8C"/>
                 </a:solidFill>
@@ -10382,9 +13814,9 @@
                 <a:ea typeface="Meiryo" pitchFamily="34" charset="-122"/>
                 <a:cs typeface="Meiryo" pitchFamily="34" charset="-120"/>
               </a:rPr>
-              <a:t>10,000〜20,000円/着</a:t>
-            </a:r>
-            <a:endParaRPr lang="en-US" sz="1200" dirty="0"/>
+              <a:t>公表なし（要見積）</a:t>
+            </a:r>
+            <a:endParaRPr lang="en-US" sz="1050" dirty="0"/>
           </a:p>
         </p:txBody>
       </p:sp>
@@ -10396,8 +13828,8 @@
         </p:nvSpPr>
         <p:spPr>
           <a:xfrm>
-            <a:off x="4544568" y="3931920"/>
-            <a:ext cx="1051560" cy="320040"/>
+            <a:off x="4544568" y="4041648"/>
+            <a:ext cx="1051560" cy="411480"/>
           </a:xfrm>
           <a:prstGeom prst="rect">
             <a:avLst/>
@@ -10435,8 +13867,8 @@
         </p:nvSpPr>
         <p:spPr>
           <a:xfrm>
-            <a:off x="5596128" y="3931920"/>
-            <a:ext cx="2011680" cy="320040"/>
+            <a:off x="5596128" y="4041648"/>
+            <a:ext cx="2011680" cy="411480"/>
           </a:xfrm>
           <a:prstGeom prst="rect">
             <a:avLst/>
@@ -10449,10 +13881,13 @@
           <a:lstStyle/>
           <a:p>
             <a:pPr indent="0" marL="0">
+              <a:lnSpc>
+                <a:spcPts val="1400"/>
+              </a:lnSpc>
               <a:buNone/>
             </a:pPr>
             <a:r>
-              <a:rPr lang="en-US" sz="1200" b="1" dirty="0">
+              <a:rPr lang="en-US" sz="1050" b="1" dirty="0">
                 <a:solidFill>
                   <a:srgbClr val="2E5A8C"/>
                 </a:solidFill>
@@ -10460,9 +13895,9 @@
                 <a:ea typeface="Meiryo" pitchFamily="34" charset="-122"/>
                 <a:cs typeface="Meiryo" pitchFamily="34" charset="-120"/>
               </a:rPr>
-              <a:t>約3〜5ヶ月</a:t>
-            </a:r>
-            <a:endParaRPr lang="en-US" sz="1200" dirty="0"/>
+              <a:t>国内3〜4ヶ月／海外6〜8ヶ月</a:t>
+            </a:r>
+            <a:endParaRPr lang="en-US" sz="1050" dirty="0"/>
           </a:p>
         </p:txBody>
       </p:sp>
@@ -10474,8 +13909,8 @@
         </p:nvSpPr>
         <p:spPr>
           <a:xfrm>
-            <a:off x="4544568" y="4526280"/>
-            <a:ext cx="3063240" cy="1371600"/>
+            <a:off x="4544568" y="4617720"/>
+            <a:ext cx="3063240" cy="1280160"/>
           </a:xfrm>
           <a:prstGeom prst="rect">
             <a:avLst/>
@@ -10530,7 +13965,7 @@
                 <a:ea typeface="Meiryo" pitchFamily="34" charset="-122"/>
                 <a:cs typeface="Meiryo" pitchFamily="34" charset="-120"/>
               </a:rPr>
-              <a:t>小ロット専用のパターンオーダー枠があり少人数でも実現可能</a:t>
+              <a:t>小ロット専用パターンオーダーの最小ロットをサイトで明示している</a:t>
             </a:r>
             <a:endParaRPr lang="en-US" sz="1050" dirty="0"/>
           </a:p>
@@ -10554,7 +13989,7 @@
                 <a:ea typeface="Meiryo" pitchFamily="34" charset="-122"/>
                 <a:cs typeface="Meiryo" pitchFamily="34" charset="-120"/>
               </a:rPr>
-              <a:t>型は既存パターンを流用しコストと失敗リスクを抑えられる</a:t>
+              <a:t>納期は生産地で大きく変わる。サンプルのやり直しを含めると約1年の記載も</a:t>
             </a:r>
             <a:endParaRPr lang="en-US" sz="1050" dirty="0"/>
           </a:p>
@@ -10696,7 +14131,7 @@
                 <a:ea typeface="Meiryo" pitchFamily="34" charset="-122"/>
                 <a:cs typeface="Meiryo" pitchFamily="34" charset="-120"/>
               </a:rPr>
-              <a:t>ユニフォームネクスト／ワークストリート 他</a:t>
+              <a:t>ユニフォームネクスト／ワークキング 他</a:t>
             </a:r>
             <a:endParaRPr lang="en-US" sz="1500" dirty="0"/>
           </a:p>
@@ -10750,7 +14185,7 @@
         <p:spPr>
           <a:xfrm>
             <a:off x="8311896" y="3017520"/>
-            <a:ext cx="1051560" cy="320040"/>
+            <a:ext cx="1051560" cy="411480"/>
           </a:xfrm>
           <a:prstGeom prst="rect">
             <a:avLst/>
@@ -10789,7 +14224,7 @@
         <p:spPr>
           <a:xfrm>
             <a:off x="9363456" y="3017520"/>
-            <a:ext cx="2011680" cy="320040"/>
+            <a:ext cx="2011680" cy="411480"/>
           </a:xfrm>
           <a:prstGeom prst="rect">
             <a:avLst/>
@@ -10802,10 +14237,13 @@
           <a:lstStyle/>
           <a:p>
             <a:pPr indent="0" marL="0">
+              <a:lnSpc>
+                <a:spcPts val="1400"/>
+              </a:lnSpc>
               <a:buNone/>
             </a:pPr>
             <a:r>
-              <a:rPr lang="en-US" sz="1200" b="1" dirty="0">
+              <a:rPr lang="en-US" sz="1050" b="1" dirty="0">
                 <a:solidFill>
                   <a:srgbClr val="E39B2E"/>
                 </a:solidFill>
@@ -10815,7 +14253,7 @@
               </a:rPr>
               <a:t>1着〜</a:t>
             </a:r>
-            <a:endParaRPr lang="en-US" sz="1200" dirty="0"/>
+            <a:endParaRPr lang="en-US" sz="1050" dirty="0"/>
           </a:p>
         </p:txBody>
       </p:sp>
@@ -10827,8 +14265,8 @@
         </p:nvSpPr>
         <p:spPr>
           <a:xfrm>
-            <a:off x="8311896" y="3474720"/>
-            <a:ext cx="1051560" cy="320040"/>
+            <a:off x="8311896" y="3529584"/>
+            <a:ext cx="1051560" cy="411480"/>
           </a:xfrm>
           <a:prstGeom prst="rect">
             <a:avLst/>
@@ -10866,8 +14304,8 @@
         </p:nvSpPr>
         <p:spPr>
           <a:xfrm>
-            <a:off x="9363456" y="3474720"/>
-            <a:ext cx="2011680" cy="320040"/>
+            <a:off x="9363456" y="3529584"/>
+            <a:ext cx="2011680" cy="411480"/>
           </a:xfrm>
           <a:prstGeom prst="rect">
             <a:avLst/>
@@ -10880,10 +14318,13 @@
           <a:lstStyle/>
           <a:p>
             <a:pPr indent="0" marL="0">
+              <a:lnSpc>
+                <a:spcPts val="1400"/>
+              </a:lnSpc>
               <a:buNone/>
             </a:pPr>
             <a:r>
-              <a:rPr lang="en-US" sz="1200" b="1" dirty="0">
+              <a:rPr lang="en-US" sz="1050" b="1" dirty="0">
                 <a:solidFill>
                   <a:srgbClr val="E39B2E"/>
                 </a:solidFill>
@@ -10891,9 +14332,9 @@
                 <a:ea typeface="Meiryo" pitchFamily="34" charset="-122"/>
                 <a:cs typeface="Meiryo" pitchFamily="34" charset="-120"/>
               </a:rPr>
-              <a:t>4,000〜8,000円/着</a:t>
-            </a:r>
-            <a:endParaRPr lang="en-US" sz="1200" dirty="0"/>
+              <a:t>本体3,000〜8,000円＋刺繍220〜660円</a:t>
+            </a:r>
+            <a:endParaRPr lang="en-US" sz="1050" dirty="0"/>
           </a:p>
         </p:txBody>
       </p:sp>
@@ -10905,8 +14346,8 @@
         </p:nvSpPr>
         <p:spPr>
           <a:xfrm>
-            <a:off x="8311896" y="3931920"/>
-            <a:ext cx="1051560" cy="320040"/>
+            <a:off x="8311896" y="4041648"/>
+            <a:ext cx="1051560" cy="411480"/>
           </a:xfrm>
           <a:prstGeom prst="rect">
             <a:avLst/>
@@ -10944,8 +14385,8 @@
         </p:nvSpPr>
         <p:spPr>
           <a:xfrm>
-            <a:off x="9363456" y="3931920"/>
-            <a:ext cx="2011680" cy="320040"/>
+            <a:off x="9363456" y="4041648"/>
+            <a:ext cx="2011680" cy="411480"/>
           </a:xfrm>
           <a:prstGeom prst="rect">
             <a:avLst/>
@@ -10958,10 +14399,13 @@
           <a:lstStyle/>
           <a:p>
             <a:pPr indent="0" marL="0">
+              <a:lnSpc>
+                <a:spcPts val="1400"/>
+              </a:lnSpc>
               <a:buNone/>
             </a:pPr>
             <a:r>
-              <a:rPr lang="en-US" sz="1200" b="1" dirty="0">
+              <a:rPr lang="en-US" sz="1050" b="1" dirty="0">
                 <a:solidFill>
                   <a:srgbClr val="E39B2E"/>
                 </a:solidFill>
@@ -10969,9 +14413,9 @@
                 <a:ea typeface="Meiryo" pitchFamily="34" charset="-122"/>
                 <a:cs typeface="Meiryo" pitchFamily="34" charset="-120"/>
               </a:rPr>
-              <a:t>約2週間</a:t>
-            </a:r>
-            <a:endParaRPr lang="en-US" sz="1200" dirty="0"/>
+              <a:t>約2週間（在庫品）</a:t>
+            </a:r>
+            <a:endParaRPr lang="en-US" sz="1050" dirty="0"/>
           </a:p>
         </p:txBody>
       </p:sp>
@@ -10983,8 +14427,8 @@
         </p:nvSpPr>
         <p:spPr>
           <a:xfrm>
-            <a:off x="8311896" y="4526280"/>
-            <a:ext cx="3063240" cy="1371600"/>
+            <a:off x="8311896" y="4617720"/>
+            <a:ext cx="3063240" cy="1280160"/>
           </a:xfrm>
           <a:prstGeom prst="rect">
             <a:avLst/>
@@ -11039,7 +14483,7 @@
                 <a:ea typeface="Meiryo" pitchFamily="34" charset="-122"/>
                 <a:cs typeface="Meiryo" pitchFamily="34" charset="-120"/>
               </a:rPr>
-              <a:t>刺繍代は1着220〜660円程度（ロゴサイズ・色数で変動）</a:t>
+              <a:t>低価格帯ブルゾンは3,000〜4,000円台、上下で7,000〜8,000円（2025年秋時点）</a:t>
             </a:r>
             <a:endParaRPr lang="en-US" sz="1050" dirty="0"/>
           </a:p>
@@ -11173,7 +14617,7 @@
                 <a:ea typeface="Meiryo" pitchFamily="34" charset="-122"/>
                 <a:cs typeface="Meiryo" pitchFamily="34" charset="-120"/>
               </a:rPr>
-              <a:t>ジャケット3案の比較と向き・不向き</a:t>
+              <a:t>ジャケット3案の比較（数値の出所つき）</a:t>
             </a:r>
             <a:endParaRPr lang="en-US" sz="3000" dirty="0"/>
           </a:p>
@@ -11194,7 +14638,7 @@
           </p:nvPr>
         </p:nvGraphicFramePr>
         <p:xfrm>
-          <a:off x="548640" y="1508760"/>
+          <a:off x="548640" y="1481328"/>
           <a:ext cx="11064240" cy="914400"/>
         </p:xfrm>
         <a:graphic>
@@ -11207,7 +14651,7 @@
                 <a:gridCol w="3017520"/>
                 <a:gridCol w="3017520"/>
               </a:tblGrid>
-              <a:tr h="566928">
+              <a:tr h="548640">
                 <a:tc>
                   <a:txBody>
                     <a:bodyPr/>
@@ -11533,7 +14977,7 @@
                   </a:tcPr>
                 </a:tc>
               </a:tr>
-              <a:tr h="457200">
+              <a:tr h="566928">
                 <a:tc>
                   <a:txBody>
                     <a:bodyPr/>
@@ -11543,7 +14987,7 @@
                         <a:buNone/>
                       </a:pPr>
                       <a:r>
-                        <a:rPr lang="en-US" sz="1100" b="1" dirty="0">
+                        <a:rPr lang="en-US" sz="1050" b="1" dirty="0">
                           <a:solidFill>
                             <a:srgbClr val="1E2761"/>
                           </a:solidFill>
@@ -11553,7 +14997,7 @@
                         </a:rPr>
                         <a:t>最小ロット</a:t>
                       </a:r>
-                      <a:endParaRPr lang="en-US" sz="1100" dirty="0">
+                      <a:endParaRPr lang="en-US" sz="1050" dirty="0">
                         <a:latin typeface="Meiryo" charset="0"/>
                         <a:ea typeface="Meiryo" charset="0"/>
                         <a:cs typeface="Meiryo" charset="0"/>
@@ -11611,7 +15055,7 @@
                         <a:buNone/>
                       </a:pPr>
                       <a:r>
-                        <a:rPr lang="en-US" sz="1100" dirty="0">
+                        <a:rPr lang="en-US" sz="1050" dirty="0">
                           <a:solidFill>
                             <a:srgbClr val="1B2233"/>
                           </a:solidFill>
@@ -11619,9 +15063,30 @@
                           <a:ea typeface="Meiryo" pitchFamily="34" charset="-122"/>
                           <a:cs typeface="Meiryo" pitchFamily="34" charset="-120"/>
                         </a:rPr>
-                        <a:t>50セット〜</a:t>
+                        <a:t>要問合せ</a:t>
                       </a:r>
-                      <a:endParaRPr lang="en-US" sz="1100" dirty="0">
+                      <a:endParaRPr lang="en-US" sz="1050" dirty="0">
+                        <a:latin typeface="Meiryo" charset="0"/>
+                        <a:ea typeface="Meiryo" charset="0"/>
+                        <a:cs typeface="Meiryo" charset="0"/>
+                      </a:endParaRPr>
+                    </a:p>
+                    <a:p>
+                      <a:pPr algn="ctr" indent="0" marL="0">
+                        <a:buNone/>
+                      </a:pPr>
+                      <a:r>
+                        <a:rPr lang="en-US" sz="1050" dirty="0">
+                          <a:solidFill>
+                            <a:srgbClr val="1B2233"/>
+                          </a:solidFill>
+                          <a:latin typeface="Meiryo" pitchFamily="34" charset="0"/>
+                          <a:ea typeface="Meiryo" pitchFamily="34" charset="-122"/>
+                          <a:cs typeface="Meiryo" pitchFamily="34" charset="-120"/>
+                        </a:rPr>
+                        <a:t>（相場：国内100着〜）</a:t>
+                      </a:r>
+                      <a:endParaRPr lang="en-US" sz="1050" dirty="0">
                         <a:latin typeface="Meiryo" charset="0"/>
                         <a:ea typeface="Meiryo" charset="0"/>
                         <a:cs typeface="Meiryo" charset="0"/>
@@ -11679,7 +15144,7 @@
                         <a:buNone/>
                       </a:pPr>
                       <a:r>
-                        <a:rPr lang="en-US" sz="1100" dirty="0">
+                        <a:rPr lang="en-US" sz="1050" dirty="0">
                           <a:solidFill>
                             <a:srgbClr val="1B2233"/>
                           </a:solidFill>
@@ -11687,9 +15152,30 @@
                           <a:ea typeface="Meiryo" pitchFamily="34" charset="-122"/>
                           <a:cs typeface="Meiryo" pitchFamily="34" charset="-120"/>
                         </a:rPr>
-                        <a:t>20人分〜</a:t>
+                        <a:t>20着〜</a:t>
                       </a:r>
-                      <a:endParaRPr lang="en-US" sz="1100" dirty="0">
+                      <a:endParaRPr lang="en-US" sz="1050" dirty="0">
+                        <a:latin typeface="Meiryo" charset="0"/>
+                        <a:ea typeface="Meiryo" charset="0"/>
+                        <a:cs typeface="Meiryo" charset="0"/>
+                      </a:endParaRPr>
+                    </a:p>
+                    <a:p>
+                      <a:pPr algn="ctr" indent="0" marL="0">
+                        <a:buNone/>
+                      </a:pPr>
+                      <a:r>
+                        <a:rPr lang="en-US" sz="1050" dirty="0">
+                          <a:solidFill>
+                            <a:srgbClr val="1B2233"/>
+                          </a:solidFill>
+                          <a:latin typeface="Meiryo" pitchFamily="34" charset="0"/>
+                          <a:ea typeface="Meiryo" pitchFamily="34" charset="-122"/>
+                          <a:cs typeface="Meiryo" pitchFamily="34" charset="-120"/>
+                        </a:rPr>
+                        <a:t>（サイトに明記）</a:t>
+                      </a:r>
+                      <a:endParaRPr lang="en-US" sz="1050" dirty="0">
                         <a:latin typeface="Meiryo" charset="0"/>
                         <a:ea typeface="Meiryo" charset="0"/>
                         <a:cs typeface="Meiryo" charset="0"/>
@@ -11747,7 +15233,7 @@
                         <a:buNone/>
                       </a:pPr>
                       <a:r>
-                        <a:rPr lang="en-US" sz="1100" dirty="0">
+                        <a:rPr lang="en-US" sz="1050" dirty="0">
                           <a:solidFill>
                             <a:srgbClr val="1B2233"/>
                           </a:solidFill>
@@ -11757,7 +15243,28 @@
                         </a:rPr>
                         <a:t>1着〜</a:t>
                       </a:r>
-                      <a:endParaRPr lang="en-US" sz="1100" dirty="0">
+                      <a:endParaRPr lang="en-US" sz="1050" dirty="0">
+                        <a:latin typeface="Meiryo" charset="0"/>
+                        <a:ea typeface="Meiryo" charset="0"/>
+                        <a:cs typeface="Meiryo" charset="0"/>
+                      </a:endParaRPr>
+                    </a:p>
+                    <a:p>
+                      <a:pPr algn="ctr" indent="0" marL="0">
+                        <a:buNone/>
+                      </a:pPr>
+                      <a:r>
+                        <a:rPr lang="en-US" sz="1050" dirty="0">
+                          <a:solidFill>
+                            <a:srgbClr val="1B2233"/>
+                          </a:solidFill>
+                          <a:latin typeface="Meiryo" pitchFamily="34" charset="0"/>
+                          <a:ea typeface="Meiryo" pitchFamily="34" charset="-122"/>
+                          <a:cs typeface="Meiryo" pitchFamily="34" charset="-120"/>
+                        </a:rPr>
+                        <a:t>（サイトに明記）</a:t>
+                      </a:r>
+                      <a:endParaRPr lang="en-US" sz="1050" dirty="0">
                         <a:latin typeface="Meiryo" charset="0"/>
                         <a:ea typeface="Meiryo" charset="0"/>
                         <a:cs typeface="Meiryo" charset="0"/>
@@ -11817,7 +15324,7 @@
                         <a:buNone/>
                       </a:pPr>
                       <a:r>
-                        <a:rPr lang="en-US" sz="1100" b="1" dirty="0">
+                        <a:rPr lang="en-US" sz="1050" b="1" dirty="0">
                           <a:solidFill>
                             <a:srgbClr val="1E2761"/>
                           </a:solidFill>
@@ -11827,7 +15334,7 @@
                         </a:rPr>
                         <a:t>単価目安</a:t>
                       </a:r>
-                      <a:endParaRPr lang="en-US" sz="1100" dirty="0">
+                      <a:endParaRPr lang="en-US" sz="1050" dirty="0">
                         <a:latin typeface="Meiryo" charset="0"/>
                         <a:ea typeface="Meiryo" charset="0"/>
                         <a:cs typeface="Meiryo" charset="0"/>
@@ -11885,7 +15392,7 @@
                         <a:buNone/>
                       </a:pPr>
                       <a:r>
-                        <a:rPr lang="en-US" sz="1100" dirty="0">
+                        <a:rPr lang="en-US" sz="1050" dirty="0">
                           <a:solidFill>
                             <a:srgbClr val="1B2233"/>
                           </a:solidFill>
@@ -11895,7 +15402,28 @@
                         </a:rPr>
                         <a:t>15,000〜18,000円</a:t>
                       </a:r>
-                      <a:endParaRPr lang="en-US" sz="1100" dirty="0">
+                      <a:endParaRPr lang="en-US" sz="1050" dirty="0">
+                        <a:latin typeface="Meiryo" charset="0"/>
+                        <a:ea typeface="Meiryo" charset="0"/>
+                        <a:cs typeface="Meiryo" charset="0"/>
+                      </a:endParaRPr>
+                    </a:p>
+                    <a:p>
+                      <a:pPr algn="ctr" indent="0" marL="0">
+                        <a:buNone/>
+                      </a:pPr>
+                      <a:r>
+                        <a:rPr lang="en-US" sz="1050" dirty="0">
+                          <a:solidFill>
+                            <a:srgbClr val="1B2233"/>
+                          </a:solidFill>
+                          <a:latin typeface="Meiryo" pitchFamily="34" charset="0"/>
+                          <a:ea typeface="Meiryo" pitchFamily="34" charset="-122"/>
+                          <a:cs typeface="Meiryo" pitchFamily="34" charset="-120"/>
+                        </a:rPr>
+                        <a:t>（第三者調査の相場）</a:t>
+                      </a:r>
+                      <a:endParaRPr lang="en-US" sz="1050" dirty="0">
                         <a:latin typeface="Meiryo" charset="0"/>
                         <a:ea typeface="Meiryo" charset="0"/>
                         <a:cs typeface="Meiryo" charset="0"/>
@@ -11953,7 +15481,7 @@
                         <a:buNone/>
                       </a:pPr>
                       <a:r>
-                        <a:rPr lang="en-US" sz="1100" dirty="0">
+                        <a:rPr lang="en-US" sz="1050" dirty="0">
                           <a:solidFill>
                             <a:srgbClr val="1B2233"/>
                           </a:solidFill>
@@ -11961,9 +15489,30 @@
                           <a:ea typeface="Meiryo" pitchFamily="34" charset="-122"/>
                           <a:cs typeface="Meiryo" pitchFamily="34" charset="-120"/>
                         </a:rPr>
-                        <a:t>10,000〜20,000円</a:t>
+                        <a:t>公表なし</a:t>
                       </a:r>
-                      <a:endParaRPr lang="en-US" sz="1100" dirty="0">
+                      <a:endParaRPr lang="en-US" sz="1050" dirty="0">
+                        <a:latin typeface="Meiryo" charset="0"/>
+                        <a:ea typeface="Meiryo" charset="0"/>
+                        <a:cs typeface="Meiryo" charset="0"/>
+                      </a:endParaRPr>
+                    </a:p>
+                    <a:p>
+                      <a:pPr algn="ctr" indent="0" marL="0">
+                        <a:buNone/>
+                      </a:pPr>
+                      <a:r>
+                        <a:rPr lang="en-US" sz="1050" dirty="0">
+                          <a:solidFill>
+                            <a:srgbClr val="1B2233"/>
+                          </a:solidFill>
+                          <a:latin typeface="Meiryo" pitchFamily="34" charset="0"/>
+                          <a:ea typeface="Meiryo" pitchFamily="34" charset="-122"/>
+                          <a:cs typeface="Meiryo" pitchFamily="34" charset="-120"/>
+                        </a:rPr>
+                        <a:t>（要見積）</a:t>
+                      </a:r>
+                      <a:endParaRPr lang="en-US" sz="1050" dirty="0">
                         <a:latin typeface="Meiryo" charset="0"/>
                         <a:ea typeface="Meiryo" charset="0"/>
                         <a:cs typeface="Meiryo" charset="0"/>
@@ -12021,7 +15570,7 @@
                         <a:buNone/>
                       </a:pPr>
                       <a:r>
-                        <a:rPr lang="en-US" sz="1100" dirty="0">
+                        <a:rPr lang="en-US" sz="1050" dirty="0">
                           <a:solidFill>
                             <a:srgbClr val="1B2233"/>
                           </a:solidFill>
@@ -12029,9 +15578,9 @@
                           <a:ea typeface="Meiryo" pitchFamily="34" charset="-122"/>
                           <a:cs typeface="Meiryo" pitchFamily="34" charset="-120"/>
                         </a:rPr>
-                        <a:t>4,000〜8,000円</a:t>
+                        <a:t>本体3,000〜8,000円</a:t>
                       </a:r>
-                      <a:endParaRPr lang="en-US" sz="1100" dirty="0">
+                      <a:endParaRPr lang="en-US" sz="1050" dirty="0">
                         <a:latin typeface="Meiryo" charset="0"/>
                         <a:ea typeface="Meiryo" charset="0"/>
                         <a:cs typeface="Meiryo" charset="0"/>
@@ -12042,7 +15591,7 @@
                         <a:buNone/>
                       </a:pPr>
                       <a:r>
-                        <a:rPr lang="en-US" sz="1100" dirty="0">
+                        <a:rPr lang="en-US" sz="1050" dirty="0">
                           <a:solidFill>
                             <a:srgbClr val="1B2233"/>
                           </a:solidFill>
@@ -12050,9 +15599,9 @@
                           <a:ea typeface="Meiryo" pitchFamily="34" charset="-122"/>
                           <a:cs typeface="Meiryo" pitchFamily="34" charset="-120"/>
                         </a:rPr>
-                        <a:t>（＋刺繍220〜660円）</a:t>
+                        <a:t>＋刺繍220〜660円</a:t>
                       </a:r>
-                      <a:endParaRPr lang="en-US" sz="1100" dirty="0">
+                      <a:endParaRPr lang="en-US" sz="1050" dirty="0">
                         <a:latin typeface="Meiryo" charset="0"/>
                         <a:ea typeface="Meiryo" charset="0"/>
                         <a:cs typeface="Meiryo" charset="0"/>
@@ -12102,7 +15651,7 @@
                   </a:tcPr>
                 </a:tc>
               </a:tr>
-              <a:tr h="457200">
+              <a:tr h="566928">
                 <a:tc>
                   <a:txBody>
                     <a:bodyPr/>
@@ -12112,7 +15661,7 @@
                         <a:buNone/>
                       </a:pPr>
                       <a:r>
-                        <a:rPr lang="en-US" sz="1100" b="1" dirty="0">
+                        <a:rPr lang="en-US" sz="1050" b="1" dirty="0">
                           <a:solidFill>
                             <a:srgbClr val="1E2761"/>
                           </a:solidFill>
@@ -12122,7 +15671,7 @@
                         </a:rPr>
                         <a:t>納期目安</a:t>
                       </a:r>
-                      <a:endParaRPr lang="en-US" sz="1100" dirty="0">
+                      <a:endParaRPr lang="en-US" sz="1050" dirty="0">
                         <a:latin typeface="Meiryo" charset="0"/>
                         <a:ea typeface="Meiryo" charset="0"/>
                         <a:cs typeface="Meiryo" charset="0"/>
@@ -12180,7 +15729,7 @@
                         <a:buNone/>
                       </a:pPr>
                       <a:r>
-                        <a:rPr lang="en-US" sz="1100" dirty="0">
+                        <a:rPr lang="en-US" sz="1050" dirty="0">
                           <a:solidFill>
                             <a:srgbClr val="1B2233"/>
                           </a:solidFill>
@@ -12188,9 +15737,30 @@
                           <a:ea typeface="Meiryo" pitchFamily="34" charset="-122"/>
                           <a:cs typeface="Meiryo" pitchFamily="34" charset="-120"/>
                         </a:rPr>
-                        <a:t>2〜3ヶ月</a:t>
+                        <a:t>要問合せ</a:t>
                       </a:r>
-                      <a:endParaRPr lang="en-US" sz="1100" dirty="0">
+                      <a:endParaRPr lang="en-US" sz="1050" dirty="0">
+                        <a:latin typeface="Meiryo" charset="0"/>
+                        <a:ea typeface="Meiryo" charset="0"/>
+                        <a:cs typeface="Meiryo" charset="0"/>
+                      </a:endParaRPr>
+                    </a:p>
+                    <a:p>
+                      <a:pPr algn="ctr" indent="0" marL="0">
+                        <a:buNone/>
+                      </a:pPr>
+                      <a:r>
+                        <a:rPr lang="en-US" sz="1050" dirty="0">
+                          <a:solidFill>
+                            <a:srgbClr val="1B2233"/>
+                          </a:solidFill>
+                          <a:latin typeface="Meiryo" pitchFamily="34" charset="0"/>
+                          <a:ea typeface="Meiryo" pitchFamily="34" charset="-122"/>
+                          <a:cs typeface="Meiryo" pitchFamily="34" charset="-120"/>
+                        </a:rPr>
+                        <a:t>（相場：4〜5ヶ月）</a:t>
+                      </a:r>
+                      <a:endParaRPr lang="en-US" sz="1050" dirty="0">
                         <a:latin typeface="Meiryo" charset="0"/>
                         <a:ea typeface="Meiryo" charset="0"/>
                         <a:cs typeface="Meiryo" charset="0"/>
@@ -12248,7 +15818,7 @@
                         <a:buNone/>
                       </a:pPr>
                       <a:r>
-                        <a:rPr lang="en-US" sz="1100" dirty="0">
+                        <a:rPr lang="en-US" sz="1050" dirty="0">
                           <a:solidFill>
                             <a:srgbClr val="1B2233"/>
                           </a:solidFill>
@@ -12256,9 +15826,30 @@
                           <a:ea typeface="Meiryo" pitchFamily="34" charset="-122"/>
                           <a:cs typeface="Meiryo" pitchFamily="34" charset="-120"/>
                         </a:rPr>
-                        <a:t>3〜5ヶ月</a:t>
+                        <a:t>国内3〜4ヶ月</a:t>
                       </a:r>
-                      <a:endParaRPr lang="en-US" sz="1100" dirty="0">
+                      <a:endParaRPr lang="en-US" sz="1050" dirty="0">
+                        <a:latin typeface="Meiryo" charset="0"/>
+                        <a:ea typeface="Meiryo" charset="0"/>
+                        <a:cs typeface="Meiryo" charset="0"/>
+                      </a:endParaRPr>
+                    </a:p>
+                    <a:p>
+                      <a:pPr algn="ctr" indent="0" marL="0">
+                        <a:buNone/>
+                      </a:pPr>
+                      <a:r>
+                        <a:rPr lang="en-US" sz="1050" dirty="0">
+                          <a:solidFill>
+                            <a:srgbClr val="1B2233"/>
+                          </a:solidFill>
+                          <a:latin typeface="Meiryo" pitchFamily="34" charset="0"/>
+                          <a:ea typeface="Meiryo" pitchFamily="34" charset="-122"/>
+                          <a:cs typeface="Meiryo" pitchFamily="34" charset="-120"/>
+                        </a:rPr>
+                        <a:t>海外6〜8ヶ月</a:t>
+                      </a:r>
+                      <a:endParaRPr lang="en-US" sz="1050" dirty="0">
                         <a:latin typeface="Meiryo" charset="0"/>
                         <a:ea typeface="Meiryo" charset="0"/>
                         <a:cs typeface="Meiryo" charset="0"/>
@@ -12316,7 +15907,7 @@
                         <a:buNone/>
                       </a:pPr>
                       <a:r>
-                        <a:rPr lang="en-US" sz="1100" dirty="0">
+                        <a:rPr lang="en-US" sz="1050" dirty="0">
                           <a:solidFill>
                             <a:srgbClr val="1B2233"/>
                           </a:solidFill>
@@ -12324,9 +15915,30 @@
                           <a:ea typeface="Meiryo" pitchFamily="34" charset="-122"/>
                           <a:cs typeface="Meiryo" pitchFamily="34" charset="-120"/>
                         </a:rPr>
-                        <a:t>2週間前後</a:t>
+                        <a:t>約2週間</a:t>
                       </a:r>
-                      <a:endParaRPr lang="en-US" sz="1100" dirty="0">
+                      <a:endParaRPr lang="en-US" sz="1050" dirty="0">
+                        <a:latin typeface="Meiryo" charset="0"/>
+                        <a:ea typeface="Meiryo" charset="0"/>
+                        <a:cs typeface="Meiryo" charset="0"/>
+                      </a:endParaRPr>
+                    </a:p>
+                    <a:p>
+                      <a:pPr algn="ctr" indent="0" marL="0">
+                        <a:buNone/>
+                      </a:pPr>
+                      <a:r>
+                        <a:rPr lang="en-US" sz="1050" dirty="0">
+                          <a:solidFill>
+                            <a:srgbClr val="1B2233"/>
+                          </a:solidFill>
+                          <a:latin typeface="Meiryo" pitchFamily="34" charset="0"/>
+                          <a:ea typeface="Meiryo" pitchFamily="34" charset="-122"/>
+                          <a:cs typeface="Meiryo" pitchFamily="34" charset="-120"/>
+                        </a:rPr>
+                        <a:t>（在庫品）</a:t>
+                      </a:r>
+                      <a:endParaRPr lang="en-US" sz="1050" dirty="0">
                         <a:latin typeface="Meiryo" charset="0"/>
                         <a:ea typeface="Meiryo" charset="0"/>
                         <a:cs typeface="Meiryo" charset="0"/>
@@ -12376,7 +15988,7 @@
                   </a:tcPr>
                 </a:tc>
               </a:tr>
-              <a:tr h="457200">
+              <a:tr h="384048">
                 <a:tc>
                   <a:txBody>
                     <a:bodyPr/>
@@ -12386,7 +15998,7 @@
                         <a:buNone/>
                       </a:pPr>
                       <a:r>
-                        <a:rPr lang="en-US" sz="1100" b="1" dirty="0">
+                        <a:rPr lang="en-US" sz="1050" b="1" dirty="0">
                           <a:solidFill>
                             <a:srgbClr val="1E2761"/>
                           </a:solidFill>
@@ -12396,7 +16008,7 @@
                         </a:rPr>
                         <a:t>デザイン自由度</a:t>
                       </a:r>
-                      <a:endParaRPr lang="en-US" sz="1100" dirty="0">
+                      <a:endParaRPr lang="en-US" sz="1050" dirty="0">
                         <a:latin typeface="Meiryo" charset="0"/>
                         <a:ea typeface="Meiryo" charset="0"/>
                         <a:cs typeface="Meiryo" charset="0"/>
@@ -12454,7 +16066,7 @@
                         <a:buNone/>
                       </a:pPr>
                       <a:r>
-                        <a:rPr lang="en-US" sz="1100" dirty="0">
+                        <a:rPr lang="en-US" sz="1050" dirty="0">
                           <a:solidFill>
                             <a:srgbClr val="1B2233"/>
                           </a:solidFill>
@@ -12464,7 +16076,7 @@
                         </a:rPr>
                         <a:t>◎ 型・素材から設計</a:t>
                       </a:r>
-                      <a:endParaRPr lang="en-US" sz="1100" dirty="0">
+                      <a:endParaRPr lang="en-US" sz="1050" dirty="0">
                         <a:latin typeface="Meiryo" charset="0"/>
                         <a:ea typeface="Meiryo" charset="0"/>
                         <a:cs typeface="Meiryo" charset="0"/>
@@ -12522,7 +16134,7 @@
                         <a:buNone/>
                       </a:pPr>
                       <a:r>
-                        <a:rPr lang="en-US" sz="1100" dirty="0">
+                        <a:rPr lang="en-US" sz="1050" dirty="0">
                           <a:solidFill>
                             <a:srgbClr val="1B2233"/>
                           </a:solidFill>
@@ -12532,7 +16144,7 @@
                         </a:rPr>
                         <a:t>○ 既存型をベースに調整</a:t>
                       </a:r>
-                      <a:endParaRPr lang="en-US" sz="1100" dirty="0">
+                      <a:endParaRPr lang="en-US" sz="1050" dirty="0">
                         <a:latin typeface="Meiryo" charset="0"/>
                         <a:ea typeface="Meiryo" charset="0"/>
                         <a:cs typeface="Meiryo" charset="0"/>
@@ -12590,7 +16202,7 @@
                         <a:buNone/>
                       </a:pPr>
                       <a:r>
-                        <a:rPr lang="en-US" sz="1100" dirty="0">
+                        <a:rPr lang="en-US" sz="1050" dirty="0">
                           <a:solidFill>
                             <a:srgbClr val="1B2233"/>
                           </a:solidFill>
@@ -12600,7 +16212,7 @@
                         </a:rPr>
                         <a:t>△ 既製デザイン＋ロゴのみ</a:t>
                       </a:r>
-                      <a:endParaRPr lang="en-US" sz="1100" dirty="0">
+                      <a:endParaRPr lang="en-US" sz="1050" dirty="0">
                         <a:latin typeface="Meiryo" charset="0"/>
                         <a:ea typeface="Meiryo" charset="0"/>
                         <a:cs typeface="Meiryo" charset="0"/>
@@ -12650,7 +16262,7 @@
                   </a:tcPr>
                 </a:tc>
               </a:tr>
-              <a:tr h="457200">
+              <a:tr h="384048">
                 <a:tc>
                   <a:txBody>
                     <a:bodyPr/>
@@ -12660,7 +16272,7 @@
                         <a:buNone/>
                       </a:pPr>
                       <a:r>
-                        <a:rPr lang="en-US" sz="1100" b="1" dirty="0">
+                        <a:rPr lang="en-US" sz="1050" b="1" dirty="0">
                           <a:solidFill>
                             <a:srgbClr val="1E2761"/>
                           </a:solidFill>
@@ -12670,7 +16282,7 @@
                         </a:rPr>
                         <a:t>初期費用</a:t>
                       </a:r>
-                      <a:endParaRPr lang="en-US" sz="1100" dirty="0">
+                      <a:endParaRPr lang="en-US" sz="1050" dirty="0">
                         <a:latin typeface="Meiryo" charset="0"/>
                         <a:ea typeface="Meiryo" charset="0"/>
                         <a:cs typeface="Meiryo" charset="0"/>
@@ -12728,7 +16340,7 @@
                         <a:buNone/>
                       </a:pPr>
                       <a:r>
-                        <a:rPr lang="en-US" sz="1100" dirty="0">
+                        <a:rPr lang="en-US" sz="1050" dirty="0">
                           <a:solidFill>
                             <a:srgbClr val="1B2233"/>
                           </a:solidFill>
@@ -12738,7 +16350,7 @@
                         </a:rPr>
                         <a:t>型代・サンプル代が発生</a:t>
                       </a:r>
-                      <a:endParaRPr lang="en-US" sz="1100" dirty="0">
+                      <a:endParaRPr lang="en-US" sz="1050" dirty="0">
                         <a:latin typeface="Meiryo" charset="0"/>
                         <a:ea typeface="Meiryo" charset="0"/>
                         <a:cs typeface="Meiryo" charset="0"/>
@@ -12796,7 +16408,7 @@
                         <a:buNone/>
                       </a:pPr>
                       <a:r>
-                        <a:rPr lang="en-US" sz="1100" dirty="0">
+                        <a:rPr lang="en-US" sz="1050" dirty="0">
                           <a:solidFill>
                             <a:srgbClr val="1B2233"/>
                           </a:solidFill>
@@ -12806,7 +16418,7 @@
                         </a:rPr>
                         <a:t>サンプル代が発生</a:t>
                       </a:r>
-                      <a:endParaRPr lang="en-US" sz="1100" dirty="0">
+                      <a:endParaRPr lang="en-US" sz="1050" dirty="0">
                         <a:latin typeface="Meiryo" charset="0"/>
                         <a:ea typeface="Meiryo" charset="0"/>
                         <a:cs typeface="Meiryo" charset="0"/>
@@ -12864,7 +16476,7 @@
                         <a:buNone/>
                       </a:pPr>
                       <a:r>
-                        <a:rPr lang="en-US" sz="1100" dirty="0">
+                        <a:rPr lang="en-US" sz="1050" dirty="0">
                           <a:solidFill>
                             <a:srgbClr val="1B2233"/>
                           </a:solidFill>
@@ -12874,7 +16486,7 @@
                         </a:rPr>
                         <a:t>ほぼ不要</a:t>
                       </a:r>
-                      <a:endParaRPr lang="en-US" sz="1100" dirty="0">
+                      <a:endParaRPr lang="en-US" sz="1050" dirty="0">
                         <a:latin typeface="Meiryo" charset="0"/>
                         <a:ea typeface="Meiryo" charset="0"/>
                         <a:cs typeface="Meiryo" charset="0"/>
@@ -12924,7 +16536,7 @@
                   </a:tcPr>
                 </a:tc>
               </a:tr>
-              <a:tr h="457200">
+              <a:tr h="384048">
                 <a:tc>
                   <a:txBody>
                     <a:bodyPr/>
@@ -12934,7 +16546,7 @@
                         <a:buNone/>
                       </a:pPr>
                       <a:r>
-                        <a:rPr lang="en-US" sz="1100" b="1" dirty="0">
+                        <a:rPr lang="en-US" sz="1050" b="1" dirty="0">
                           <a:solidFill>
                             <a:srgbClr val="1E2761"/>
                           </a:solidFill>
@@ -12944,7 +16556,7 @@
                         </a:rPr>
                         <a:t>向くケース</a:t>
                       </a:r>
-                      <a:endParaRPr lang="en-US" sz="1100" dirty="0">
+                      <a:endParaRPr lang="en-US" sz="1050" dirty="0">
                         <a:latin typeface="Meiryo" charset="0"/>
                         <a:ea typeface="Meiryo" charset="0"/>
                         <a:cs typeface="Meiryo" charset="0"/>
@@ -13002,7 +16614,7 @@
                         <a:buNone/>
                       </a:pPr>
                       <a:r>
-                        <a:rPr lang="en-US" sz="1100" dirty="0">
+                        <a:rPr lang="en-US" sz="1050" dirty="0">
                           <a:solidFill>
                             <a:srgbClr val="1B2233"/>
                           </a:solidFill>
@@ -13012,7 +16624,7 @@
                         </a:rPr>
                         <a:t>全社刷新・長期運用</a:t>
                       </a:r>
-                      <a:endParaRPr lang="en-US" sz="1100" dirty="0">
+                      <a:endParaRPr lang="en-US" sz="1050" dirty="0">
                         <a:latin typeface="Meiryo" charset="0"/>
                         <a:ea typeface="Meiryo" charset="0"/>
                         <a:cs typeface="Meiryo" charset="0"/>
@@ -13070,7 +16682,7 @@
                         <a:buNone/>
                       </a:pPr>
                       <a:r>
-                        <a:rPr lang="en-US" sz="1100" dirty="0">
+                        <a:rPr lang="en-US" sz="1050" dirty="0">
                           <a:solidFill>
                             <a:srgbClr val="1B2233"/>
                           </a:solidFill>
@@ -13080,7 +16692,7 @@
                         </a:rPr>
                         <a:t>少人数でも独自性を出したい</a:t>
                       </a:r>
-                      <a:endParaRPr lang="en-US" sz="1100" dirty="0">
+                      <a:endParaRPr lang="en-US" sz="1050" dirty="0">
                         <a:latin typeface="Meiryo" charset="0"/>
                         <a:ea typeface="Meiryo" charset="0"/>
                         <a:cs typeface="Meiryo" charset="0"/>
@@ -13138,7 +16750,7 @@
                         <a:buNone/>
                       </a:pPr>
                       <a:r>
-                        <a:rPr lang="en-US" sz="1100" dirty="0">
+                        <a:rPr lang="en-US" sz="1050" dirty="0">
                           <a:solidFill>
                             <a:srgbClr val="1B2233"/>
                           </a:solidFill>
@@ -13148,7 +16760,7 @@
                         </a:rPr>
                         <a:t>早く・安く始めたい</a:t>
                       </a:r>
-                      <a:endParaRPr lang="en-US" sz="1100" dirty="0">
+                      <a:endParaRPr lang="en-US" sz="1050" dirty="0">
                         <a:latin typeface="Meiryo" charset="0"/>
                         <a:ea typeface="Meiryo" charset="0"/>
                         <a:cs typeface="Meiryo" charset="0"/>
@@ -13210,12 +16822,12 @@
         </p:nvSpPr>
         <p:spPr>
           <a:xfrm>
-            <a:off x="548640" y="5440680"/>
-            <a:ext cx="11064240" cy="868680"/>
+            <a:off x="548640" y="5349240"/>
+            <a:ext cx="11064240" cy="960120"/>
           </a:xfrm>
           <a:prstGeom prst="roundRect">
             <a:avLst>
-              <a:gd name="adj" fmla="val 8421"/>
+              <a:gd name="adj" fmla="val 7619"/>
             </a:avLst>
           </a:prstGeom>
           <a:solidFill>
@@ -13237,8 +16849,8 @@
         </p:nvSpPr>
         <p:spPr>
           <a:xfrm>
-            <a:off x="868680" y="5440680"/>
-            <a:ext cx="10424160" cy="868680"/>
+            <a:off x="868680" y="5349240"/>
+            <a:ext cx="10424160" cy="960120"/>
           </a:xfrm>
           <a:prstGeom prst="rect">
             <a:avLst/>
@@ -13257,7 +16869,7 @@
               <a:buNone/>
             </a:pPr>
             <a:r>
-              <a:rPr lang="en-US" sz="1250" dirty="0">
+              <a:rPr lang="en-US" sz="1200" dirty="0">
                 <a:solidFill>
                   <a:srgbClr val="8A5A12"/>
                 </a:solidFill>
@@ -13265,9 +16877,9 @@
                 <a:ea typeface="Meiryo" pitchFamily="34" charset="-122"/>
                 <a:cs typeface="Meiryo" pitchFamily="34" charset="-120"/>
               </a:rPr>
-              <a:t>読み取り：30名規模なら①②はロット条件をクリアできるが、納期が2〜5ヶ月かかる。今期中の着用が必要なら③でスタートし、次期に①②へ移行する二段構えが現実的。</a:t>
-            </a:r>
-            <a:endParaRPr lang="en-US" sz="1250" dirty="0"/>
+              <a:t>読み取り：サイトに数値が明記されているのは②の「20着〜」と③のみ。①は価格・ロット・納期とも非公開のため見積が必須。今期中の着用が必要なら③で先行し、次期に①②を検討する二段構えが現実的。</a:t>
+            </a:r>
+            <a:endParaRPr lang="en-US" sz="1200" dirty="0"/>
           </a:p>
         </p:txBody>
       </p:sp>
@@ -13570,8 +17182,8 @@
         </p:nvSpPr>
         <p:spPr>
           <a:xfrm>
-            <a:off x="777240" y="3017520"/>
-            <a:ext cx="1051560" cy="411480"/>
+            <a:off x="777240" y="2999232"/>
+            <a:ext cx="1051560" cy="457200"/>
           </a:xfrm>
           <a:prstGeom prst="rect">
             <a:avLst/>
@@ -13609,8 +17221,8 @@
         </p:nvSpPr>
         <p:spPr>
           <a:xfrm>
-            <a:off x="1828800" y="3017520"/>
-            <a:ext cx="2011680" cy="411480"/>
+            <a:off x="1828800" y="2999232"/>
+            <a:ext cx="2011680" cy="457200"/>
           </a:xfrm>
           <a:prstGeom prst="rect">
             <a:avLst/>
@@ -13624,12 +17236,12 @@
           <a:p>
             <a:pPr indent="0" marL="0">
               <a:lnSpc>
-                <a:spcPts val="1400"/>
+                <a:spcPts val="1300"/>
               </a:lnSpc>
               <a:buNone/>
             </a:pPr>
             <a:r>
-              <a:rPr lang="en-US" sz="1050" b="1" dirty="0">
+              <a:rPr lang="en-US" sz="950" b="1" dirty="0">
                 <a:solidFill>
                   <a:srgbClr val="1E2761"/>
                 </a:solidFill>
@@ -13637,9 +17249,29 @@
                 <a:ea typeface="Meiryo" pitchFamily="34" charset="-122"/>
                 <a:cs typeface="Meiryo" pitchFamily="34" charset="-120"/>
               </a:rPr>
-              <a:t>小ロット5個〜／50本パッケージ</a:t>
-            </a:r>
-            <a:endParaRPr lang="en-US" sz="1050" dirty="0"/>
+              <a:t>サイト全体で5個〜</a:t>
+            </a:r>
+            <a:endParaRPr lang="en-US" sz="950" dirty="0"/>
+          </a:p>
+          <a:p>
+            <a:pPr indent="0" marL="0">
+              <a:lnSpc>
+                <a:spcPts val="1300"/>
+              </a:lnSpc>
+              <a:buNone/>
+            </a:pPr>
+            <a:r>
+              <a:rPr lang="en-US" sz="950" b="1" dirty="0">
+                <a:solidFill>
+                  <a:srgbClr val="1E2761"/>
+                </a:solidFill>
+                <a:latin typeface="Meiryo" pitchFamily="34" charset="0"/>
+                <a:ea typeface="Meiryo" pitchFamily="34" charset="-122"/>
+                <a:cs typeface="Meiryo" pitchFamily="34" charset="-120"/>
+              </a:rPr>
+              <a:t>（ストラップ個別は要確認）</a:t>
+            </a:r>
+            <a:endParaRPr lang="en-US" sz="950" dirty="0"/>
           </a:p>
         </p:txBody>
       </p:sp>
@@ -13651,8 +17283,8 @@
         </p:nvSpPr>
         <p:spPr>
           <a:xfrm>
-            <a:off x="777240" y="3529584"/>
-            <a:ext cx="1051560" cy="411480"/>
+            <a:off x="777240" y="3547872"/>
+            <a:ext cx="1051560" cy="457200"/>
           </a:xfrm>
           <a:prstGeom prst="rect">
             <a:avLst/>
@@ -13690,8 +17322,8 @@
         </p:nvSpPr>
         <p:spPr>
           <a:xfrm>
-            <a:off x="1828800" y="3529584"/>
-            <a:ext cx="2011680" cy="411480"/>
+            <a:off x="1828800" y="3547872"/>
+            <a:ext cx="2011680" cy="457200"/>
           </a:xfrm>
           <a:prstGeom prst="rect">
             <a:avLst/>
@@ -13705,12 +17337,12 @@
           <a:p>
             <a:pPr indent="0" marL="0">
               <a:lnSpc>
-                <a:spcPts val="1400"/>
+                <a:spcPts val="1300"/>
               </a:lnSpc>
               <a:buNone/>
             </a:pPr>
             <a:r>
-              <a:rPr lang="en-US" sz="1050" b="1" dirty="0">
+              <a:rPr lang="en-US" sz="950" b="1" dirty="0">
                 <a:solidFill>
                   <a:srgbClr val="1E2761"/>
                 </a:solidFill>
@@ -13718,9 +17350,9 @@
                 <a:ea typeface="Meiryo" pitchFamily="34" charset="-122"/>
                 <a:cs typeface="Meiryo" pitchFamily="34" charset="-120"/>
               </a:rPr>
-              <a:t>要見積（1色プリント品あり）</a:t>
-            </a:r>
-            <a:endParaRPr lang="en-US" sz="1050" dirty="0"/>
+              <a:t>公表なし（要見積）</a:t>
+            </a:r>
+            <a:endParaRPr lang="en-US" sz="950" dirty="0"/>
           </a:p>
         </p:txBody>
       </p:sp>
@@ -13732,8 +17364,8 @@
         </p:nvSpPr>
         <p:spPr>
           <a:xfrm>
-            <a:off x="777240" y="4041648"/>
-            <a:ext cx="1051560" cy="411480"/>
+            <a:off x="777240" y="4096512"/>
+            <a:ext cx="1051560" cy="457200"/>
           </a:xfrm>
           <a:prstGeom prst="rect">
             <a:avLst/>
@@ -13771,8 +17403,8 @@
         </p:nvSpPr>
         <p:spPr>
           <a:xfrm>
-            <a:off x="1828800" y="4041648"/>
-            <a:ext cx="2011680" cy="411480"/>
+            <a:off x="1828800" y="4096512"/>
+            <a:ext cx="2011680" cy="457200"/>
           </a:xfrm>
           <a:prstGeom prst="rect">
             <a:avLst/>
@@ -13786,12 +17418,12 @@
           <a:p>
             <a:pPr indent="0" marL="0">
               <a:lnSpc>
-                <a:spcPts val="1400"/>
+                <a:spcPts val="1300"/>
               </a:lnSpc>
               <a:buNone/>
             </a:pPr>
             <a:r>
-              <a:rPr lang="en-US" sz="1050" b="1" dirty="0">
+              <a:rPr lang="en-US" sz="950" b="1" dirty="0">
                 <a:solidFill>
                   <a:srgbClr val="1E2761"/>
                 </a:solidFill>
@@ -13799,9 +17431,9 @@
                 <a:ea typeface="Meiryo" pitchFamily="34" charset="-122"/>
                 <a:cs typeface="Meiryo" pitchFamily="34" charset="-120"/>
               </a:rPr>
-              <a:t>要確認（納期交渉可）</a:t>
-            </a:r>
-            <a:endParaRPr lang="en-US" sz="1050" dirty="0"/>
+              <a:t>公表なし（納期交渉可の記載）</a:t>
+            </a:r>
+            <a:endParaRPr lang="en-US" sz="950" dirty="0"/>
           </a:p>
         </p:txBody>
       </p:sp>
@@ -13813,8 +17445,8 @@
         </p:nvSpPr>
         <p:spPr>
           <a:xfrm>
-            <a:off x="777240" y="4617720"/>
-            <a:ext cx="3063240" cy="1280160"/>
+            <a:off x="777240" y="4709160"/>
+            <a:ext cx="3063240" cy="1234440"/>
           </a:xfrm>
           <a:prstGeom prst="rect">
             <a:avLst/>
@@ -14088,8 +17720,8 @@
         </p:nvSpPr>
         <p:spPr>
           <a:xfrm>
-            <a:off x="4544568" y="3017520"/>
-            <a:ext cx="1051560" cy="411480"/>
+            <a:off x="4544568" y="2999232"/>
+            <a:ext cx="1051560" cy="457200"/>
           </a:xfrm>
           <a:prstGeom prst="rect">
             <a:avLst/>
@@ -14127,8 +17759,8 @@
         </p:nvSpPr>
         <p:spPr>
           <a:xfrm>
-            <a:off x="5596128" y="3017520"/>
-            <a:ext cx="2011680" cy="411480"/>
+            <a:off x="5596128" y="2999232"/>
+            <a:ext cx="2011680" cy="457200"/>
           </a:xfrm>
           <a:prstGeom prst="rect">
             <a:avLst/>
@@ -14142,12 +17774,12 @@
           <a:p>
             <a:pPr indent="0" marL="0">
               <a:lnSpc>
-                <a:spcPts val="1400"/>
+                <a:spcPts val="1300"/>
               </a:lnSpc>
               <a:buNone/>
             </a:pPr>
             <a:r>
-              <a:rPr lang="en-US" sz="1050" b="1" dirty="0">
+              <a:rPr lang="en-US" sz="950" b="1" dirty="0">
                 <a:solidFill>
                   <a:srgbClr val="2E5A8C"/>
                 </a:solidFill>
@@ -14157,7 +17789,7 @@
               </a:rPr>
               <a:t>1本〜</a:t>
             </a:r>
-            <a:endParaRPr lang="en-US" sz="1050" dirty="0"/>
+            <a:endParaRPr lang="en-US" sz="950" dirty="0"/>
           </a:p>
         </p:txBody>
       </p:sp>
@@ -14169,8 +17801,8 @@
         </p:nvSpPr>
         <p:spPr>
           <a:xfrm>
-            <a:off x="4544568" y="3529584"/>
-            <a:ext cx="1051560" cy="411480"/>
+            <a:off x="4544568" y="3547872"/>
+            <a:ext cx="1051560" cy="457200"/>
           </a:xfrm>
           <a:prstGeom prst="rect">
             <a:avLst/>
@@ -14208,8 +17840,8 @@
         </p:nvSpPr>
         <p:spPr>
           <a:xfrm>
-            <a:off x="5596128" y="3529584"/>
-            <a:ext cx="2011680" cy="411480"/>
+            <a:off x="5596128" y="3547872"/>
+            <a:ext cx="2011680" cy="457200"/>
           </a:xfrm>
           <a:prstGeom prst="rect">
             <a:avLst/>
@@ -14223,12 +17855,12 @@
           <a:p>
             <a:pPr indent="0" marL="0">
               <a:lnSpc>
-                <a:spcPts val="1400"/>
+                <a:spcPts val="1300"/>
               </a:lnSpc>
               <a:buNone/>
             </a:pPr>
             <a:r>
-              <a:rPr lang="en-US" sz="1050" b="1" dirty="0">
+              <a:rPr lang="en-US" sz="950" b="1" dirty="0">
                 <a:solidFill>
                   <a:srgbClr val="2E5A8C"/>
                 </a:solidFill>
@@ -14236,19 +17868,19 @@
                 <a:ea typeface="Meiryo" pitchFamily="34" charset="-122"/>
                 <a:cs typeface="Meiryo" pitchFamily="34" charset="-120"/>
               </a:rPr>
-              <a:t>シルク100本で244円/本〜</a:t>
-            </a:r>
-            <a:endParaRPr lang="en-US" sz="1050" dirty="0"/>
+              <a:t>昇華フルカラー232円〜／シルク137円〜（税込）</a:t>
+            </a:r>
+            <a:endParaRPr lang="en-US" sz="950" dirty="0"/>
           </a:p>
           <a:p>
             <a:pPr indent="0" marL="0">
               <a:lnSpc>
-                <a:spcPts val="1400"/>
+                <a:spcPts val="1300"/>
               </a:lnSpc>
               <a:buNone/>
             </a:pPr>
             <a:r>
-              <a:rPr lang="en-US" sz="1050" b="1" dirty="0">
+              <a:rPr lang="en-US" sz="950" b="1" dirty="0">
                 <a:solidFill>
                   <a:srgbClr val="2E5A8C"/>
                 </a:solidFill>
@@ -14256,9 +17888,9 @@
                 <a:ea typeface="Meiryo" pitchFamily="34" charset="-122"/>
                 <a:cs typeface="Meiryo" pitchFamily="34" charset="-120"/>
               </a:rPr>
-              <a:t>フルカラー昇華も対応</a:t>
-            </a:r>
-            <a:endParaRPr lang="en-US" sz="1050" dirty="0"/>
+              <a:t>10mmナイロン100本＝244円/本</a:t>
+            </a:r>
+            <a:endParaRPr lang="en-US" sz="950" dirty="0"/>
           </a:p>
         </p:txBody>
       </p:sp>
@@ -14270,8 +17902,8 @@
         </p:nvSpPr>
         <p:spPr>
           <a:xfrm>
-            <a:off x="4544568" y="4041648"/>
-            <a:ext cx="1051560" cy="411480"/>
+            <a:off x="4544568" y="4096512"/>
+            <a:ext cx="1051560" cy="457200"/>
           </a:xfrm>
           <a:prstGeom prst="rect">
             <a:avLst/>
@@ -14309,8 +17941,8 @@
         </p:nvSpPr>
         <p:spPr>
           <a:xfrm>
-            <a:off x="5596128" y="4041648"/>
-            <a:ext cx="2011680" cy="411480"/>
+            <a:off x="5596128" y="4096512"/>
+            <a:ext cx="2011680" cy="457200"/>
           </a:xfrm>
           <a:prstGeom prst="rect">
             <a:avLst/>
@@ -14324,12 +17956,12 @@
           <a:p>
             <a:pPr indent="0" marL="0">
               <a:lnSpc>
-                <a:spcPts val="1400"/>
+                <a:spcPts val="1300"/>
               </a:lnSpc>
               <a:buNone/>
             </a:pPr>
             <a:r>
-              <a:rPr lang="en-US" sz="1050" b="1" dirty="0">
+              <a:rPr lang="en-US" sz="950" b="1" dirty="0">
                 <a:solidFill>
                   <a:srgbClr val="2E5A8C"/>
                 </a:solidFill>
@@ -14337,9 +17969,9 @@
                 <a:ea typeface="Meiryo" pitchFamily="34" charset="-122"/>
                 <a:cs typeface="Meiryo" pitchFamily="34" charset="-120"/>
               </a:rPr>
-              <a:t>通常6〜9営業日／最短3〜4営業日</a:t>
-            </a:r>
-            <a:endParaRPr lang="en-US" sz="1050" dirty="0"/>
+              <a:t>通常6〜9営業日／特急4〜5営業日</a:t>
+            </a:r>
+            <a:endParaRPr lang="en-US" sz="950" dirty="0"/>
           </a:p>
         </p:txBody>
       </p:sp>
@@ -14351,8 +17983,8 @@
         </p:nvSpPr>
         <p:spPr>
           <a:xfrm>
-            <a:off x="4544568" y="4617720"/>
-            <a:ext cx="3063240" cy="1280160"/>
+            <a:off x="4544568" y="4709160"/>
+            <a:ext cx="3063240" cy="1234440"/>
           </a:xfrm>
           <a:prstGeom prst="rect">
             <a:avLst/>
@@ -14383,7 +18015,7 @@
                 <a:ea typeface="Meiryo" pitchFamily="34" charset="-122"/>
                 <a:cs typeface="Meiryo" pitchFamily="34" charset="-120"/>
               </a:rPr>
-              <a:t>Web上の自動見積で本数・仕様別の金額をその場で確認できる</a:t>
+              <a:t>Web上の自動見積で本数・仕様別の金額とPDF見積書をその場で取得できる</a:t>
             </a:r>
             <a:endParaRPr lang="en-US" sz="1050" dirty="0"/>
           </a:p>
@@ -14407,7 +18039,7 @@
                 <a:ea typeface="Meiryo" pitchFamily="34" charset="-122"/>
                 <a:cs typeface="Meiryo" pitchFamily="34" charset="-120"/>
               </a:rPr>
-              <a:t>ナイロン10/15/20mm、合皮、プレミアムなど素材の選択肢が広い</a:t>
+              <a:t>ナイロン10/15/20mm、ポリエステル、合皮、プレミアムなど選択肢が広い</a:t>
             </a:r>
             <a:endParaRPr lang="en-US" sz="1050" dirty="0"/>
           </a:p>
@@ -14431,7 +18063,7 @@
                 <a:ea typeface="Meiryo" pitchFamily="34" charset="-122"/>
                 <a:cs typeface="Meiryo" pitchFamily="34" charset="-120"/>
               </a:rPr>
-              <a:t>50本以上は無料で試作1本を確認できる案内あり</a:t>
+              <a:t>3案の中で唯一、単価・納期がサイト上で数値として確認できる</a:t>
             </a:r>
             <a:endParaRPr lang="en-US" sz="1050" dirty="0"/>
           </a:p>
@@ -14573,7 +18205,7 @@
                 <a:ea typeface="Meiryo" pitchFamily="34" charset="-122"/>
                 <a:cs typeface="Meiryo" pitchFamily="34" charset="-120"/>
               </a:rPr>
-              <a:t>KANARY／青山ストラップ 他</a:t>
+              <a:t>KANARY／青山ストラップ</a:t>
             </a:r>
             <a:endParaRPr lang="en-US" sz="1500" dirty="0"/>
           </a:p>
@@ -14626,8 +18258,8 @@
         </p:nvSpPr>
         <p:spPr>
           <a:xfrm>
-            <a:off x="8311896" y="3017520"/>
-            <a:ext cx="1051560" cy="411480"/>
+            <a:off x="8311896" y="2999232"/>
+            <a:ext cx="1051560" cy="457200"/>
           </a:xfrm>
           <a:prstGeom prst="rect">
             <a:avLst/>
@@ -14665,8 +18297,8 @@
         </p:nvSpPr>
         <p:spPr>
           <a:xfrm>
-            <a:off x="9363456" y="3017520"/>
-            <a:ext cx="2011680" cy="411480"/>
+            <a:off x="9363456" y="2999232"/>
+            <a:ext cx="2011680" cy="457200"/>
           </a:xfrm>
           <a:prstGeom prst="rect">
             <a:avLst/>
@@ -14680,12 +18312,12 @@
           <a:p>
             <a:pPr indent="0" marL="0">
               <a:lnSpc>
-                <a:spcPts val="1400"/>
+                <a:spcPts val="1300"/>
               </a:lnSpc>
               <a:buNone/>
             </a:pPr>
             <a:r>
-              <a:rPr lang="en-US" sz="1050" b="1" dirty="0">
+              <a:rPr lang="en-US" sz="950" b="1" dirty="0">
                 <a:solidFill>
                   <a:srgbClr val="E39B2E"/>
                 </a:solidFill>
@@ -14693,9 +18325,29 @@
                 <a:ea typeface="Meiryo" pitchFamily="34" charset="-122"/>
                 <a:cs typeface="Meiryo" pitchFamily="34" charset="-120"/>
               </a:rPr>
-              <a:t>100本〜が中心</a:t>
-            </a:r>
-            <a:endParaRPr lang="en-US" sz="1050" dirty="0"/>
+              <a:t>KANARY：昇華は30本〜</a:t>
+            </a:r>
+            <a:endParaRPr lang="en-US" sz="950" dirty="0"/>
+          </a:p>
+          <a:p>
+            <a:pPr indent="0" marL="0">
+              <a:lnSpc>
+                <a:spcPts val="1300"/>
+              </a:lnSpc>
+              <a:buNone/>
+            </a:pPr>
+            <a:r>
+              <a:rPr lang="en-US" sz="950" b="1" dirty="0">
+                <a:solidFill>
+                  <a:srgbClr val="E39B2E"/>
+                </a:solidFill>
+                <a:latin typeface="Meiryo" pitchFamily="34" charset="0"/>
+                <a:ea typeface="Meiryo" pitchFamily="34" charset="-122"/>
+                <a:cs typeface="Meiryo" pitchFamily="34" charset="-120"/>
+              </a:rPr>
+              <a:t>青山：30〜5,000本の枠</a:t>
+            </a:r>
+            <a:endParaRPr lang="en-US" sz="950" dirty="0"/>
           </a:p>
         </p:txBody>
       </p:sp>
@@ -14707,8 +18359,8 @@
         </p:nvSpPr>
         <p:spPr>
           <a:xfrm>
-            <a:off x="8311896" y="3529584"/>
-            <a:ext cx="1051560" cy="411480"/>
+            <a:off x="8311896" y="3547872"/>
+            <a:ext cx="1051560" cy="457200"/>
           </a:xfrm>
           <a:prstGeom prst="rect">
             <a:avLst/>
@@ -14746,8 +18398,8 @@
         </p:nvSpPr>
         <p:spPr>
           <a:xfrm>
-            <a:off x="9363456" y="3529584"/>
-            <a:ext cx="2011680" cy="411480"/>
+            <a:off x="9363456" y="3547872"/>
+            <a:ext cx="2011680" cy="457200"/>
           </a:xfrm>
           <a:prstGeom prst="rect">
             <a:avLst/>
@@ -14761,12 +18413,12 @@
           <a:p>
             <a:pPr indent="0" marL="0">
               <a:lnSpc>
-                <a:spcPts val="1400"/>
+                <a:spcPts val="1300"/>
               </a:lnSpc>
               <a:buNone/>
             </a:pPr>
             <a:r>
-              <a:rPr lang="en-US" sz="1050" b="1" dirty="0">
+              <a:rPr lang="en-US" sz="950" b="1" dirty="0">
                 <a:solidFill>
                   <a:srgbClr val="E39B2E"/>
                 </a:solidFill>
@@ -14774,19 +18426,19 @@
                 <a:ea typeface="Meiryo" pitchFamily="34" charset="-122"/>
                 <a:cs typeface="Meiryo" pitchFamily="34" charset="-120"/>
               </a:rPr>
-              <a:t>昇華100本で650円/本前後</a:t>
-            </a:r>
-            <a:endParaRPr lang="en-US" sz="1050" dirty="0"/>
+              <a:t>青山：大ロットで100円〜</a:t>
+            </a:r>
+            <a:endParaRPr lang="en-US" sz="950" dirty="0"/>
           </a:p>
           <a:p>
             <a:pPr indent="0" marL="0">
               <a:lnSpc>
-                <a:spcPts val="1400"/>
+                <a:spcPts val="1300"/>
               </a:lnSpc>
               <a:buNone/>
             </a:pPr>
             <a:r>
-              <a:rPr lang="en-US" sz="1050" b="1" dirty="0">
+              <a:rPr lang="en-US" sz="950" b="1" dirty="0">
                 <a:solidFill>
                   <a:srgbClr val="E39B2E"/>
                 </a:solidFill>
@@ -14794,9 +18446,9 @@
                 <a:ea typeface="Meiryo" pitchFamily="34" charset="-122"/>
                 <a:cs typeface="Meiryo" pitchFamily="34" charset="-120"/>
               </a:rPr>
-              <a:t>大ロットは150円台〜</a:t>
-            </a:r>
-            <a:endParaRPr lang="en-US" sz="1050" dirty="0"/>
+              <a:t>KANARY：サイトに価格表あり（金具別）</a:t>
+            </a:r>
+            <a:endParaRPr lang="en-US" sz="950" dirty="0"/>
           </a:p>
         </p:txBody>
       </p:sp>
@@ -14808,8 +18460,8 @@
         </p:nvSpPr>
         <p:spPr>
           <a:xfrm>
-            <a:off x="8311896" y="4041648"/>
-            <a:ext cx="1051560" cy="411480"/>
+            <a:off x="8311896" y="4096512"/>
+            <a:ext cx="1051560" cy="457200"/>
           </a:xfrm>
           <a:prstGeom prst="rect">
             <a:avLst/>
@@ -14847,8 +18499,8 @@
         </p:nvSpPr>
         <p:spPr>
           <a:xfrm>
-            <a:off x="9363456" y="4041648"/>
-            <a:ext cx="2011680" cy="411480"/>
+            <a:off x="9363456" y="4096512"/>
+            <a:ext cx="2011680" cy="457200"/>
           </a:xfrm>
           <a:prstGeom prst="rect">
             <a:avLst/>
@@ -14862,12 +18514,12 @@
           <a:p>
             <a:pPr indent="0" marL="0">
               <a:lnSpc>
-                <a:spcPts val="1400"/>
+                <a:spcPts val="1300"/>
               </a:lnSpc>
               <a:buNone/>
             </a:pPr>
             <a:r>
-              <a:rPr lang="en-US" sz="1050" b="1" dirty="0">
+              <a:rPr lang="en-US" sz="950" b="1" dirty="0">
                 <a:solidFill>
                   <a:srgbClr val="E39B2E"/>
                 </a:solidFill>
@@ -14875,9 +18527,9 @@
                 <a:ea typeface="Meiryo" pitchFamily="34" charset="-122"/>
                 <a:cs typeface="Meiryo" pitchFamily="34" charset="-120"/>
               </a:rPr>
-              <a:t>サンプル約1週間＋量産約3週間</a:t>
-            </a:r>
-            <a:endParaRPr lang="en-US" sz="1050" dirty="0"/>
+              <a:t>青山：量産開始から14日目出荷</a:t>
+            </a:r>
+            <a:endParaRPr lang="en-US" sz="950" dirty="0"/>
           </a:p>
         </p:txBody>
       </p:sp>
@@ -14889,8 +18541,8 @@
         </p:nvSpPr>
         <p:spPr>
           <a:xfrm>
-            <a:off x="8311896" y="4617720"/>
-            <a:ext cx="3063240" cy="1280160"/>
+            <a:off x="8311896" y="4709160"/>
+            <a:ext cx="3063240" cy="1234440"/>
           </a:xfrm>
           <a:prstGeom prst="rect">
             <a:avLst/>
@@ -14921,7 +18573,7 @@
                 <a:ea typeface="Meiryo" pitchFamily="34" charset="-122"/>
                 <a:cs typeface="Meiryo" pitchFamily="34" charset="-120"/>
               </a:rPr>
-              <a:t>昇華転写のため製版不要＝版代がかからない業者が多い</a:t>
+              <a:t>昇華転写のため製版不要＝版代がかからない</a:t>
             </a:r>
             <a:endParaRPr lang="en-US" sz="1050" dirty="0"/>
           </a:p>
@@ -17111,11 +20763,11 @@
         <p:spPr>
           <a:xfrm>
             <a:off x="7223760" y="1600200"/>
-            <a:ext cx="4389120" cy="1280160"/>
+            <a:ext cx="4389120" cy="1298448"/>
           </a:xfrm>
           <a:prstGeom prst="roundRect">
             <a:avLst>
-              <a:gd name="adj" fmla="val 4286"/>
+              <a:gd name="adj" fmla="val 4225"/>
             </a:avLst>
           </a:prstGeom>
           <a:solidFill>
@@ -17137,7 +20789,7 @@
         </p:nvSpPr>
         <p:spPr>
           <a:xfrm>
-            <a:off x="7452360" y="1691640"/>
+            <a:off x="7452360" y="1673352"/>
             <a:ext cx="3931920" cy="274320"/>
           </a:xfrm>
           <a:prstGeom prst="rect">
@@ -17176,8 +20828,8 @@
         </p:nvSpPr>
         <p:spPr>
           <a:xfrm>
-            <a:off x="7452360" y="1984248"/>
-            <a:ext cx="3931920" cy="502920"/>
+            <a:off x="7452360" y="1965960"/>
+            <a:ext cx="4023360" cy="548640"/>
           </a:xfrm>
           <a:prstGeom prst="rect">
             <a:avLst/>
@@ -17191,12 +20843,12 @@
           <a:p>
             <a:pPr indent="0" marL="0">
               <a:lnSpc>
-                <a:spcPts val="1500"/>
+                <a:spcPts val="1400"/>
               </a:lnSpc>
               <a:buNone/>
             </a:pPr>
             <a:r>
-              <a:rPr lang="en-US" sz="1050" dirty="0">
+              <a:rPr lang="en-US" sz="950" dirty="0">
                 <a:solidFill>
                   <a:srgbClr val="5A6483"/>
                 </a:solidFill>
@@ -17204,19 +20856,19 @@
                 <a:ea typeface="Meiryo" pitchFamily="34" charset="-122"/>
                 <a:cs typeface="Meiryo" pitchFamily="34" charset="-120"/>
               </a:rPr>
-              <a:t>ジャケット15,000円×30＝45.0万円</a:t>
-            </a:r>
-            <a:endParaRPr lang="en-US" sz="1050" dirty="0"/>
+              <a:t>ジャケット15,000〜18,000円×30＝45.0〜54.0万円</a:t>
+            </a:r>
+            <a:endParaRPr lang="en-US" sz="950" dirty="0"/>
           </a:p>
           <a:p>
             <a:pPr indent="0" marL="0">
               <a:lnSpc>
-                <a:spcPts val="1500"/>
+                <a:spcPts val="1400"/>
               </a:lnSpc>
               <a:buNone/>
             </a:pPr>
             <a:r>
-              <a:rPr lang="en-US" sz="1050" dirty="0">
+              <a:rPr lang="en-US" sz="950" dirty="0">
                 <a:solidFill>
                   <a:srgbClr val="5A6483"/>
                 </a:solidFill>
@@ -17224,9 +20876,9 @@
                 <a:ea typeface="Meiryo" pitchFamily="34" charset="-122"/>
                 <a:cs typeface="Meiryo" pitchFamily="34" charset="-120"/>
               </a:rPr>
-              <a:t>ストラップ500円×50本＝2.5万円</a:t>
-            </a:r>
-            <a:endParaRPr lang="en-US" sz="1050" dirty="0"/>
+              <a:t>ストラップ232円×50本＝1.2万円</a:t>
+            </a:r>
+            <a:endParaRPr lang="en-US" sz="950" dirty="0"/>
           </a:p>
         </p:txBody>
       </p:sp>
@@ -17238,7 +20890,7 @@
         </p:nvSpPr>
         <p:spPr>
           <a:xfrm>
-            <a:off x="7452360" y="2514600"/>
+            <a:off x="7452360" y="2542032"/>
             <a:ext cx="3931920" cy="274320"/>
           </a:xfrm>
           <a:prstGeom prst="rect">
@@ -17263,7 +20915,7 @@
                 <a:ea typeface="Meiryo" pitchFamily="34" charset="-122"/>
                 <a:cs typeface="Meiryo" pitchFamily="34" charset="-120"/>
               </a:rPr>
-              <a:t>約47.5万円＋型代・サンプル代</a:t>
+              <a:t>約46〜55万円＋型代・サンプル代</a:t>
             </a:r>
             <a:endParaRPr lang="en-US" sz="1150" dirty="0"/>
           </a:p>
@@ -17278,11 +20930,11 @@
         <p:spPr>
           <a:xfrm>
             <a:off x="7223760" y="3063240"/>
-            <a:ext cx="4389120" cy="1280160"/>
+            <a:ext cx="4389120" cy="1298448"/>
           </a:xfrm>
           <a:prstGeom prst="roundRect">
             <a:avLst>
-              <a:gd name="adj" fmla="val 4286"/>
+              <a:gd name="adj" fmla="val 4225"/>
             </a:avLst>
           </a:prstGeom>
           <a:solidFill>
@@ -17304,7 +20956,7 @@
         </p:nvSpPr>
         <p:spPr>
           <a:xfrm>
-            <a:off x="7452360" y="3154680"/>
+            <a:off x="7452360" y="3136392"/>
             <a:ext cx="3931920" cy="274320"/>
           </a:xfrm>
           <a:prstGeom prst="rect">
@@ -17343,8 +20995,8 @@
         </p:nvSpPr>
         <p:spPr>
           <a:xfrm>
-            <a:off x="7452360" y="3447288"/>
-            <a:ext cx="3931920" cy="502920"/>
+            <a:off x="7452360" y="3429000"/>
+            <a:ext cx="4023360" cy="548640"/>
           </a:xfrm>
           <a:prstGeom prst="rect">
             <a:avLst/>
@@ -17358,12 +21010,12 @@
           <a:p>
             <a:pPr indent="0" marL="0">
               <a:lnSpc>
-                <a:spcPts val="1500"/>
+                <a:spcPts val="1400"/>
               </a:lnSpc>
               <a:buNone/>
             </a:pPr>
             <a:r>
-              <a:rPr lang="en-US" sz="1050" dirty="0">
+              <a:rPr lang="en-US" sz="950" dirty="0">
                 <a:solidFill>
                   <a:srgbClr val="5A6483"/>
                 </a:solidFill>
@@ -17371,19 +21023,19 @@
                 <a:ea typeface="Meiryo" pitchFamily="34" charset="-122"/>
                 <a:cs typeface="Meiryo" pitchFamily="34" charset="-120"/>
               </a:rPr>
-              <a:t>ジャケット10,000円×30＝30.0万円</a:t>
-            </a:r>
-            <a:endParaRPr lang="en-US" sz="1050" dirty="0"/>
+              <a:t>ジャケット10,000〜15,000円×30＝30.0〜45.0万円</a:t>
+            </a:r>
+            <a:endParaRPr lang="en-US" sz="950" dirty="0"/>
           </a:p>
           <a:p>
             <a:pPr indent="0" marL="0">
               <a:lnSpc>
-                <a:spcPts val="1500"/>
+                <a:spcPts val="1400"/>
               </a:lnSpc>
               <a:buNone/>
             </a:pPr>
             <a:r>
-              <a:rPr lang="en-US" sz="1050" dirty="0">
+              <a:rPr lang="en-US" sz="950" dirty="0">
                 <a:solidFill>
                   <a:srgbClr val="5A6483"/>
                 </a:solidFill>
@@ -17391,9 +21043,9 @@
                 <a:ea typeface="Meiryo" pitchFamily="34" charset="-122"/>
                 <a:cs typeface="Meiryo" pitchFamily="34" charset="-120"/>
               </a:rPr>
-              <a:t>ストラップ350円×50本＝1.8万円</a:t>
-            </a:r>
-            <a:endParaRPr lang="en-US" sz="1050" dirty="0"/>
+              <a:t>※単価は非公開のため仮置き</a:t>
+            </a:r>
+            <a:endParaRPr lang="en-US" sz="950" dirty="0"/>
           </a:p>
         </p:txBody>
       </p:sp>
@@ -17405,7 +21057,7 @@
         </p:nvSpPr>
         <p:spPr>
           <a:xfrm>
-            <a:off x="7452360" y="3977640"/>
+            <a:off x="7452360" y="4005072"/>
             <a:ext cx="3931920" cy="274320"/>
           </a:xfrm>
           <a:prstGeom prst="rect">
@@ -17430,7 +21082,7 @@
                 <a:ea typeface="Meiryo" pitchFamily="34" charset="-122"/>
                 <a:cs typeface="Meiryo" pitchFamily="34" charset="-120"/>
               </a:rPr>
-              <a:t>約31.8万円＋サンプル代</a:t>
+              <a:t>約31〜46万円＋サンプル代</a:t>
             </a:r>
             <a:endParaRPr lang="en-US" sz="1150" dirty="0"/>
           </a:p>
@@ -17445,11 +21097,11 @@
         <p:spPr>
           <a:xfrm>
             <a:off x="7223760" y="4526280"/>
-            <a:ext cx="4389120" cy="1280160"/>
+            <a:ext cx="4389120" cy="1298448"/>
           </a:xfrm>
           <a:prstGeom prst="roundRect">
             <a:avLst>
-              <a:gd name="adj" fmla="val 4286"/>
+              <a:gd name="adj" fmla="val 4225"/>
             </a:avLst>
           </a:prstGeom>
           <a:solidFill>
@@ -17471,7 +21123,7 @@
         </p:nvSpPr>
         <p:spPr>
           <a:xfrm>
-            <a:off x="7452360" y="4617720"/>
+            <a:off x="7452360" y="4599432"/>
             <a:ext cx="3931920" cy="274320"/>
           </a:xfrm>
           <a:prstGeom prst="rect">
@@ -17490,7 +21142,7 @@
             <a:r>
               <a:rPr lang="en-US" sz="1300" b="1" dirty="0">
                 <a:solidFill>
-                  <a:srgbClr val="E39B2E"/>
+                  <a:srgbClr val="B0730F"/>
                 </a:solidFill>
                 <a:latin typeface="Meiryo" pitchFamily="34" charset="0"/>
                 <a:ea typeface="Meiryo" pitchFamily="34" charset="-122"/>
@@ -17510,109 +21162,8 @@
         </p:nvSpPr>
         <p:spPr>
           <a:xfrm>
-            <a:off x="7452360" y="4910328"/>
-            <a:ext cx="3931920" cy="502920"/>
-          </a:xfrm>
-          <a:prstGeom prst="rect">
-            <a:avLst/>
-          </a:prstGeom>
-          <a:noFill/>
-          <a:ln/>
-        </p:spPr>
-        <p:txBody>
-          <a:bodyPr wrap="square" lIns="0" tIns="0" rIns="0" bIns="0" rtlCol="0" anchor="ctr"/>
-          <a:lstStyle/>
-          <a:p>
-            <a:pPr indent="0" marL="0">
-              <a:lnSpc>
-                <a:spcPts val="1500"/>
-              </a:lnSpc>
-              <a:buNone/>
-            </a:pPr>
-            <a:r>
-              <a:rPr lang="en-US" sz="1050" dirty="0">
-                <a:solidFill>
-                  <a:srgbClr val="5A6483"/>
-                </a:solidFill>
-                <a:latin typeface="Meiryo" pitchFamily="34" charset="0"/>
-                <a:ea typeface="Meiryo" pitchFamily="34" charset="-122"/>
-                <a:cs typeface="Meiryo" pitchFamily="34" charset="-120"/>
-              </a:rPr>
-              <a:t>ジャケット5,600円×30＝16.8万円</a:t>
-            </a:r>
-            <a:endParaRPr lang="en-US" sz="1050" dirty="0"/>
-          </a:p>
-          <a:p>
-            <a:pPr indent="0" marL="0">
-              <a:lnSpc>
-                <a:spcPts val="1500"/>
-              </a:lnSpc>
-              <a:buNone/>
-            </a:pPr>
-            <a:r>
-              <a:rPr lang="en-US" sz="1050" dirty="0">
-                <a:solidFill>
-                  <a:srgbClr val="5A6483"/>
-                </a:solidFill>
-                <a:latin typeface="Meiryo" pitchFamily="34" charset="0"/>
-                <a:ea typeface="Meiryo" pitchFamily="34" charset="-122"/>
-                <a:cs typeface="Meiryo" pitchFamily="34" charset="-120"/>
-              </a:rPr>
-              <a:t>ストラップ250円×50本＝1.3万円</a:t>
-            </a:r>
-            <a:endParaRPr lang="en-US" sz="1050" dirty="0"/>
-          </a:p>
-        </p:txBody>
-      </p:sp>
-      <p:sp>
-        <p:nvSpPr>
-          <p:cNvPr id="16" name="Text 13"/>
-          <p:cNvSpPr txBox="1"/>
-          <p:nvPr/>
-        </p:nvSpPr>
-        <p:spPr>
-          <a:xfrm>
-            <a:off x="7452360" y="5440680"/>
-            <a:ext cx="3931920" cy="274320"/>
-          </a:xfrm>
-          <a:prstGeom prst="rect">
-            <a:avLst/>
-          </a:prstGeom>
-          <a:noFill/>
-          <a:ln/>
-        </p:spPr>
-        <p:txBody>
-          <a:bodyPr wrap="square" lIns="0" tIns="0" rIns="0" bIns="0" rtlCol="0" anchor="ctr"/>
-          <a:lstStyle/>
-          <a:p>
-            <a:pPr indent="0" marL="0">
-              <a:buNone/>
-            </a:pPr>
-            <a:r>
-              <a:rPr lang="en-US" sz="1150" b="1" dirty="0">
-                <a:solidFill>
-                  <a:srgbClr val="1B2233"/>
-                </a:solidFill>
-                <a:latin typeface="Meiryo" pitchFamily="34" charset="0"/>
-                <a:ea typeface="Meiryo" pitchFamily="34" charset="-122"/>
-                <a:cs typeface="Meiryo" pitchFamily="34" charset="-120"/>
-              </a:rPr>
-              <a:t>約18.1万円</a:t>
-            </a:r>
-            <a:endParaRPr lang="en-US" sz="1150" dirty="0"/>
-          </a:p>
-        </p:txBody>
-      </p:sp>
-      <p:sp>
-        <p:nvSpPr>
-          <p:cNvPr id="17" name="Text 14"/>
-          <p:cNvSpPr txBox="1"/>
-          <p:nvPr/>
-        </p:nvSpPr>
-        <p:spPr>
-          <a:xfrm>
-            <a:off x="7223760" y="5989320"/>
-            <a:ext cx="4389120" cy="457200"/>
+            <a:off x="7452360" y="4892040"/>
+            <a:ext cx="4023360" cy="548640"/>
           </a:xfrm>
           <a:prstGeom prst="rect">
             <a:avLst/>
@@ -17639,9 +21190,110 @@
                 <a:ea typeface="Meiryo" pitchFamily="34" charset="-122"/>
                 <a:cs typeface="Meiryo" pitchFamily="34" charset="-120"/>
               </a:rPr>
-              <a:t>※ 各社公開情報・業界相場からの目安。ストラップは最小ロットを50本として試算。送料・型代・サンプル代は別途。</a:t>
+              <a:t>（本体3,000〜8,000円＋刺繍600円）×30＝10.8〜25.8万円</a:t>
             </a:r>
             <a:endParaRPr lang="en-US" sz="950" dirty="0"/>
+          </a:p>
+          <a:p>
+            <a:pPr indent="0" marL="0">
+              <a:lnSpc>
+                <a:spcPts val="1400"/>
+              </a:lnSpc>
+              <a:buNone/>
+            </a:pPr>
+            <a:r>
+              <a:rPr lang="en-US" sz="950" dirty="0">
+                <a:solidFill>
+                  <a:srgbClr val="5A6483"/>
+                </a:solidFill>
+                <a:latin typeface="Meiryo" pitchFamily="34" charset="0"/>
+                <a:ea typeface="Meiryo" pitchFamily="34" charset="-122"/>
+                <a:cs typeface="Meiryo" pitchFamily="34" charset="-120"/>
+              </a:rPr>
+              <a:t>ストラップ232円×50本＝1.2万円</a:t>
+            </a:r>
+            <a:endParaRPr lang="en-US" sz="950" dirty="0"/>
+          </a:p>
+        </p:txBody>
+      </p:sp>
+      <p:sp>
+        <p:nvSpPr>
+          <p:cNvPr id="16" name="Text 13"/>
+          <p:cNvSpPr txBox="1"/>
+          <p:nvPr/>
+        </p:nvSpPr>
+        <p:spPr>
+          <a:xfrm>
+            <a:off x="7452360" y="5468112"/>
+            <a:ext cx="3931920" cy="274320"/>
+          </a:xfrm>
+          <a:prstGeom prst="rect">
+            <a:avLst/>
+          </a:prstGeom>
+          <a:noFill/>
+          <a:ln/>
+        </p:spPr>
+        <p:txBody>
+          <a:bodyPr wrap="square" lIns="0" tIns="0" rIns="0" bIns="0" rtlCol="0" anchor="ctr"/>
+          <a:lstStyle/>
+          <a:p>
+            <a:pPr indent="0" marL="0">
+              <a:buNone/>
+            </a:pPr>
+            <a:r>
+              <a:rPr lang="en-US" sz="1150" b="1" dirty="0">
+                <a:solidFill>
+                  <a:srgbClr val="1B2233"/>
+                </a:solidFill>
+                <a:latin typeface="Meiryo" pitchFamily="34" charset="0"/>
+                <a:ea typeface="Meiryo" pitchFamily="34" charset="-122"/>
+                <a:cs typeface="Meiryo" pitchFamily="34" charset="-120"/>
+              </a:rPr>
+              <a:t>約12〜27万円</a:t>
+            </a:r>
+            <a:endParaRPr lang="en-US" sz="1150" dirty="0"/>
+          </a:p>
+        </p:txBody>
+      </p:sp>
+      <p:sp>
+        <p:nvSpPr>
+          <p:cNvPr id="17" name="Text 14"/>
+          <p:cNvSpPr txBox="1"/>
+          <p:nvPr/>
+        </p:nvSpPr>
+        <p:spPr>
+          <a:xfrm>
+            <a:off x="7223760" y="5943600"/>
+            <a:ext cx="4389120" cy="548640"/>
+          </a:xfrm>
+          <a:prstGeom prst="rect">
+            <a:avLst/>
+          </a:prstGeom>
+          <a:noFill/>
+          <a:ln/>
+        </p:spPr>
+        <p:txBody>
+          <a:bodyPr wrap="square" lIns="0" tIns="0" rIns="0" bIns="0" rtlCol="0" anchor="ctr"/>
+          <a:lstStyle/>
+          <a:p>
+            <a:pPr indent="0" marL="0">
+              <a:lnSpc>
+                <a:spcPts val="1300"/>
+              </a:lnSpc>
+              <a:buNone/>
+            </a:pPr>
+            <a:r>
+              <a:rPr lang="en-US" sz="900" dirty="0">
+                <a:solidFill>
+                  <a:srgbClr val="5A6483"/>
+                </a:solidFill>
+                <a:latin typeface="Meiryo" pitchFamily="34" charset="0"/>
+                <a:ea typeface="Meiryo" pitchFamily="34" charset="-122"/>
+                <a:cs typeface="Meiryo" pitchFamily="34" charset="-120"/>
+              </a:rPr>
+              <a:t>※ ストラップはHOTSTRAPの昇華フルカラー232円/本（税込）で50本発注した場合。②の単価は非公開のため相場からの仮置き。送料・型代・サンプル代は別途。</a:t>
+            </a:r>
+            <a:endParaRPr lang="en-US" sz="900" dirty="0"/>
           </a:p>
         </p:txBody>
       </p:sp>
